--- a/ICS presentation.pptx
+++ b/ICS presentation.pptx
@@ -13,15 +13,15 @@
     <p:sldId id="258" r:id="rId4"/>
     <p:sldId id="259" r:id="rId5"/>
     <p:sldId id="260" r:id="rId6"/>
-    <p:sldId id="265" r:id="rId7"/>
-    <p:sldId id="266" r:id="rId8"/>
-    <p:sldId id="267" r:id="rId9"/>
-    <p:sldId id="268" r:id="rId10"/>
-    <p:sldId id="269" r:id="rId11"/>
-    <p:sldId id="261" r:id="rId12"/>
-    <p:sldId id="262" r:id="rId13"/>
-    <p:sldId id="263" r:id="rId14"/>
-    <p:sldId id="264" r:id="rId15"/>
+    <p:sldId id="261" r:id="rId7"/>
+    <p:sldId id="262" r:id="rId8"/>
+    <p:sldId id="263" r:id="rId9"/>
+    <p:sldId id="264" r:id="rId10"/>
+    <p:sldId id="265" r:id="rId11"/>
+    <p:sldId id="266" r:id="rId12"/>
+    <p:sldId id="267" r:id="rId13"/>
+    <p:sldId id="268" r:id="rId14"/>
+    <p:sldId id="269" r:id="rId15"/>
   </p:sldIdLst>
   <p:sldSz cx="9144000" cy="5143500" type="screen16x9"/>
   <p:notesSz cx="6858000" cy="9144000"/>
@@ -1263,7 +1263,7 @@
         </p:nvSpPr>
         <p:spPr>
           <a:xfrm>
-            <a:off x="381300" y="685800"/>
+            <a:off x="381000" y="685800"/>
             <a:ext cx="6096000" cy="3429000"/>
           </a:xfrm>
           <a:custGeom>
@@ -1367,7 +1367,7 @@
         </p:nvSpPr>
         <p:spPr>
           <a:xfrm>
-            <a:off x="381300" y="685800"/>
+            <a:off x="381000" y="685800"/>
             <a:ext cx="6096000" cy="3429000"/>
           </a:xfrm>
           <a:custGeom>
@@ -1471,7 +1471,7 @@
         </p:nvSpPr>
         <p:spPr>
           <a:xfrm>
-            <a:off x="381300" y="685800"/>
+            <a:off x="381000" y="685800"/>
             <a:ext cx="6096000" cy="3429000"/>
           </a:xfrm>
           <a:custGeom>
@@ -1575,7 +1575,7 @@
         </p:nvSpPr>
         <p:spPr>
           <a:xfrm>
-            <a:off x="381300" y="685800"/>
+            <a:off x="381000" y="685800"/>
             <a:ext cx="6096000" cy="3429000"/>
           </a:xfrm>
           <a:custGeom>
@@ -6573,6 +6573,1920 @@
 </file>
 
 <file path=ppt/slides/slide10.xml><?xml version="1.0" encoding="utf-8"?>
+<p:sld xmlns:a="http://schemas.openxmlformats.org/drawingml/2006/main" xmlns:r="http://schemas.openxmlformats.org/officeDocument/2006/relationships" xmlns:p="http://schemas.openxmlformats.org/presentationml/2006/main">
+  <p:cSld>
+    <p:bg>
+      <p:bgPr>
+        <a:gradFill>
+          <a:gsLst>
+            <a:gs pos="0">
+              <a:schemeClr val="accent5">
+                <a:lumMod val="75000"/>
+              </a:schemeClr>
+            </a:gs>
+            <a:gs pos="83000">
+              <a:schemeClr val="accent1">
+                <a:lumMod val="45000"/>
+                <a:lumOff val="55000"/>
+              </a:schemeClr>
+            </a:gs>
+            <a:gs pos="100000">
+              <a:schemeClr val="accent1">
+                <a:lumMod val="30000"/>
+                <a:lumOff val="70000"/>
+              </a:schemeClr>
+            </a:gs>
+          </a:gsLst>
+          <a:lin ang="5400000" scaled="1"/>
+        </a:gradFill>
+        <a:effectLst/>
+      </p:bgPr>
+    </p:bg>
+    <p:spTree>
+      <p:nvGrpSpPr>
+        <p:cNvPr id="1" name=""/>
+        <p:cNvGrpSpPr/>
+        <p:nvPr/>
+      </p:nvGrpSpPr>
+      <p:grpSpPr>
+        <a:xfrm>
+          <a:off x="0" y="0"/>
+          <a:ext cx="0" cy="0"/>
+          <a:chOff x="0" y="0"/>
+          <a:chExt cx="0" cy="0"/>
+        </a:xfrm>
+      </p:grpSpPr>
+      <p:sp>
+        <p:nvSpPr>
+          <p:cNvPr id="2" name="Shape 0"/>
+          <p:cNvSpPr/>
+          <p:nvPr/>
+        </p:nvSpPr>
+        <p:spPr>
+          <a:xfrm>
+            <a:off x="0" y="1805940"/>
+            <a:ext cx="9144000" cy="1783080"/>
+          </a:xfrm>
+          <a:prstGeom prst="rect">
+            <a:avLst/>
+          </a:prstGeom>
+          <a:solidFill>
+            <a:srgbClr val="0F6E78"/>
+          </a:solidFill>
+          <a:ln w="12700">
+            <a:solidFill>
+              <a:srgbClr val="0F6E78"/>
+            </a:solidFill>
+            <a:prstDash val="solid"/>
+          </a:ln>
+        </p:spPr>
+        <p:txBody>
+          <a:bodyPr/>
+          <a:lstStyle/>
+          <a:p>
+            <a:endParaRPr lang="LID4096"/>
+          </a:p>
+        </p:txBody>
+      </p:sp>
+      <p:sp>
+        <p:nvSpPr>
+          <p:cNvPr id="3" name="Text 1"/>
+          <p:cNvSpPr/>
+          <p:nvPr/>
+        </p:nvSpPr>
+        <p:spPr>
+          <a:xfrm>
+            <a:off x="731520" y="1828800"/>
+            <a:ext cx="7680960" cy="411480"/>
+          </a:xfrm>
+          <a:prstGeom prst="rect">
+            <a:avLst/>
+          </a:prstGeom>
+          <a:noFill/>
+          <a:ln/>
+        </p:spPr>
+        <p:txBody>
+          <a:bodyPr wrap="square" rtlCol="0" anchor="ctr"/>
+          <a:lstStyle/>
+          <a:p>
+            <a:pPr marL="0" indent="0" algn="ctr">
+              <a:buNone/>
+            </a:pPr>
+            <a:endParaRPr lang="en-US" sz="1600" dirty="0"/>
+          </a:p>
+        </p:txBody>
+      </p:sp>
+      <p:sp>
+        <p:nvSpPr>
+          <p:cNvPr id="4" name="Text 2"/>
+          <p:cNvSpPr/>
+          <p:nvPr/>
+        </p:nvSpPr>
+        <p:spPr>
+          <a:xfrm>
+            <a:off x="731520" y="2240280"/>
+            <a:ext cx="7680960" cy="914400"/>
+          </a:xfrm>
+          <a:prstGeom prst="rect">
+            <a:avLst/>
+          </a:prstGeom>
+          <a:noFill/>
+          <a:ln/>
+        </p:spPr>
+        <p:txBody>
+          <a:bodyPr wrap="square" rtlCol="0" anchor="ctr"/>
+          <a:lstStyle/>
+          <a:p>
+            <a:pPr marL="0" indent="0" algn="ctr">
+              <a:buNone/>
+            </a:pPr>
+            <a:r>
+              <a:rPr lang="en-US" sz="3200" b="1" dirty="0">
+                <a:solidFill>
+                  <a:srgbClr val="FFFFFF"/>
+                </a:solidFill>
+              </a:rPr>
+              <a:t>Wireless Standards: Architecture and Protocol Stack</a:t>
+            </a:r>
+            <a:endParaRPr lang="en-US" sz="3200" dirty="0"/>
+          </a:p>
+        </p:txBody>
+      </p:sp>
+      <p:sp>
+        <p:nvSpPr>
+          <p:cNvPr id="5" name="Text 3"/>
+          <p:cNvSpPr/>
+          <p:nvPr/>
+        </p:nvSpPr>
+        <p:spPr>
+          <a:xfrm>
+            <a:off x="731520" y="3653307"/>
+            <a:ext cx="7680960" cy="457200"/>
+          </a:xfrm>
+          <a:prstGeom prst="rect">
+            <a:avLst/>
+          </a:prstGeom>
+          <a:noFill/>
+          <a:ln/>
+        </p:spPr>
+        <p:txBody>
+          <a:bodyPr wrap="square" rtlCol="0" anchor="ctr"/>
+          <a:lstStyle/>
+          <a:p>
+            <a:pPr marL="0" indent="0" algn="ctr">
+              <a:buNone/>
+            </a:pPr>
+            <a:r>
+              <a:rPr lang="en-US" sz="1500" dirty="0">
+                <a:solidFill>
+                  <a:srgbClr val="0F6E78"/>
+                </a:solidFill>
+              </a:rPr>
+              <a:t>Wi-Fi (802.11)   ·   Zigbee (802.15.4)   ·   5G New Radio</a:t>
+            </a:r>
+            <a:endParaRPr lang="en-US" sz="1500" dirty="0"/>
+          </a:p>
+        </p:txBody>
+      </p:sp>
+    </p:spTree>
+  </p:cSld>
+  <p:clrMapOvr>
+    <a:masterClrMapping/>
+  </p:clrMapOvr>
+</p:sld>
+</file>
+
+<file path=ppt/slides/slide11.xml><?xml version="1.0" encoding="utf-8"?>
+<p:sld xmlns:a="http://schemas.openxmlformats.org/drawingml/2006/main" xmlns:r="http://schemas.openxmlformats.org/officeDocument/2006/relationships" xmlns:p="http://schemas.openxmlformats.org/presentationml/2006/main">
+  <p:cSld>
+    <p:bg>
+      <p:bgPr>
+        <a:solidFill>
+          <a:srgbClr val="FFFFFF"/>
+        </a:solidFill>
+        <a:effectLst/>
+      </p:bgPr>
+    </p:bg>
+    <p:spTree>
+      <p:nvGrpSpPr>
+        <p:cNvPr id="1" name=""/>
+        <p:cNvGrpSpPr/>
+        <p:nvPr/>
+      </p:nvGrpSpPr>
+      <p:grpSpPr>
+        <a:xfrm>
+          <a:off x="0" y="0"/>
+          <a:ext cx="0" cy="0"/>
+          <a:chOff x="0" y="0"/>
+          <a:chExt cx="0" cy="0"/>
+        </a:xfrm>
+      </p:grpSpPr>
+      <p:sp>
+        <p:nvSpPr>
+          <p:cNvPr id="2" name="Text 0"/>
+          <p:cNvSpPr/>
+          <p:nvPr/>
+        </p:nvSpPr>
+        <p:spPr>
+          <a:xfrm>
+            <a:off x="411480" y="256032"/>
+            <a:ext cx="8321040" cy="502920"/>
+          </a:xfrm>
+          <a:prstGeom prst="rect">
+            <a:avLst/>
+          </a:prstGeom>
+          <a:noFill/>
+          <a:ln/>
+        </p:spPr>
+        <p:txBody>
+          <a:bodyPr wrap="square" rtlCol="0" anchor="ctr"/>
+          <a:lstStyle/>
+          <a:p>
+            <a:pPr marL="0" indent="0">
+              <a:buNone/>
+            </a:pPr>
+            <a:r>
+              <a:rPr lang="en-US" sz="2300" b="1" dirty="0">
+                <a:solidFill>
+                  <a:srgbClr val="F2A900"/>
+                </a:solidFill>
+                <a:latin typeface="Calibri" pitchFamily="34" charset="0"/>
+                <a:ea typeface="Calibri" pitchFamily="34" charset="-122"/>
+                <a:cs typeface="Calibri" pitchFamily="34" charset="-120"/>
+              </a:rPr>
+              <a:t>3.1  </a:t>
+            </a:r>
+            <a:r>
+              <a:rPr lang="en-US" sz="2300" b="1" dirty="0">
+                <a:solidFill>
+                  <a:srgbClr val="0F6E78"/>
+                </a:solidFill>
+                <a:latin typeface="Calibri" pitchFamily="34" charset="0"/>
+                <a:ea typeface="Calibri" pitchFamily="34" charset="-122"/>
+                <a:cs typeface="Calibri" pitchFamily="34" charset="-120"/>
+              </a:rPr>
+              <a:t>IEEE 802.11 (Wi-Fi)</a:t>
+            </a:r>
+            <a:endParaRPr lang="en-US" sz="2300" dirty="0"/>
+          </a:p>
+        </p:txBody>
+      </p:sp>
+      <p:sp>
+        <p:nvSpPr>
+          <p:cNvPr id="3" name="Shape 1"/>
+          <p:cNvSpPr/>
+          <p:nvPr/>
+        </p:nvSpPr>
+        <p:spPr>
+          <a:xfrm>
+            <a:off x="411480" y="749808"/>
+            <a:ext cx="8321040" cy="22860"/>
+          </a:xfrm>
+          <a:prstGeom prst="rect">
+            <a:avLst/>
+          </a:prstGeom>
+          <a:solidFill>
+            <a:srgbClr val="0F6E78"/>
+          </a:solidFill>
+          <a:ln w="12700">
+            <a:solidFill>
+              <a:srgbClr val="0F6E78"/>
+            </a:solidFill>
+            <a:prstDash val="solid"/>
+          </a:ln>
+        </p:spPr>
+        <p:txBody>
+          <a:bodyPr/>
+          <a:lstStyle/>
+          <a:p>
+            <a:endParaRPr lang="LID4096"/>
+          </a:p>
+        </p:txBody>
+      </p:sp>
+      <p:sp>
+        <p:nvSpPr>
+          <p:cNvPr id="4" name="Text 2"/>
+          <p:cNvSpPr/>
+          <p:nvPr/>
+        </p:nvSpPr>
+        <p:spPr>
+          <a:xfrm>
+            <a:off x="457200" y="1051560"/>
+            <a:ext cx="3931920" cy="2377440"/>
+          </a:xfrm>
+          <a:prstGeom prst="rect">
+            <a:avLst/>
+          </a:prstGeom>
+          <a:noFill/>
+          <a:ln/>
+        </p:spPr>
+        <p:txBody>
+          <a:bodyPr wrap="square" rtlCol="0" anchor="ctr"/>
+          <a:lstStyle/>
+          <a:p>
+            <a:pPr marL="342900" indent="-342900">
+              <a:spcAft>
+                <a:spcPts val="1000"/>
+              </a:spcAft>
+              <a:buSzPct val="100000"/>
+              <a:buChar char="•"/>
+            </a:pPr>
+            <a:r>
+              <a:rPr lang="en-US" sz="1500" dirty="0">
+                <a:solidFill>
+                  <a:srgbClr val="243B40"/>
+                </a:solidFill>
+                <a:latin typeface="Calibri" pitchFamily="34" charset="0"/>
+                <a:ea typeface="Calibri" pitchFamily="34" charset="-122"/>
+                <a:cs typeface="Calibri" pitchFamily="34" charset="-120"/>
+              </a:rPr>
+              <a:t>Operates on 2.4, 5 and 6 GHz bands</a:t>
+            </a:r>
+            <a:endParaRPr lang="en-US" sz="1500" dirty="0"/>
+          </a:p>
+          <a:p>
+            <a:pPr marL="342900" indent="-342900">
+              <a:spcAft>
+                <a:spcPts val="1000"/>
+              </a:spcAft>
+              <a:buSzPct val="100000"/>
+              <a:buChar char="•"/>
+            </a:pPr>
+            <a:r>
+              <a:rPr lang="en-US" sz="1500" dirty="0">
+                <a:solidFill>
+                  <a:srgbClr val="243B40"/>
+                </a:solidFill>
+                <a:latin typeface="Calibri" pitchFamily="34" charset="0"/>
+                <a:ea typeface="Calibri" pitchFamily="34" charset="-122"/>
+                <a:cs typeface="Calibri" pitchFamily="34" charset="-120"/>
+              </a:rPr>
+              <a:t>CSMA/CA for channel access</a:t>
+            </a:r>
+            <a:endParaRPr lang="en-US" sz="1500" dirty="0"/>
+          </a:p>
+          <a:p>
+            <a:pPr marL="342900" indent="-342900">
+              <a:spcAft>
+                <a:spcPts val="1000"/>
+              </a:spcAft>
+              <a:buSzPct val="100000"/>
+              <a:buChar char="•"/>
+            </a:pPr>
+            <a:r>
+              <a:rPr lang="en-US" sz="1500" dirty="0">
+                <a:solidFill>
+                  <a:srgbClr val="243B40"/>
+                </a:solidFill>
+                <a:latin typeface="Calibri" pitchFamily="34" charset="0"/>
+                <a:ea typeface="Calibri" pitchFamily="34" charset="-122"/>
+                <a:cs typeface="Calibri" pitchFamily="34" charset="-120"/>
+              </a:rPr>
+              <a:t>Wi-Fi 6 adds OFDMA and TWT</a:t>
+            </a:r>
+            <a:endParaRPr lang="en-US" sz="1500" dirty="0"/>
+          </a:p>
+          <a:p>
+            <a:pPr marL="342900" indent="-342900">
+              <a:spcAft>
+                <a:spcPts val="1000"/>
+              </a:spcAft>
+              <a:buSzPct val="100000"/>
+              <a:buChar char="•"/>
+            </a:pPr>
+            <a:r>
+              <a:rPr lang="en-US" sz="1500" dirty="0">
+                <a:solidFill>
+                  <a:srgbClr val="243B40"/>
+                </a:solidFill>
+                <a:latin typeface="Calibri" pitchFamily="34" charset="0"/>
+                <a:ea typeface="Calibri" pitchFamily="34" charset="-122"/>
+                <a:cs typeface="Calibri" pitchFamily="34" charset="-120"/>
+              </a:rPr>
+              <a:t>802.11r enables fast roaming for AGVs</a:t>
+            </a:r>
+            <a:endParaRPr lang="en-US" sz="1500" dirty="0"/>
+          </a:p>
+          <a:p>
+            <a:pPr marL="342900" indent="-342900">
+              <a:spcAft>
+                <a:spcPts val="1000"/>
+              </a:spcAft>
+              <a:buSzPct val="100000"/>
+              <a:buChar char="•"/>
+            </a:pPr>
+            <a:r>
+              <a:rPr lang="en-US" sz="1500" dirty="0">
+                <a:solidFill>
+                  <a:srgbClr val="243B40"/>
+                </a:solidFill>
+                <a:latin typeface="Calibri" pitchFamily="34" charset="0"/>
+                <a:ea typeface="Calibri" pitchFamily="34" charset="-122"/>
+                <a:cs typeface="Calibri" pitchFamily="34" charset="-120"/>
+              </a:rPr>
+              <a:t>Throughput up to 9.6 Gbps</a:t>
+            </a:r>
+            <a:endParaRPr lang="en-US" sz="1500" dirty="0"/>
+          </a:p>
+        </p:txBody>
+      </p:sp>
+      <p:sp>
+        <p:nvSpPr>
+          <p:cNvPr id="5" name="Shape 3"/>
+          <p:cNvSpPr/>
+          <p:nvPr/>
+        </p:nvSpPr>
+        <p:spPr>
+          <a:xfrm>
+            <a:off x="457200" y="3703320"/>
+            <a:ext cx="914400" cy="310896"/>
+          </a:xfrm>
+          <a:prstGeom prst="roundRect">
+            <a:avLst>
+              <a:gd name="adj" fmla="val 50000"/>
+            </a:avLst>
+          </a:prstGeom>
+          <a:solidFill>
+            <a:srgbClr val="1C8C99"/>
+          </a:solidFill>
+          <a:ln w="12700">
+            <a:solidFill>
+              <a:srgbClr val="1C8C99"/>
+            </a:solidFill>
+            <a:prstDash val="solid"/>
+          </a:ln>
+        </p:spPr>
+        <p:txBody>
+          <a:bodyPr/>
+          <a:lstStyle/>
+          <a:p>
+            <a:endParaRPr lang="LID4096"/>
+          </a:p>
+        </p:txBody>
+      </p:sp>
+      <p:sp>
+        <p:nvSpPr>
+          <p:cNvPr id="6" name="Text 4"/>
+          <p:cNvSpPr/>
+          <p:nvPr/>
+        </p:nvSpPr>
+        <p:spPr>
+          <a:xfrm>
+            <a:off x="457200" y="3703320"/>
+            <a:ext cx="914400" cy="310896"/>
+          </a:xfrm>
+          <a:prstGeom prst="rect">
+            <a:avLst/>
+          </a:prstGeom>
+          <a:noFill/>
+          <a:ln/>
+        </p:spPr>
+        <p:txBody>
+          <a:bodyPr wrap="square" rtlCol="0" anchor="ctr"/>
+          <a:lstStyle/>
+          <a:p>
+            <a:pPr marL="0" indent="0" algn="ctr">
+              <a:buNone/>
+            </a:pPr>
+            <a:r>
+              <a:rPr lang="en-US" sz="1100" b="1" dirty="0">
+                <a:solidFill>
+                  <a:srgbClr val="FFFFFF"/>
+                </a:solidFill>
+              </a:rPr>
+              <a:t>PROS</a:t>
+            </a:r>
+            <a:endParaRPr lang="en-US" sz="1100" dirty="0"/>
+          </a:p>
+        </p:txBody>
+      </p:sp>
+      <p:sp>
+        <p:nvSpPr>
+          <p:cNvPr id="7" name="Text 5"/>
+          <p:cNvSpPr/>
+          <p:nvPr/>
+        </p:nvSpPr>
+        <p:spPr>
+          <a:xfrm>
+            <a:off x="1463040" y="3703320"/>
+            <a:ext cx="3017520" cy="310896"/>
+          </a:xfrm>
+          <a:prstGeom prst="rect">
+            <a:avLst/>
+          </a:prstGeom>
+          <a:noFill/>
+          <a:ln/>
+        </p:spPr>
+        <p:txBody>
+          <a:bodyPr wrap="square" rtlCol="0" anchor="ctr"/>
+          <a:lstStyle/>
+          <a:p>
+            <a:pPr marL="0" indent="0">
+              <a:buNone/>
+            </a:pPr>
+            <a:r>
+              <a:rPr lang="en-US" sz="1100" dirty="0">
+                <a:solidFill>
+                  <a:srgbClr val="5A6B6E"/>
+                </a:solidFill>
+              </a:rPr>
+              <a:t>High speed, huge ecosystem, native TCP/IP</a:t>
+            </a:r>
+            <a:endParaRPr lang="en-US" sz="1100" dirty="0"/>
+          </a:p>
+        </p:txBody>
+      </p:sp>
+      <p:sp>
+        <p:nvSpPr>
+          <p:cNvPr id="8" name="Shape 6"/>
+          <p:cNvSpPr/>
+          <p:nvPr/>
+        </p:nvSpPr>
+        <p:spPr>
+          <a:xfrm>
+            <a:off x="457200" y="4114800"/>
+            <a:ext cx="914400" cy="310896"/>
+          </a:xfrm>
+          <a:prstGeom prst="roundRect">
+            <a:avLst>
+              <a:gd name="adj" fmla="val 50000"/>
+            </a:avLst>
+          </a:prstGeom>
+          <a:solidFill>
+            <a:srgbClr val="F2A900"/>
+          </a:solidFill>
+          <a:ln w="12700">
+            <a:solidFill>
+              <a:srgbClr val="F2A900"/>
+            </a:solidFill>
+            <a:prstDash val="solid"/>
+          </a:ln>
+        </p:spPr>
+        <p:txBody>
+          <a:bodyPr/>
+          <a:lstStyle/>
+          <a:p>
+            <a:endParaRPr lang="LID4096"/>
+          </a:p>
+        </p:txBody>
+      </p:sp>
+      <p:sp>
+        <p:nvSpPr>
+          <p:cNvPr id="9" name="Text 7"/>
+          <p:cNvSpPr/>
+          <p:nvPr/>
+        </p:nvSpPr>
+        <p:spPr>
+          <a:xfrm>
+            <a:off x="457200" y="4114800"/>
+            <a:ext cx="914400" cy="310896"/>
+          </a:xfrm>
+          <a:prstGeom prst="rect">
+            <a:avLst/>
+          </a:prstGeom>
+          <a:noFill/>
+          <a:ln/>
+        </p:spPr>
+        <p:txBody>
+          <a:bodyPr wrap="square" rtlCol="0" anchor="ctr"/>
+          <a:lstStyle/>
+          <a:p>
+            <a:pPr marL="0" indent="0" algn="ctr">
+              <a:buNone/>
+            </a:pPr>
+            <a:r>
+              <a:rPr lang="en-US" sz="1100" b="1" dirty="0">
+                <a:solidFill>
+                  <a:srgbClr val="FFFFFF"/>
+                </a:solidFill>
+              </a:rPr>
+              <a:t>CONS</a:t>
+            </a:r>
+            <a:endParaRPr lang="en-US" sz="1100" dirty="0"/>
+          </a:p>
+        </p:txBody>
+      </p:sp>
+      <p:sp>
+        <p:nvSpPr>
+          <p:cNvPr id="10" name="Text 8"/>
+          <p:cNvSpPr/>
+          <p:nvPr/>
+        </p:nvSpPr>
+        <p:spPr>
+          <a:xfrm>
+            <a:off x="1463040" y="4114800"/>
+            <a:ext cx="3017520" cy="310896"/>
+          </a:xfrm>
+          <a:prstGeom prst="rect">
+            <a:avLst/>
+          </a:prstGeom>
+          <a:noFill/>
+          <a:ln/>
+        </p:spPr>
+        <p:txBody>
+          <a:bodyPr wrap="square" rtlCol="0" anchor="ctr"/>
+          <a:lstStyle/>
+          <a:p>
+            <a:pPr marL="0" indent="0">
+              <a:buNone/>
+            </a:pPr>
+            <a:r>
+              <a:rPr lang="en-US" sz="1100" dirty="0">
+                <a:solidFill>
+                  <a:srgbClr val="5A6B6E"/>
+                </a:solidFill>
+              </a:rPr>
+              <a:t>Unreliable under load, shared spectrum</a:t>
+            </a:r>
+            <a:endParaRPr lang="en-US" sz="1100" dirty="0"/>
+          </a:p>
+        </p:txBody>
+      </p:sp>
+      <p:sp>
+        <p:nvSpPr>
+          <p:cNvPr id="12" name="Text 10"/>
+          <p:cNvSpPr/>
+          <p:nvPr/>
+        </p:nvSpPr>
+        <p:spPr>
+          <a:xfrm>
+            <a:off x="4754880" y="2377440"/>
+            <a:ext cx="3931920" cy="457200"/>
+          </a:xfrm>
+          <a:prstGeom prst="rect">
+            <a:avLst/>
+          </a:prstGeom>
+          <a:noFill/>
+          <a:ln/>
+        </p:spPr>
+        <p:txBody>
+          <a:bodyPr wrap="square" rtlCol="0" anchor="ctr"/>
+          <a:lstStyle/>
+          <a:p>
+            <a:pPr marL="0" indent="0" algn="ctr">
+              <a:buNone/>
+            </a:pPr>
+            <a:r>
+              <a:rPr lang="en-US" sz="1600" b="1" dirty="0">
+                <a:solidFill>
+                  <a:srgbClr val="1C8C99"/>
+                </a:solidFill>
+              </a:rPr>
+              <a:t>[ IMAGE ]</a:t>
+            </a:r>
+            <a:endParaRPr lang="en-US" sz="1600" dirty="0"/>
+          </a:p>
+        </p:txBody>
+      </p:sp>
+      <p:sp>
+        <p:nvSpPr>
+          <p:cNvPr id="13" name="Text 11"/>
+          <p:cNvSpPr/>
+          <p:nvPr/>
+        </p:nvSpPr>
+        <p:spPr>
+          <a:xfrm>
+            <a:off x="4754880" y="2834640"/>
+            <a:ext cx="3931920" cy="365760"/>
+          </a:xfrm>
+          <a:prstGeom prst="rect">
+            <a:avLst/>
+          </a:prstGeom>
+          <a:noFill/>
+          <a:ln/>
+        </p:spPr>
+        <p:txBody>
+          <a:bodyPr wrap="square" rtlCol="0" anchor="ctr"/>
+          <a:lstStyle/>
+          <a:p>
+            <a:pPr marL="0" indent="0" algn="ctr">
+              <a:buNone/>
+            </a:pPr>
+            <a:r>
+              <a:rPr lang="en-US" sz="1200" i="1" dirty="0">
+                <a:solidFill>
+                  <a:srgbClr val="5A6B6E"/>
+                </a:solidFill>
+              </a:rPr>
+              <a:t>Wi-Fi factory deployment</a:t>
+            </a:r>
+            <a:endParaRPr lang="en-US" sz="1200" dirty="0"/>
+          </a:p>
+        </p:txBody>
+      </p:sp>
+      <p:pic>
+        <p:nvPicPr>
+          <p:cNvPr id="15" name="Picture 14">
+            <a:extLst>
+              <a:ext uri="{FF2B5EF4-FFF2-40B4-BE49-F238E27FC236}">
+                <a16:creationId xmlns:a16="http://schemas.microsoft.com/office/drawing/2014/main" id="{B44A44A6-D7A0-E025-4000-E126C070A500}"/>
+              </a:ext>
+            </a:extLst>
+          </p:cNvPr>
+          <p:cNvPicPr>
+            <a:picLocks noChangeAspect="1"/>
+          </p:cNvPicPr>
+          <p:nvPr/>
+        </p:nvPicPr>
+        <p:blipFill>
+          <a:blip r:embed="rId2"/>
+          <a:stretch>
+            <a:fillRect/>
+          </a:stretch>
+        </p:blipFill>
+        <p:spPr>
+          <a:xfrm>
+            <a:off x="4341897" y="1142420"/>
+            <a:ext cx="4497303" cy="3251272"/>
+          </a:xfrm>
+          <a:prstGeom prst="rect">
+            <a:avLst/>
+          </a:prstGeom>
+        </p:spPr>
+      </p:pic>
+    </p:spTree>
+  </p:cSld>
+  <p:clrMapOvr>
+    <a:masterClrMapping/>
+  </p:clrMapOvr>
+</p:sld>
+</file>
+
+<file path=ppt/slides/slide12.xml><?xml version="1.0" encoding="utf-8"?>
+<p:sld xmlns:a="http://schemas.openxmlformats.org/drawingml/2006/main" xmlns:r="http://schemas.openxmlformats.org/officeDocument/2006/relationships" xmlns:p="http://schemas.openxmlformats.org/presentationml/2006/main">
+  <p:cSld>
+    <p:bg>
+      <p:bgPr>
+        <a:solidFill>
+          <a:srgbClr val="FFFFFF"/>
+        </a:solidFill>
+        <a:effectLst/>
+      </p:bgPr>
+    </p:bg>
+    <p:spTree>
+      <p:nvGrpSpPr>
+        <p:cNvPr id="1" name=""/>
+        <p:cNvGrpSpPr/>
+        <p:nvPr/>
+      </p:nvGrpSpPr>
+      <p:grpSpPr>
+        <a:xfrm>
+          <a:off x="0" y="0"/>
+          <a:ext cx="0" cy="0"/>
+          <a:chOff x="0" y="0"/>
+          <a:chExt cx="0" cy="0"/>
+        </a:xfrm>
+      </p:grpSpPr>
+      <p:sp>
+        <p:nvSpPr>
+          <p:cNvPr id="2" name="Text 0"/>
+          <p:cNvSpPr/>
+          <p:nvPr/>
+        </p:nvSpPr>
+        <p:spPr>
+          <a:xfrm>
+            <a:off x="411480" y="256032"/>
+            <a:ext cx="8321040" cy="502920"/>
+          </a:xfrm>
+          <a:prstGeom prst="rect">
+            <a:avLst/>
+          </a:prstGeom>
+          <a:noFill/>
+          <a:ln/>
+        </p:spPr>
+        <p:txBody>
+          <a:bodyPr wrap="square" rtlCol="0" anchor="ctr"/>
+          <a:lstStyle/>
+          <a:p>
+            <a:pPr marL="0" indent="0">
+              <a:buNone/>
+            </a:pPr>
+            <a:r>
+              <a:rPr lang="en-US" sz="2300" b="1" dirty="0">
+                <a:solidFill>
+                  <a:srgbClr val="F2A900"/>
+                </a:solidFill>
+                <a:latin typeface="Calibri" pitchFamily="34" charset="0"/>
+                <a:ea typeface="Calibri" pitchFamily="34" charset="-122"/>
+                <a:cs typeface="Calibri" pitchFamily="34" charset="-120"/>
+              </a:rPr>
+              <a:t>3.2  </a:t>
+            </a:r>
+            <a:r>
+              <a:rPr lang="en-US" sz="2300" b="1" dirty="0">
+                <a:solidFill>
+                  <a:srgbClr val="0F6E78"/>
+                </a:solidFill>
+                <a:latin typeface="Calibri" pitchFamily="34" charset="0"/>
+                <a:ea typeface="Calibri" pitchFamily="34" charset="-122"/>
+                <a:cs typeface="Calibri" pitchFamily="34" charset="-120"/>
+              </a:rPr>
+              <a:t>IEEE 802.15.4 / Zigbee</a:t>
+            </a:r>
+            <a:endParaRPr lang="en-US" sz="2300" dirty="0"/>
+          </a:p>
+        </p:txBody>
+      </p:sp>
+      <p:sp>
+        <p:nvSpPr>
+          <p:cNvPr id="3" name="Shape 1"/>
+          <p:cNvSpPr/>
+          <p:nvPr/>
+        </p:nvSpPr>
+        <p:spPr>
+          <a:xfrm>
+            <a:off x="411480" y="749808"/>
+            <a:ext cx="8321040" cy="22860"/>
+          </a:xfrm>
+          <a:prstGeom prst="rect">
+            <a:avLst/>
+          </a:prstGeom>
+          <a:solidFill>
+            <a:srgbClr val="0F6E78"/>
+          </a:solidFill>
+          <a:ln w="12700">
+            <a:solidFill>
+              <a:srgbClr val="0F6E78"/>
+            </a:solidFill>
+            <a:prstDash val="solid"/>
+          </a:ln>
+        </p:spPr>
+        <p:txBody>
+          <a:bodyPr/>
+          <a:lstStyle/>
+          <a:p>
+            <a:endParaRPr lang="LID4096"/>
+          </a:p>
+        </p:txBody>
+      </p:sp>
+      <p:sp>
+        <p:nvSpPr>
+          <p:cNvPr id="4" name="Text 2"/>
+          <p:cNvSpPr/>
+          <p:nvPr/>
+        </p:nvSpPr>
+        <p:spPr>
+          <a:xfrm>
+            <a:off x="457200" y="1051560"/>
+            <a:ext cx="3931920" cy="2377440"/>
+          </a:xfrm>
+          <a:prstGeom prst="rect">
+            <a:avLst/>
+          </a:prstGeom>
+          <a:noFill/>
+          <a:ln/>
+        </p:spPr>
+        <p:txBody>
+          <a:bodyPr wrap="square" rtlCol="0" anchor="ctr"/>
+          <a:lstStyle/>
+          <a:p>
+            <a:pPr marL="342900" indent="-342900">
+              <a:spcAft>
+                <a:spcPts val="1000"/>
+              </a:spcAft>
+              <a:buSzPct val="100000"/>
+              <a:buChar char="•"/>
+            </a:pPr>
+            <a:r>
+              <a:rPr lang="en-US" sz="1500" dirty="0">
+                <a:solidFill>
+                  <a:srgbClr val="243B40"/>
+                </a:solidFill>
+                <a:latin typeface="Calibri" pitchFamily="34" charset="0"/>
+                <a:ea typeface="Calibri" pitchFamily="34" charset="-122"/>
+                <a:cs typeface="Calibri" pitchFamily="34" charset="-120"/>
+              </a:rPr>
+              <a:t>Low-power wireless WPAN standard</a:t>
+            </a:r>
+            <a:endParaRPr lang="en-US" sz="1500" dirty="0"/>
+          </a:p>
+          <a:p>
+            <a:pPr marL="342900" indent="-342900">
+              <a:spcAft>
+                <a:spcPts val="1000"/>
+              </a:spcAft>
+              <a:buSzPct val="100000"/>
+              <a:buChar char="•"/>
+            </a:pPr>
+            <a:r>
+              <a:rPr lang="en-US" sz="1500" dirty="0">
+                <a:solidFill>
+                  <a:srgbClr val="243B40"/>
+                </a:solidFill>
+                <a:latin typeface="Calibri" pitchFamily="34" charset="0"/>
+                <a:ea typeface="Calibri" pitchFamily="34" charset="-122"/>
+                <a:cs typeface="Calibri" pitchFamily="34" charset="-120"/>
+              </a:rPr>
+              <a:t>Runs at 2.4 GHz, up to 250 kbps</a:t>
+            </a:r>
+            <a:endParaRPr lang="en-US" sz="1500" dirty="0"/>
+          </a:p>
+          <a:p>
+            <a:pPr marL="342900" indent="-342900">
+              <a:spcAft>
+                <a:spcPts val="1000"/>
+              </a:spcAft>
+              <a:buSzPct val="100000"/>
+              <a:buChar char="•"/>
+            </a:pPr>
+            <a:r>
+              <a:rPr lang="en-US" sz="1500" dirty="0">
+                <a:solidFill>
+                  <a:srgbClr val="243B40"/>
+                </a:solidFill>
+                <a:latin typeface="Calibri" pitchFamily="34" charset="0"/>
+                <a:ea typeface="Calibri" pitchFamily="34" charset="-122"/>
+                <a:cs typeface="Calibri" pitchFamily="34" charset="-120"/>
+              </a:rPr>
+              <a:t>Three roles: Coordinator, Router, End Device</a:t>
+            </a:r>
+            <a:endParaRPr lang="en-US" sz="1500" dirty="0"/>
+          </a:p>
+          <a:p>
+            <a:pPr marL="342900" indent="-342900">
+              <a:spcAft>
+                <a:spcPts val="1000"/>
+              </a:spcAft>
+              <a:buSzPct val="100000"/>
+              <a:buChar char="•"/>
+            </a:pPr>
+            <a:r>
+              <a:rPr lang="en-US" sz="1500" dirty="0">
+                <a:solidFill>
+                  <a:srgbClr val="243B40"/>
+                </a:solidFill>
+                <a:latin typeface="Calibri" pitchFamily="34" charset="0"/>
+                <a:ea typeface="Calibri" pitchFamily="34" charset="-122"/>
+                <a:cs typeface="Calibri" pitchFamily="34" charset="-120"/>
+              </a:rPr>
+              <a:t>Supports star, tree and mesh topologies</a:t>
+            </a:r>
+            <a:endParaRPr lang="en-US" sz="1500" dirty="0"/>
+          </a:p>
+          <a:p>
+            <a:pPr marL="342900" indent="-342900">
+              <a:spcAft>
+                <a:spcPts val="1000"/>
+              </a:spcAft>
+              <a:buSzPct val="100000"/>
+              <a:buChar char="•"/>
+            </a:pPr>
+            <a:r>
+              <a:rPr lang="en-US" sz="1500" dirty="0">
+                <a:solidFill>
+                  <a:srgbClr val="243B40"/>
+                </a:solidFill>
+                <a:latin typeface="Calibri" pitchFamily="34" charset="0"/>
+                <a:ea typeface="Calibri" pitchFamily="34" charset="-122"/>
+                <a:cs typeface="Calibri" pitchFamily="34" charset="-120"/>
+              </a:rPr>
+              <a:t>Battery life of 2 to 5 years</a:t>
+            </a:r>
+            <a:endParaRPr lang="en-US" sz="1500" dirty="0"/>
+          </a:p>
+        </p:txBody>
+      </p:sp>
+      <p:sp>
+        <p:nvSpPr>
+          <p:cNvPr id="5" name="Shape 3"/>
+          <p:cNvSpPr/>
+          <p:nvPr/>
+        </p:nvSpPr>
+        <p:spPr>
+          <a:xfrm>
+            <a:off x="457200" y="3703320"/>
+            <a:ext cx="914400" cy="310896"/>
+          </a:xfrm>
+          <a:prstGeom prst="roundRect">
+            <a:avLst>
+              <a:gd name="adj" fmla="val 50000"/>
+            </a:avLst>
+          </a:prstGeom>
+          <a:solidFill>
+            <a:srgbClr val="1C8C99"/>
+          </a:solidFill>
+          <a:ln w="12700">
+            <a:solidFill>
+              <a:srgbClr val="1C8C99"/>
+            </a:solidFill>
+            <a:prstDash val="solid"/>
+          </a:ln>
+        </p:spPr>
+        <p:txBody>
+          <a:bodyPr/>
+          <a:lstStyle/>
+          <a:p>
+            <a:endParaRPr lang="LID4096"/>
+          </a:p>
+        </p:txBody>
+      </p:sp>
+      <p:sp>
+        <p:nvSpPr>
+          <p:cNvPr id="6" name="Text 4"/>
+          <p:cNvSpPr/>
+          <p:nvPr/>
+        </p:nvSpPr>
+        <p:spPr>
+          <a:xfrm>
+            <a:off x="457200" y="3703320"/>
+            <a:ext cx="914400" cy="310896"/>
+          </a:xfrm>
+          <a:prstGeom prst="rect">
+            <a:avLst/>
+          </a:prstGeom>
+          <a:noFill/>
+          <a:ln/>
+        </p:spPr>
+        <p:txBody>
+          <a:bodyPr wrap="square" rtlCol="0" anchor="ctr"/>
+          <a:lstStyle/>
+          <a:p>
+            <a:pPr marL="0" indent="0" algn="ctr">
+              <a:buNone/>
+            </a:pPr>
+            <a:r>
+              <a:rPr lang="en-US" sz="1100" b="1" dirty="0">
+                <a:solidFill>
+                  <a:srgbClr val="FFFFFF"/>
+                </a:solidFill>
+              </a:rPr>
+              <a:t>PROS</a:t>
+            </a:r>
+            <a:endParaRPr lang="en-US" sz="1100" dirty="0"/>
+          </a:p>
+        </p:txBody>
+      </p:sp>
+      <p:sp>
+        <p:nvSpPr>
+          <p:cNvPr id="7" name="Text 5"/>
+          <p:cNvSpPr/>
+          <p:nvPr/>
+        </p:nvSpPr>
+        <p:spPr>
+          <a:xfrm>
+            <a:off x="1463040" y="3703320"/>
+            <a:ext cx="3017520" cy="310896"/>
+          </a:xfrm>
+          <a:prstGeom prst="rect">
+            <a:avLst/>
+          </a:prstGeom>
+          <a:noFill/>
+          <a:ln/>
+        </p:spPr>
+        <p:txBody>
+          <a:bodyPr wrap="square" rtlCol="0" anchor="ctr"/>
+          <a:lstStyle/>
+          <a:p>
+            <a:pPr marL="0" indent="0">
+              <a:buNone/>
+            </a:pPr>
+            <a:r>
+              <a:rPr lang="en-US" sz="1100" dirty="0">
+                <a:solidFill>
+                  <a:srgbClr val="5A6B6E"/>
+                </a:solidFill>
+              </a:rPr>
+              <a:t>Long battery life, low cost, self-healing mesh</a:t>
+            </a:r>
+            <a:endParaRPr lang="en-US" sz="1100" dirty="0"/>
+          </a:p>
+        </p:txBody>
+      </p:sp>
+      <p:sp>
+        <p:nvSpPr>
+          <p:cNvPr id="8" name="Shape 6"/>
+          <p:cNvSpPr/>
+          <p:nvPr/>
+        </p:nvSpPr>
+        <p:spPr>
+          <a:xfrm>
+            <a:off x="457200" y="4114800"/>
+            <a:ext cx="914400" cy="310896"/>
+          </a:xfrm>
+          <a:prstGeom prst="roundRect">
+            <a:avLst>
+              <a:gd name="adj" fmla="val 50000"/>
+            </a:avLst>
+          </a:prstGeom>
+          <a:solidFill>
+            <a:srgbClr val="F2A900"/>
+          </a:solidFill>
+          <a:ln w="12700">
+            <a:solidFill>
+              <a:srgbClr val="F2A900"/>
+            </a:solidFill>
+            <a:prstDash val="solid"/>
+          </a:ln>
+        </p:spPr>
+        <p:txBody>
+          <a:bodyPr/>
+          <a:lstStyle/>
+          <a:p>
+            <a:endParaRPr lang="LID4096"/>
+          </a:p>
+        </p:txBody>
+      </p:sp>
+      <p:sp>
+        <p:nvSpPr>
+          <p:cNvPr id="9" name="Text 7"/>
+          <p:cNvSpPr/>
+          <p:nvPr/>
+        </p:nvSpPr>
+        <p:spPr>
+          <a:xfrm>
+            <a:off x="457200" y="4114800"/>
+            <a:ext cx="914400" cy="310896"/>
+          </a:xfrm>
+          <a:prstGeom prst="rect">
+            <a:avLst/>
+          </a:prstGeom>
+          <a:noFill/>
+          <a:ln/>
+        </p:spPr>
+        <p:txBody>
+          <a:bodyPr wrap="square" rtlCol="0" anchor="ctr"/>
+          <a:lstStyle/>
+          <a:p>
+            <a:pPr marL="0" indent="0" algn="ctr">
+              <a:buNone/>
+            </a:pPr>
+            <a:r>
+              <a:rPr lang="en-US" sz="1100" b="1" dirty="0">
+                <a:solidFill>
+                  <a:srgbClr val="FFFFFF"/>
+                </a:solidFill>
+              </a:rPr>
+              <a:t>CONS</a:t>
+            </a:r>
+            <a:endParaRPr lang="en-US" sz="1100" dirty="0"/>
+          </a:p>
+        </p:txBody>
+      </p:sp>
+      <p:sp>
+        <p:nvSpPr>
+          <p:cNvPr id="10" name="Text 8"/>
+          <p:cNvSpPr/>
+          <p:nvPr/>
+        </p:nvSpPr>
+        <p:spPr>
+          <a:xfrm>
+            <a:off x="1463040" y="4114800"/>
+            <a:ext cx="3017520" cy="310896"/>
+          </a:xfrm>
+          <a:prstGeom prst="rect">
+            <a:avLst/>
+          </a:prstGeom>
+          <a:noFill/>
+          <a:ln/>
+        </p:spPr>
+        <p:txBody>
+          <a:bodyPr wrap="square" rtlCol="0" anchor="ctr"/>
+          <a:lstStyle/>
+          <a:p>
+            <a:pPr marL="0" indent="0">
+              <a:buNone/>
+            </a:pPr>
+            <a:r>
+              <a:rPr lang="en-US" sz="1100" dirty="0">
+                <a:solidFill>
+                  <a:srgbClr val="5A6B6E"/>
+                </a:solidFill>
+              </a:rPr>
+              <a:t>Low data rate, short range of 10 to 100 m</a:t>
+            </a:r>
+            <a:endParaRPr lang="en-US" sz="1100" dirty="0"/>
+          </a:p>
+        </p:txBody>
+      </p:sp>
+      <p:sp>
+        <p:nvSpPr>
+          <p:cNvPr id="12" name="Text 10"/>
+          <p:cNvSpPr/>
+          <p:nvPr/>
+        </p:nvSpPr>
+        <p:spPr>
+          <a:xfrm>
+            <a:off x="4754880" y="2377440"/>
+            <a:ext cx="3931920" cy="457200"/>
+          </a:xfrm>
+          <a:prstGeom prst="rect">
+            <a:avLst/>
+          </a:prstGeom>
+          <a:noFill/>
+          <a:ln/>
+        </p:spPr>
+        <p:txBody>
+          <a:bodyPr wrap="square" rtlCol="0" anchor="ctr"/>
+          <a:lstStyle/>
+          <a:p>
+            <a:pPr marL="0" indent="0" algn="ctr">
+              <a:buNone/>
+            </a:pPr>
+            <a:r>
+              <a:rPr lang="en-US" sz="1600" b="1" dirty="0">
+                <a:solidFill>
+                  <a:srgbClr val="1C8C99"/>
+                </a:solidFill>
+              </a:rPr>
+              <a:t>[ IMAGE ]</a:t>
+            </a:r>
+            <a:endParaRPr lang="en-US" sz="1600" dirty="0"/>
+          </a:p>
+        </p:txBody>
+      </p:sp>
+      <p:sp>
+        <p:nvSpPr>
+          <p:cNvPr id="13" name="Text 11"/>
+          <p:cNvSpPr/>
+          <p:nvPr/>
+        </p:nvSpPr>
+        <p:spPr>
+          <a:xfrm>
+            <a:off x="4754880" y="2834640"/>
+            <a:ext cx="3931920" cy="365760"/>
+          </a:xfrm>
+          <a:prstGeom prst="rect">
+            <a:avLst/>
+          </a:prstGeom>
+          <a:noFill/>
+          <a:ln/>
+        </p:spPr>
+        <p:txBody>
+          <a:bodyPr wrap="square" rtlCol="0" anchor="ctr"/>
+          <a:lstStyle/>
+          <a:p>
+            <a:pPr marL="0" indent="0" algn="ctr">
+              <a:buNone/>
+            </a:pPr>
+            <a:r>
+              <a:rPr lang="en-US" sz="1200" i="1" dirty="0">
+                <a:solidFill>
+                  <a:srgbClr val="5A6B6E"/>
+                </a:solidFill>
+              </a:rPr>
+              <a:t>Zigbee mesh topology</a:t>
+            </a:r>
+            <a:endParaRPr lang="en-US" sz="1200" dirty="0"/>
+          </a:p>
+        </p:txBody>
+      </p:sp>
+      <p:pic>
+        <p:nvPicPr>
+          <p:cNvPr id="17" name="Picture 16">
+            <a:extLst>
+              <a:ext uri="{FF2B5EF4-FFF2-40B4-BE49-F238E27FC236}">
+                <a16:creationId xmlns:a16="http://schemas.microsoft.com/office/drawing/2014/main" id="{663CC9E1-DB5B-4B4A-1204-28AC4B24230F}"/>
+              </a:ext>
+            </a:extLst>
+          </p:cNvPr>
+          <p:cNvPicPr>
+            <a:picLocks noChangeAspect="1"/>
+          </p:cNvPicPr>
+          <p:nvPr/>
+        </p:nvPicPr>
+        <p:blipFill>
+          <a:blip r:embed="rId2"/>
+          <a:stretch>
+            <a:fillRect/>
+          </a:stretch>
+        </p:blipFill>
+        <p:spPr>
+          <a:xfrm>
+            <a:off x="4389120" y="809481"/>
+            <a:ext cx="4222892" cy="2686680"/>
+          </a:xfrm>
+          <a:prstGeom prst="rect">
+            <a:avLst/>
+          </a:prstGeom>
+        </p:spPr>
+      </p:pic>
+      <p:pic>
+        <p:nvPicPr>
+          <p:cNvPr id="21" name="Picture 20">
+            <a:extLst>
+              <a:ext uri="{FF2B5EF4-FFF2-40B4-BE49-F238E27FC236}">
+                <a16:creationId xmlns:a16="http://schemas.microsoft.com/office/drawing/2014/main" id="{9D2CB063-A753-5430-E1EC-B30CDA9656D2}"/>
+              </a:ext>
+            </a:extLst>
+          </p:cNvPr>
+          <p:cNvPicPr>
+            <a:picLocks noChangeAspect="1"/>
+          </p:cNvPicPr>
+          <p:nvPr/>
+        </p:nvPicPr>
+        <p:blipFill>
+          <a:blip r:embed="rId3"/>
+          <a:srcRect l="9315" r="6176" b="6204"/>
+          <a:stretch>
+            <a:fillRect/>
+          </a:stretch>
+        </p:blipFill>
+        <p:spPr>
+          <a:xfrm>
+            <a:off x="5014173" y="3496161"/>
+            <a:ext cx="2142187" cy="1599664"/>
+          </a:xfrm>
+          <a:prstGeom prst="rect">
+            <a:avLst/>
+          </a:prstGeom>
+        </p:spPr>
+      </p:pic>
+    </p:spTree>
+  </p:cSld>
+  <p:clrMapOvr>
+    <a:masterClrMapping/>
+  </p:clrMapOvr>
+</p:sld>
+</file>
+
+<file path=ppt/slides/slide13.xml><?xml version="1.0" encoding="utf-8"?>
+<p:sld xmlns:a="http://schemas.openxmlformats.org/drawingml/2006/main" xmlns:r="http://schemas.openxmlformats.org/officeDocument/2006/relationships" xmlns:p="http://schemas.openxmlformats.org/presentationml/2006/main">
+  <p:cSld>
+    <p:bg>
+      <p:bgPr>
+        <a:solidFill>
+          <a:srgbClr val="FFFFFF"/>
+        </a:solidFill>
+        <a:effectLst/>
+      </p:bgPr>
+    </p:bg>
+    <p:spTree>
+      <p:nvGrpSpPr>
+        <p:cNvPr id="1" name=""/>
+        <p:cNvGrpSpPr/>
+        <p:nvPr/>
+      </p:nvGrpSpPr>
+      <p:grpSpPr>
+        <a:xfrm>
+          <a:off x="0" y="0"/>
+          <a:ext cx="0" cy="0"/>
+          <a:chOff x="0" y="0"/>
+          <a:chExt cx="0" cy="0"/>
+        </a:xfrm>
+      </p:grpSpPr>
+      <p:sp>
+        <p:nvSpPr>
+          <p:cNvPr id="2" name="Text 0"/>
+          <p:cNvSpPr/>
+          <p:nvPr/>
+        </p:nvSpPr>
+        <p:spPr>
+          <a:xfrm>
+            <a:off x="411480" y="256032"/>
+            <a:ext cx="8321040" cy="502920"/>
+          </a:xfrm>
+          <a:prstGeom prst="rect">
+            <a:avLst/>
+          </a:prstGeom>
+          <a:noFill/>
+          <a:ln/>
+        </p:spPr>
+        <p:txBody>
+          <a:bodyPr wrap="square" rtlCol="0" anchor="ctr"/>
+          <a:lstStyle/>
+          <a:p>
+            <a:pPr marL="0" indent="0">
+              <a:buNone/>
+            </a:pPr>
+            <a:r>
+              <a:rPr lang="en-US" sz="2300" b="1" dirty="0">
+                <a:solidFill>
+                  <a:srgbClr val="F2A900"/>
+                </a:solidFill>
+                <a:latin typeface="Calibri" pitchFamily="34" charset="0"/>
+                <a:ea typeface="Calibri" pitchFamily="34" charset="-122"/>
+                <a:cs typeface="Calibri" pitchFamily="34" charset="-120"/>
+              </a:rPr>
+              <a:t>3.3  </a:t>
+            </a:r>
+            <a:r>
+              <a:rPr lang="en-US" sz="2300" b="1" dirty="0">
+                <a:solidFill>
+                  <a:srgbClr val="0F6E78"/>
+                </a:solidFill>
+                <a:latin typeface="Calibri" pitchFamily="34" charset="0"/>
+                <a:ea typeface="Calibri" pitchFamily="34" charset="-122"/>
+                <a:cs typeface="Calibri" pitchFamily="34" charset="-120"/>
+              </a:rPr>
+              <a:t>5G New Radio (NR)</a:t>
+            </a:r>
+            <a:endParaRPr lang="en-US" sz="2300" dirty="0"/>
+          </a:p>
+        </p:txBody>
+      </p:sp>
+      <p:sp>
+        <p:nvSpPr>
+          <p:cNvPr id="3" name="Shape 1"/>
+          <p:cNvSpPr/>
+          <p:nvPr/>
+        </p:nvSpPr>
+        <p:spPr>
+          <a:xfrm>
+            <a:off x="411480" y="749808"/>
+            <a:ext cx="8321040" cy="22860"/>
+          </a:xfrm>
+          <a:prstGeom prst="rect">
+            <a:avLst/>
+          </a:prstGeom>
+          <a:solidFill>
+            <a:srgbClr val="0F6E78"/>
+          </a:solidFill>
+          <a:ln w="12700">
+            <a:solidFill>
+              <a:srgbClr val="0F6E78"/>
+            </a:solidFill>
+            <a:prstDash val="solid"/>
+          </a:ln>
+        </p:spPr>
+        <p:txBody>
+          <a:bodyPr/>
+          <a:lstStyle/>
+          <a:p>
+            <a:endParaRPr lang="LID4096"/>
+          </a:p>
+        </p:txBody>
+      </p:sp>
+      <p:sp>
+        <p:nvSpPr>
+          <p:cNvPr id="4" name="Text 2"/>
+          <p:cNvSpPr/>
+          <p:nvPr/>
+        </p:nvSpPr>
+        <p:spPr>
+          <a:xfrm>
+            <a:off x="457200" y="1051560"/>
+            <a:ext cx="3931920" cy="2377440"/>
+          </a:xfrm>
+          <a:prstGeom prst="rect">
+            <a:avLst/>
+          </a:prstGeom>
+          <a:noFill/>
+          <a:ln/>
+        </p:spPr>
+        <p:txBody>
+          <a:bodyPr wrap="square" rtlCol="0" anchor="ctr"/>
+          <a:lstStyle/>
+          <a:p>
+            <a:pPr marL="342900" indent="-342900">
+              <a:spcAft>
+                <a:spcPts val="1000"/>
+              </a:spcAft>
+              <a:buSzPct val="100000"/>
+              <a:buChar char="•"/>
+            </a:pPr>
+            <a:r>
+              <a:rPr lang="en-US" sz="1500" dirty="0">
+                <a:solidFill>
+                  <a:srgbClr val="243B40"/>
+                </a:solidFill>
+                <a:latin typeface="Calibri" pitchFamily="34" charset="0"/>
+                <a:ea typeface="Calibri" pitchFamily="34" charset="-122"/>
+                <a:cs typeface="Calibri" pitchFamily="34" charset="-120"/>
+              </a:rPr>
+              <a:t>Standardised by 3GPP, uses licensed bands</a:t>
+            </a:r>
+            <a:endParaRPr lang="en-US" sz="1500" dirty="0"/>
+          </a:p>
+          <a:p>
+            <a:pPr marL="342900" indent="-342900">
+              <a:spcAft>
+                <a:spcPts val="1000"/>
+              </a:spcAft>
+              <a:buSzPct val="100000"/>
+              <a:buChar char="•"/>
+            </a:pPr>
+            <a:r>
+              <a:rPr lang="en-US" sz="1500" dirty="0">
+                <a:solidFill>
+                  <a:srgbClr val="243B40"/>
+                </a:solidFill>
+                <a:latin typeface="Calibri" pitchFamily="34" charset="0"/>
+                <a:ea typeface="Calibri" pitchFamily="34" charset="-122"/>
+                <a:cs typeface="Calibri" pitchFamily="34" charset="-120"/>
+              </a:rPr>
+              <a:t>Three classes: eMBB, mMTC, URLLC</a:t>
+            </a:r>
+            <a:endParaRPr lang="en-US" sz="1500" dirty="0"/>
+          </a:p>
+          <a:p>
+            <a:pPr marL="342900" indent="-342900">
+              <a:spcAft>
+                <a:spcPts val="1000"/>
+              </a:spcAft>
+              <a:buSzPct val="100000"/>
+              <a:buChar char="•"/>
+            </a:pPr>
+            <a:r>
+              <a:rPr lang="en-US" sz="1500" dirty="0">
+                <a:solidFill>
+                  <a:srgbClr val="243B40"/>
+                </a:solidFill>
+                <a:latin typeface="Calibri" pitchFamily="34" charset="0"/>
+                <a:ea typeface="Calibri" pitchFamily="34" charset="-122"/>
+                <a:cs typeface="Calibri" pitchFamily="34" charset="-120"/>
+              </a:rPr>
+              <a:t>URLLC reaches under 1 ms at 99.999%</a:t>
+            </a:r>
+            <a:endParaRPr lang="en-US" sz="1500" dirty="0"/>
+          </a:p>
+          <a:p>
+            <a:pPr marL="342900" indent="-342900">
+              <a:spcAft>
+                <a:spcPts val="1000"/>
+              </a:spcAft>
+              <a:buSzPct val="100000"/>
+              <a:buChar char="•"/>
+            </a:pPr>
+            <a:r>
+              <a:rPr lang="en-US" sz="1500" dirty="0">
+                <a:solidFill>
+                  <a:srgbClr val="243B40"/>
+                </a:solidFill>
+                <a:latin typeface="Calibri" pitchFamily="34" charset="0"/>
+                <a:ea typeface="Calibri" pitchFamily="34" charset="-122"/>
+                <a:cs typeface="Calibri" pitchFamily="34" charset="-120"/>
+              </a:rPr>
+              <a:t>Private campus networks kept on site</a:t>
+            </a:r>
+            <a:endParaRPr lang="en-US" sz="1500" dirty="0"/>
+          </a:p>
+          <a:p>
+            <a:pPr marL="342900" indent="-342900">
+              <a:spcAft>
+                <a:spcPts val="1000"/>
+              </a:spcAft>
+              <a:buSzPct val="100000"/>
+              <a:buChar char="•"/>
+            </a:pPr>
+            <a:r>
+              <a:rPr lang="en-US" sz="1500" dirty="0">
+                <a:solidFill>
+                  <a:srgbClr val="243B40"/>
+                </a:solidFill>
+                <a:latin typeface="Calibri" pitchFamily="34" charset="0"/>
+                <a:ea typeface="Calibri" pitchFamily="34" charset="-122"/>
+                <a:cs typeface="Calibri" pitchFamily="34" charset="-120"/>
+              </a:rPr>
+              <a:t>Acts as a TSN bridge from Release 16</a:t>
+            </a:r>
+            <a:endParaRPr lang="en-US" sz="1500" dirty="0"/>
+          </a:p>
+        </p:txBody>
+      </p:sp>
+      <p:sp>
+        <p:nvSpPr>
+          <p:cNvPr id="5" name="Shape 3"/>
+          <p:cNvSpPr/>
+          <p:nvPr/>
+        </p:nvSpPr>
+        <p:spPr>
+          <a:xfrm>
+            <a:off x="4102032" y="4177370"/>
+            <a:ext cx="914400" cy="310896"/>
+          </a:xfrm>
+          <a:prstGeom prst="roundRect">
+            <a:avLst>
+              <a:gd name="adj" fmla="val 50000"/>
+            </a:avLst>
+          </a:prstGeom>
+          <a:solidFill>
+            <a:srgbClr val="1C8C99"/>
+          </a:solidFill>
+          <a:ln w="12700">
+            <a:solidFill>
+              <a:srgbClr val="1C8C99"/>
+            </a:solidFill>
+            <a:prstDash val="solid"/>
+          </a:ln>
+        </p:spPr>
+        <p:txBody>
+          <a:bodyPr/>
+          <a:lstStyle/>
+          <a:p>
+            <a:endParaRPr lang="LID4096"/>
+          </a:p>
+        </p:txBody>
+      </p:sp>
+      <p:sp>
+        <p:nvSpPr>
+          <p:cNvPr id="6" name="Text 4"/>
+          <p:cNvSpPr/>
+          <p:nvPr/>
+        </p:nvSpPr>
+        <p:spPr>
+          <a:xfrm>
+            <a:off x="4102032" y="4177370"/>
+            <a:ext cx="914400" cy="310896"/>
+          </a:xfrm>
+          <a:prstGeom prst="rect">
+            <a:avLst/>
+          </a:prstGeom>
+          <a:noFill/>
+          <a:ln/>
+        </p:spPr>
+        <p:txBody>
+          <a:bodyPr wrap="square" rtlCol="0" anchor="ctr"/>
+          <a:lstStyle/>
+          <a:p>
+            <a:pPr marL="0" indent="0" algn="ctr">
+              <a:buNone/>
+            </a:pPr>
+            <a:r>
+              <a:rPr lang="en-US" sz="1100" b="1" dirty="0">
+                <a:solidFill>
+                  <a:srgbClr val="FFFFFF"/>
+                </a:solidFill>
+              </a:rPr>
+              <a:t>PROS</a:t>
+            </a:r>
+            <a:endParaRPr lang="en-US" sz="1100" dirty="0"/>
+          </a:p>
+        </p:txBody>
+      </p:sp>
+      <p:sp>
+        <p:nvSpPr>
+          <p:cNvPr id="7" name="Text 5"/>
+          <p:cNvSpPr/>
+          <p:nvPr/>
+        </p:nvSpPr>
+        <p:spPr>
+          <a:xfrm>
+            <a:off x="5035321" y="4232953"/>
+            <a:ext cx="3017520" cy="310896"/>
+          </a:xfrm>
+          <a:prstGeom prst="rect">
+            <a:avLst/>
+          </a:prstGeom>
+          <a:noFill/>
+          <a:ln/>
+        </p:spPr>
+        <p:txBody>
+          <a:bodyPr wrap="square" rtlCol="0" anchor="ctr"/>
+          <a:lstStyle/>
+          <a:p>
+            <a:pPr marL="0" indent="0">
+              <a:buNone/>
+            </a:pPr>
+            <a:r>
+              <a:rPr lang="en-US" sz="1100" dirty="0">
+                <a:solidFill>
+                  <a:srgbClr val="5A6B6E"/>
+                </a:solidFill>
+              </a:rPr>
+              <a:t>Licensed spectrum, deterministic, private networks</a:t>
+            </a:r>
+            <a:endParaRPr lang="en-US" sz="1100" dirty="0"/>
+          </a:p>
+        </p:txBody>
+      </p:sp>
+      <p:sp>
+        <p:nvSpPr>
+          <p:cNvPr id="8" name="Shape 6"/>
+          <p:cNvSpPr/>
+          <p:nvPr/>
+        </p:nvSpPr>
+        <p:spPr>
+          <a:xfrm>
+            <a:off x="4102032" y="4588850"/>
+            <a:ext cx="914400" cy="310896"/>
+          </a:xfrm>
+          <a:prstGeom prst="roundRect">
+            <a:avLst>
+              <a:gd name="adj" fmla="val 50000"/>
+            </a:avLst>
+          </a:prstGeom>
+          <a:solidFill>
+            <a:srgbClr val="F2A900"/>
+          </a:solidFill>
+          <a:ln w="12700">
+            <a:solidFill>
+              <a:srgbClr val="F2A900"/>
+            </a:solidFill>
+            <a:prstDash val="solid"/>
+          </a:ln>
+        </p:spPr>
+        <p:txBody>
+          <a:bodyPr/>
+          <a:lstStyle/>
+          <a:p>
+            <a:endParaRPr lang="LID4096"/>
+          </a:p>
+        </p:txBody>
+      </p:sp>
+      <p:sp>
+        <p:nvSpPr>
+          <p:cNvPr id="9" name="Text 7"/>
+          <p:cNvSpPr/>
+          <p:nvPr/>
+        </p:nvSpPr>
+        <p:spPr>
+          <a:xfrm>
+            <a:off x="4102032" y="4588850"/>
+            <a:ext cx="914400" cy="310896"/>
+          </a:xfrm>
+          <a:prstGeom prst="rect">
+            <a:avLst/>
+          </a:prstGeom>
+          <a:noFill/>
+          <a:ln/>
+        </p:spPr>
+        <p:txBody>
+          <a:bodyPr wrap="square" rtlCol="0" anchor="ctr"/>
+          <a:lstStyle/>
+          <a:p>
+            <a:pPr marL="0" indent="0" algn="ctr">
+              <a:buNone/>
+            </a:pPr>
+            <a:r>
+              <a:rPr lang="en-US" sz="1100" b="1" dirty="0">
+                <a:solidFill>
+                  <a:srgbClr val="FFFFFF"/>
+                </a:solidFill>
+              </a:rPr>
+              <a:t>CONS</a:t>
+            </a:r>
+            <a:endParaRPr lang="en-US" sz="1100" dirty="0"/>
+          </a:p>
+        </p:txBody>
+      </p:sp>
+      <p:sp>
+        <p:nvSpPr>
+          <p:cNvPr id="10" name="Text 8"/>
+          <p:cNvSpPr/>
+          <p:nvPr/>
+        </p:nvSpPr>
+        <p:spPr>
+          <a:xfrm>
+            <a:off x="5016432" y="4599432"/>
+            <a:ext cx="3017520" cy="310896"/>
+          </a:xfrm>
+          <a:prstGeom prst="rect">
+            <a:avLst/>
+          </a:prstGeom>
+          <a:noFill/>
+          <a:ln/>
+        </p:spPr>
+        <p:txBody>
+          <a:bodyPr wrap="square" rtlCol="0" anchor="ctr"/>
+          <a:lstStyle/>
+          <a:p>
+            <a:pPr marL="0" indent="0">
+              <a:buNone/>
+            </a:pPr>
+            <a:r>
+              <a:rPr lang="en-US" sz="1100" dirty="0">
+                <a:solidFill>
+                  <a:srgbClr val="5A6B6E"/>
+                </a:solidFill>
+              </a:rPr>
+              <a:t>Costly, complex, power-hungry</a:t>
+            </a:r>
+            <a:endParaRPr lang="en-US" sz="1100" dirty="0"/>
+          </a:p>
+        </p:txBody>
+      </p:sp>
+      <p:sp>
+        <p:nvSpPr>
+          <p:cNvPr id="12" name="Text 10"/>
+          <p:cNvSpPr/>
+          <p:nvPr/>
+        </p:nvSpPr>
+        <p:spPr>
+          <a:xfrm>
+            <a:off x="4754880" y="2377440"/>
+            <a:ext cx="3931920" cy="457200"/>
+          </a:xfrm>
+          <a:prstGeom prst="rect">
+            <a:avLst/>
+          </a:prstGeom>
+          <a:noFill/>
+          <a:ln/>
+        </p:spPr>
+        <p:txBody>
+          <a:bodyPr wrap="square" rtlCol="0" anchor="ctr"/>
+          <a:lstStyle/>
+          <a:p>
+            <a:pPr marL="0" indent="0" algn="ctr">
+              <a:buNone/>
+            </a:pPr>
+            <a:r>
+              <a:rPr lang="en-US" sz="1600" b="1" dirty="0">
+                <a:solidFill>
+                  <a:srgbClr val="1C8C99"/>
+                </a:solidFill>
+              </a:rPr>
+              <a:t>[ IMAGE ]</a:t>
+            </a:r>
+            <a:endParaRPr lang="en-US" sz="1600" dirty="0"/>
+          </a:p>
+        </p:txBody>
+      </p:sp>
+      <p:sp>
+        <p:nvSpPr>
+          <p:cNvPr id="13" name="Text 11"/>
+          <p:cNvSpPr/>
+          <p:nvPr/>
+        </p:nvSpPr>
+        <p:spPr>
+          <a:xfrm>
+            <a:off x="4754880" y="2834640"/>
+            <a:ext cx="3931920" cy="365760"/>
+          </a:xfrm>
+          <a:prstGeom prst="rect">
+            <a:avLst/>
+          </a:prstGeom>
+          <a:noFill/>
+          <a:ln/>
+        </p:spPr>
+        <p:txBody>
+          <a:bodyPr wrap="square" rtlCol="0" anchor="ctr"/>
+          <a:lstStyle/>
+          <a:p>
+            <a:pPr marL="0" indent="0" algn="ctr">
+              <a:buNone/>
+            </a:pPr>
+            <a:r>
+              <a:rPr lang="en-US" sz="1200" i="1" dirty="0">
+                <a:solidFill>
+                  <a:srgbClr val="5A6B6E"/>
+                </a:solidFill>
+              </a:rPr>
+              <a:t>Private 5G campus network</a:t>
+            </a:r>
+            <a:endParaRPr lang="en-US" sz="1200" dirty="0"/>
+          </a:p>
+        </p:txBody>
+      </p:sp>
+      <p:pic>
+        <p:nvPicPr>
+          <p:cNvPr id="15" name="Picture 14">
+            <a:extLst>
+              <a:ext uri="{FF2B5EF4-FFF2-40B4-BE49-F238E27FC236}">
+                <a16:creationId xmlns:a16="http://schemas.microsoft.com/office/drawing/2014/main" id="{E92D6B4C-C39B-0CAB-876F-80841433349D}"/>
+              </a:ext>
+            </a:extLst>
+          </p:cNvPr>
+          <p:cNvPicPr>
+            <a:picLocks noChangeAspect="1"/>
+          </p:cNvPicPr>
+          <p:nvPr/>
+        </p:nvPicPr>
+        <p:blipFill>
+          <a:blip r:embed="rId2"/>
+          <a:stretch>
+            <a:fillRect/>
+          </a:stretch>
+        </p:blipFill>
+        <p:spPr>
+          <a:xfrm>
+            <a:off x="4348376" y="1382332"/>
+            <a:ext cx="4271344" cy="2553935"/>
+          </a:xfrm>
+          <a:prstGeom prst="rect">
+            <a:avLst/>
+          </a:prstGeom>
+        </p:spPr>
+      </p:pic>
+      <p:pic>
+        <p:nvPicPr>
+          <p:cNvPr id="16" name="Picture 15" descr="5G new radio fixed wireless access portfolio introduced | Electronics360">
+            <a:extLst>
+              <a:ext uri="{FF2B5EF4-FFF2-40B4-BE49-F238E27FC236}">
+                <a16:creationId xmlns:a16="http://schemas.microsoft.com/office/drawing/2014/main" id="{63608C8A-354F-ABB3-3CE2-F97A1CFD8CFC}"/>
+              </a:ext>
+            </a:extLst>
+          </p:cNvPr>
+          <p:cNvPicPr>
+            <a:picLocks noChangeAspect="1"/>
+          </p:cNvPicPr>
+          <p:nvPr/>
+        </p:nvPicPr>
+        <p:blipFill>
+          <a:blip r:embed="rId3"/>
+          <a:srcRect l="27411" t="7198" r="19975" b="4925"/>
+          <a:stretch>
+            <a:fillRect/>
+          </a:stretch>
+        </p:blipFill>
+        <p:spPr>
+          <a:xfrm rot="21441899">
+            <a:off x="976344" y="3087595"/>
+            <a:ext cx="2201523" cy="1890086"/>
+          </a:xfrm>
+          <a:prstGeom prst="rect">
+            <a:avLst/>
+          </a:prstGeom>
+        </p:spPr>
+      </p:pic>
+    </p:spTree>
+  </p:cSld>
+  <p:clrMapOvr>
+    <a:masterClrMapping/>
+  </p:clrMapOvr>
+</p:sld>
+</file>
+
+<file path=ppt/slides/slide14.xml><?xml version="1.0" encoding="utf-8"?>
 <p:sld xmlns:a="http://schemas.openxmlformats.org/drawingml/2006/main" xmlns:r="http://schemas.openxmlformats.org/officeDocument/2006/relationships" xmlns:p="http://schemas.openxmlformats.org/presentationml/2006/main">
   <p:cSld>
     <p:bg>
@@ -8332,1444 +10246,6 @@
 </p:sld>
 </file>
 
-<file path=ppt/slides/slide11.xml><?xml version="1.0" encoding="utf-8"?>
-<p:sld xmlns:a="http://schemas.openxmlformats.org/drawingml/2006/main" xmlns:r="http://schemas.openxmlformats.org/officeDocument/2006/relationships" xmlns:p="http://schemas.openxmlformats.org/presentationml/2006/main">
-  <p:cSld>
-    <p:bg>
-      <p:bgPr>
-        <a:solidFill>
-          <a:srgbClr val="1A56A0"/>
-        </a:solidFill>
-        <a:effectLst/>
-      </p:bgPr>
-    </p:bg>
-    <p:spTree>
-      <p:nvGrpSpPr>
-        <p:cNvPr id="1" name="Shape 139"/>
-        <p:cNvGrpSpPr/>
-        <p:nvPr/>
-      </p:nvGrpSpPr>
-      <p:grpSpPr>
-        <a:xfrm>
-          <a:off x="0" y="0"/>
-          <a:ext cx="0" cy="0"/>
-          <a:chOff x="0" y="0"/>
-          <a:chExt cx="0" cy="0"/>
-        </a:xfrm>
-      </p:grpSpPr>
-      <p:sp>
-        <p:nvSpPr>
-          <p:cNvPr id="140" name="Google Shape;140;p18"/>
-          <p:cNvSpPr txBox="1"/>
-          <p:nvPr/>
-        </p:nvSpPr>
-        <p:spPr>
-          <a:xfrm>
-            <a:off x="731520" y="1285875"/>
-            <a:ext cx="7680900" cy="514500"/>
-          </a:xfrm>
-          <a:prstGeom prst="rect">
-            <a:avLst/>
-          </a:prstGeom>
-          <a:noFill/>
-          <a:ln>
-            <a:noFill/>
-          </a:ln>
-        </p:spPr>
-        <p:txBody>
-          <a:bodyPr spcFirstLastPara="1" wrap="square" lIns="91425" tIns="91425" rIns="91425" bIns="91425" anchor="ctr" anchorCtr="0">
-            <a:noAutofit/>
-          </a:bodyPr>
-          <a:lstStyle/>
-          <a:p>
-            <a:pPr marL="0" lvl="0" indent="0" algn="l" rtl="0">
-              <a:spcBef>
-                <a:spcPts val="0"/>
-              </a:spcBef>
-              <a:spcAft>
-                <a:spcPts val="0"/>
-              </a:spcAft>
-              <a:buNone/>
-            </a:pPr>
-            <a:endParaRPr sz="1600">
-              <a:solidFill>
-                <a:srgbClr val="FFFFFF"/>
-              </a:solidFill>
-            </a:endParaRPr>
-          </a:p>
-        </p:txBody>
-      </p:sp>
-      <p:sp>
-        <p:nvSpPr>
-          <p:cNvPr id="141" name="Google Shape;141;p18"/>
-          <p:cNvSpPr txBox="1"/>
-          <p:nvPr/>
-        </p:nvSpPr>
-        <p:spPr>
-          <a:xfrm>
-            <a:off x="731520" y="1800225"/>
-            <a:ext cx="7680900" cy="1028700"/>
-          </a:xfrm>
-          <a:prstGeom prst="rect">
-            <a:avLst/>
-          </a:prstGeom>
-          <a:noFill/>
-          <a:ln>
-            <a:noFill/>
-          </a:ln>
-        </p:spPr>
-        <p:txBody>
-          <a:bodyPr spcFirstLastPara="1" wrap="square" lIns="91425" tIns="91425" rIns="91425" bIns="91425" anchor="ctr" anchorCtr="0">
-            <a:noAutofit/>
-          </a:bodyPr>
-          <a:lstStyle/>
-          <a:p>
-            <a:pPr marL="0" lvl="0" indent="0" algn="l" rtl="0">
-              <a:spcBef>
-                <a:spcPts val="0"/>
-              </a:spcBef>
-              <a:spcAft>
-                <a:spcPts val="0"/>
-              </a:spcAft>
-              <a:buNone/>
-            </a:pPr>
-            <a:r>
-              <a:rPr lang="en" sz="3600" b="1">
-                <a:solidFill>
-                  <a:srgbClr val="FFFFFF"/>
-                </a:solidFill>
-              </a:rPr>
-              <a:t>Emerging Trends</a:t>
-            </a:r>
-            <a:endParaRPr sz="3600" b="1">
-              <a:solidFill>
-                <a:srgbClr val="FFFFFF"/>
-              </a:solidFill>
-            </a:endParaRPr>
-          </a:p>
-        </p:txBody>
-      </p:sp>
-      <p:sp>
-        <p:nvSpPr>
-          <p:cNvPr id="142" name="Google Shape;142;p18"/>
-          <p:cNvSpPr txBox="1"/>
-          <p:nvPr/>
-        </p:nvSpPr>
-        <p:spPr>
-          <a:xfrm>
-            <a:off x="731520" y="3086100"/>
-            <a:ext cx="7680900" cy="514500"/>
-          </a:xfrm>
-          <a:prstGeom prst="rect">
-            <a:avLst/>
-          </a:prstGeom>
-          <a:noFill/>
-          <a:ln>
-            <a:noFill/>
-          </a:ln>
-        </p:spPr>
-        <p:txBody>
-          <a:bodyPr spcFirstLastPara="1" wrap="square" lIns="91425" tIns="91425" rIns="91425" bIns="91425" anchor="ctr" anchorCtr="0">
-            <a:noAutofit/>
-          </a:bodyPr>
-          <a:lstStyle/>
-          <a:p>
-            <a:pPr marL="0" lvl="0" indent="0" algn="l" rtl="0">
-              <a:spcBef>
-                <a:spcPts val="0"/>
-              </a:spcBef>
-              <a:spcAft>
-                <a:spcPts val="0"/>
-              </a:spcAft>
-              <a:buNone/>
-            </a:pPr>
-            <a:r>
-              <a:rPr lang="en">
-                <a:solidFill>
-                  <a:srgbClr val="BDD7EE"/>
-                </a:solidFill>
-              </a:rPr>
-              <a:t>Wi-Fi 7  ·  Private 5G  ·  Wireless TSN  ·  6G Outlook</a:t>
-            </a:r>
-            <a:endParaRPr>
-              <a:solidFill>
-                <a:srgbClr val="BDD7EE"/>
-              </a:solidFill>
-            </a:endParaRPr>
-          </a:p>
-        </p:txBody>
-      </p:sp>
-    </p:spTree>
-  </p:cSld>
-  <p:clrMapOvr>
-    <a:masterClrMapping/>
-  </p:clrMapOvr>
-</p:sld>
-</file>
-
-<file path=ppt/slides/slide12.xml><?xml version="1.0" encoding="utf-8"?>
-<p:sld xmlns:a="http://schemas.openxmlformats.org/drawingml/2006/main" xmlns:r="http://schemas.openxmlformats.org/officeDocument/2006/relationships" xmlns:p="http://schemas.openxmlformats.org/presentationml/2006/main">
-  <p:cSld>
-    <p:bg>
-      <p:bgPr>
-        <a:solidFill>
-          <a:srgbClr val="FFFFFF"/>
-        </a:solidFill>
-        <a:effectLst/>
-      </p:bgPr>
-    </p:bg>
-    <p:spTree>
-      <p:nvGrpSpPr>
-        <p:cNvPr id="1" name="Shape 146"/>
-        <p:cNvGrpSpPr/>
-        <p:nvPr/>
-      </p:nvGrpSpPr>
-      <p:grpSpPr>
-        <a:xfrm>
-          <a:off x="0" y="0"/>
-          <a:ext cx="0" cy="0"/>
-          <a:chOff x="0" y="0"/>
-          <a:chExt cx="0" cy="0"/>
-        </a:xfrm>
-      </p:grpSpPr>
-      <p:sp>
-        <p:nvSpPr>
-          <p:cNvPr id="147" name="Google Shape;147;p19"/>
-          <p:cNvSpPr txBox="1"/>
-          <p:nvPr/>
-        </p:nvSpPr>
-        <p:spPr>
-          <a:xfrm>
-            <a:off x="365760" y="205740"/>
-            <a:ext cx="8412600" cy="668700"/>
-          </a:xfrm>
-          <a:prstGeom prst="rect">
-            <a:avLst/>
-          </a:prstGeom>
-          <a:noFill/>
-          <a:ln>
-            <a:noFill/>
-          </a:ln>
-        </p:spPr>
-        <p:txBody>
-          <a:bodyPr spcFirstLastPara="1" wrap="square" lIns="91425" tIns="91425" rIns="91425" bIns="91425" anchor="ctr" anchorCtr="0">
-            <a:noAutofit/>
-          </a:bodyPr>
-          <a:lstStyle/>
-          <a:p>
-            <a:pPr marL="0" lvl="0" indent="0" algn="l" rtl="0">
-              <a:spcBef>
-                <a:spcPts val="0"/>
-              </a:spcBef>
-              <a:spcAft>
-                <a:spcPts val="0"/>
-              </a:spcAft>
-              <a:buNone/>
-            </a:pPr>
-            <a:r>
-              <a:rPr lang="en" sz="2200" b="1">
-                <a:solidFill>
-                  <a:srgbClr val="1A56A0"/>
-                </a:solidFill>
-              </a:rPr>
-              <a:t>5.1  Wi-Fi 7 — Multi-Link Operation (MLO)</a:t>
-            </a:r>
-            <a:endParaRPr sz="2200" b="1">
-              <a:solidFill>
-                <a:srgbClr val="1A56A0"/>
-              </a:solidFill>
-            </a:endParaRPr>
-          </a:p>
-        </p:txBody>
-      </p:sp>
-      <p:sp>
-        <p:nvSpPr>
-          <p:cNvPr id="148" name="Google Shape;148;p19"/>
-          <p:cNvSpPr/>
-          <p:nvPr/>
-        </p:nvSpPr>
-        <p:spPr>
-          <a:xfrm>
-            <a:off x="365760" y="900113"/>
-            <a:ext cx="8412600" cy="20700"/>
-          </a:xfrm>
-          <a:prstGeom prst="rect">
-            <a:avLst/>
-          </a:prstGeom>
-          <a:solidFill>
-            <a:srgbClr val="1A56A0"/>
-          </a:solidFill>
-          <a:ln>
-            <a:noFill/>
-          </a:ln>
-        </p:spPr>
-        <p:txBody>
-          <a:bodyPr spcFirstLastPara="1" wrap="square" lIns="91425" tIns="91425" rIns="91425" bIns="91425" anchor="ctr" anchorCtr="0">
-            <a:noAutofit/>
-          </a:bodyPr>
-          <a:lstStyle/>
-          <a:p>
-            <a:pPr marL="0" lvl="0" indent="0" algn="ctr" rtl="0">
-              <a:spcBef>
-                <a:spcPts val="0"/>
-              </a:spcBef>
-              <a:spcAft>
-                <a:spcPts val="0"/>
-              </a:spcAft>
-              <a:buNone/>
-            </a:pPr>
-            <a:endParaRPr/>
-          </a:p>
-        </p:txBody>
-      </p:sp>
-      <p:sp>
-        <p:nvSpPr>
-          <p:cNvPr id="149" name="Google Shape;149;p19"/>
-          <p:cNvSpPr/>
-          <p:nvPr/>
-        </p:nvSpPr>
-        <p:spPr>
-          <a:xfrm>
-            <a:off x="365760" y="1131570"/>
-            <a:ext cx="2469000" cy="822900"/>
-          </a:xfrm>
-          <a:prstGeom prst="rect">
-            <a:avLst/>
-          </a:prstGeom>
-          <a:solidFill>
-            <a:srgbClr val="1A56A0"/>
-          </a:solidFill>
-          <a:ln>
-            <a:noFill/>
-          </a:ln>
-        </p:spPr>
-        <p:txBody>
-          <a:bodyPr spcFirstLastPara="1" wrap="square" lIns="91425" tIns="91425" rIns="91425" bIns="91425" anchor="ctr" anchorCtr="0">
-            <a:noAutofit/>
-          </a:bodyPr>
-          <a:lstStyle/>
-          <a:p>
-            <a:pPr marL="0" lvl="0" indent="0" algn="ctr" rtl="0">
-              <a:spcBef>
-                <a:spcPts val="0"/>
-              </a:spcBef>
-              <a:spcAft>
-                <a:spcPts val="0"/>
-              </a:spcAft>
-              <a:buNone/>
-            </a:pPr>
-            <a:endParaRPr/>
-          </a:p>
-        </p:txBody>
-      </p:sp>
-      <p:sp>
-        <p:nvSpPr>
-          <p:cNvPr id="150" name="Google Shape;150;p19"/>
-          <p:cNvSpPr txBox="1"/>
-          <p:nvPr/>
-        </p:nvSpPr>
-        <p:spPr>
-          <a:xfrm>
-            <a:off x="365760" y="1131570"/>
-            <a:ext cx="2469000" cy="822900"/>
-          </a:xfrm>
-          <a:prstGeom prst="rect">
-            <a:avLst/>
-          </a:prstGeom>
-          <a:noFill/>
-          <a:ln>
-            <a:noFill/>
-          </a:ln>
-        </p:spPr>
-        <p:txBody>
-          <a:bodyPr spcFirstLastPara="1" wrap="square" lIns="91425" tIns="91425" rIns="91425" bIns="91425" anchor="ctr" anchorCtr="0">
-            <a:noAutofit/>
-          </a:bodyPr>
-          <a:lstStyle/>
-          <a:p>
-            <a:pPr marL="0" lvl="0" indent="0" algn="ctr" rtl="0">
-              <a:spcBef>
-                <a:spcPts val="0"/>
-              </a:spcBef>
-              <a:spcAft>
-                <a:spcPts val="0"/>
-              </a:spcAft>
-              <a:buNone/>
-            </a:pPr>
-            <a:r>
-              <a:rPr lang="en" sz="1600" b="1">
-                <a:solidFill>
-                  <a:srgbClr val="FFFFFF"/>
-                </a:solidFill>
-              </a:rPr>
-              <a:t>2.4 GHz</a:t>
-            </a:r>
-            <a:endParaRPr sz="1600" b="1">
-              <a:solidFill>
-                <a:srgbClr val="FFFFFF"/>
-              </a:solidFill>
-            </a:endParaRPr>
-          </a:p>
-        </p:txBody>
-      </p:sp>
-      <p:sp>
-        <p:nvSpPr>
-          <p:cNvPr id="151" name="Google Shape;151;p19"/>
-          <p:cNvSpPr/>
-          <p:nvPr/>
-        </p:nvSpPr>
-        <p:spPr>
-          <a:xfrm>
-            <a:off x="3291840" y="1131570"/>
-            <a:ext cx="2469000" cy="822900"/>
-          </a:xfrm>
-          <a:prstGeom prst="rect">
-            <a:avLst/>
-          </a:prstGeom>
-          <a:solidFill>
-            <a:srgbClr val="1A56A0"/>
-          </a:solidFill>
-          <a:ln>
-            <a:noFill/>
-          </a:ln>
-        </p:spPr>
-        <p:txBody>
-          <a:bodyPr spcFirstLastPara="1" wrap="square" lIns="91425" tIns="91425" rIns="91425" bIns="91425" anchor="ctr" anchorCtr="0">
-            <a:noAutofit/>
-          </a:bodyPr>
-          <a:lstStyle/>
-          <a:p>
-            <a:pPr marL="0" lvl="0" indent="0" algn="ctr" rtl="0">
-              <a:spcBef>
-                <a:spcPts val="0"/>
-              </a:spcBef>
-              <a:spcAft>
-                <a:spcPts val="0"/>
-              </a:spcAft>
-              <a:buNone/>
-            </a:pPr>
-            <a:endParaRPr/>
-          </a:p>
-        </p:txBody>
-      </p:sp>
-      <p:sp>
-        <p:nvSpPr>
-          <p:cNvPr id="152" name="Google Shape;152;p19"/>
-          <p:cNvSpPr txBox="1"/>
-          <p:nvPr/>
-        </p:nvSpPr>
-        <p:spPr>
-          <a:xfrm>
-            <a:off x="3291840" y="1131570"/>
-            <a:ext cx="2469000" cy="822900"/>
-          </a:xfrm>
-          <a:prstGeom prst="rect">
-            <a:avLst/>
-          </a:prstGeom>
-          <a:noFill/>
-          <a:ln>
-            <a:noFill/>
-          </a:ln>
-        </p:spPr>
-        <p:txBody>
-          <a:bodyPr spcFirstLastPara="1" wrap="square" lIns="91425" tIns="91425" rIns="91425" bIns="91425" anchor="ctr" anchorCtr="0">
-            <a:noAutofit/>
-          </a:bodyPr>
-          <a:lstStyle/>
-          <a:p>
-            <a:pPr marL="0" lvl="0" indent="0" algn="ctr" rtl="0">
-              <a:spcBef>
-                <a:spcPts val="0"/>
-              </a:spcBef>
-              <a:spcAft>
-                <a:spcPts val="0"/>
-              </a:spcAft>
-              <a:buNone/>
-            </a:pPr>
-            <a:r>
-              <a:rPr lang="en" sz="1600" b="1">
-                <a:solidFill>
-                  <a:srgbClr val="FFFFFF"/>
-                </a:solidFill>
-              </a:rPr>
-              <a:t>5 GHz</a:t>
-            </a:r>
-            <a:endParaRPr sz="1600" b="1">
-              <a:solidFill>
-                <a:srgbClr val="FFFFFF"/>
-              </a:solidFill>
-            </a:endParaRPr>
-          </a:p>
-        </p:txBody>
-      </p:sp>
-      <p:sp>
-        <p:nvSpPr>
-          <p:cNvPr id="153" name="Google Shape;153;p19"/>
-          <p:cNvSpPr/>
-          <p:nvPr/>
-        </p:nvSpPr>
-        <p:spPr>
-          <a:xfrm>
-            <a:off x="6217920" y="1131570"/>
-            <a:ext cx="2469000" cy="822900"/>
-          </a:xfrm>
-          <a:prstGeom prst="rect">
-            <a:avLst/>
-          </a:prstGeom>
-          <a:solidFill>
-            <a:srgbClr val="1A56A0"/>
-          </a:solidFill>
-          <a:ln>
-            <a:noFill/>
-          </a:ln>
-        </p:spPr>
-        <p:txBody>
-          <a:bodyPr spcFirstLastPara="1" wrap="square" lIns="91425" tIns="91425" rIns="91425" bIns="91425" anchor="ctr" anchorCtr="0">
-            <a:noAutofit/>
-          </a:bodyPr>
-          <a:lstStyle/>
-          <a:p>
-            <a:pPr marL="0" lvl="0" indent="0" algn="ctr" rtl="0">
-              <a:spcBef>
-                <a:spcPts val="0"/>
-              </a:spcBef>
-              <a:spcAft>
-                <a:spcPts val="0"/>
-              </a:spcAft>
-              <a:buNone/>
-            </a:pPr>
-            <a:endParaRPr/>
-          </a:p>
-        </p:txBody>
-      </p:sp>
-      <p:sp>
-        <p:nvSpPr>
-          <p:cNvPr id="154" name="Google Shape;154;p19"/>
-          <p:cNvSpPr txBox="1"/>
-          <p:nvPr/>
-        </p:nvSpPr>
-        <p:spPr>
-          <a:xfrm>
-            <a:off x="6217920" y="1131570"/>
-            <a:ext cx="2469000" cy="822900"/>
-          </a:xfrm>
-          <a:prstGeom prst="rect">
-            <a:avLst/>
-          </a:prstGeom>
-          <a:noFill/>
-          <a:ln>
-            <a:noFill/>
-          </a:ln>
-        </p:spPr>
-        <p:txBody>
-          <a:bodyPr spcFirstLastPara="1" wrap="square" lIns="91425" tIns="91425" rIns="91425" bIns="91425" anchor="ctr" anchorCtr="0">
-            <a:noAutofit/>
-          </a:bodyPr>
-          <a:lstStyle/>
-          <a:p>
-            <a:pPr marL="0" lvl="0" indent="0" algn="ctr" rtl="0">
-              <a:spcBef>
-                <a:spcPts val="0"/>
-              </a:spcBef>
-              <a:spcAft>
-                <a:spcPts val="0"/>
-              </a:spcAft>
-              <a:buNone/>
-            </a:pPr>
-            <a:r>
-              <a:rPr lang="en" sz="1600" b="1">
-                <a:solidFill>
-                  <a:srgbClr val="FFFFFF"/>
-                </a:solidFill>
-              </a:rPr>
-              <a:t>6 GHz</a:t>
-            </a:r>
-            <a:endParaRPr sz="1600" b="1">
-              <a:solidFill>
-                <a:srgbClr val="FFFFFF"/>
-              </a:solidFill>
-            </a:endParaRPr>
-          </a:p>
-        </p:txBody>
-      </p:sp>
-      <p:sp>
-        <p:nvSpPr>
-          <p:cNvPr id="155" name="Google Shape;155;p19"/>
-          <p:cNvSpPr txBox="1"/>
-          <p:nvPr/>
-        </p:nvSpPr>
-        <p:spPr>
-          <a:xfrm>
-            <a:off x="365760" y="2005965"/>
-            <a:ext cx="8412600" cy="411600"/>
-          </a:xfrm>
-          <a:prstGeom prst="rect">
-            <a:avLst/>
-          </a:prstGeom>
-          <a:noFill/>
-          <a:ln>
-            <a:noFill/>
-          </a:ln>
-        </p:spPr>
-        <p:txBody>
-          <a:bodyPr spcFirstLastPara="1" wrap="square" lIns="91425" tIns="91425" rIns="91425" bIns="91425" anchor="ctr" anchorCtr="0">
-            <a:noAutofit/>
-          </a:bodyPr>
-          <a:lstStyle/>
-          <a:p>
-            <a:pPr marL="0" lvl="0" indent="0" algn="ctr" rtl="0">
-              <a:spcBef>
-                <a:spcPts val="0"/>
-              </a:spcBef>
-              <a:spcAft>
-                <a:spcPts val="0"/>
-              </a:spcAft>
-              <a:buNone/>
-            </a:pPr>
-            <a:r>
-              <a:rPr lang="en" sz="1200" i="1">
-                <a:solidFill>
-                  <a:srgbClr val="666666"/>
-                </a:solidFill>
-              </a:rPr>
-              <a:t>All three frequency bands used simultaneously</a:t>
-            </a:r>
-            <a:endParaRPr sz="1200" i="1">
-              <a:solidFill>
-                <a:srgbClr val="666666"/>
-              </a:solidFill>
-            </a:endParaRPr>
-          </a:p>
-        </p:txBody>
-      </p:sp>
-      <p:sp>
-        <p:nvSpPr>
-          <p:cNvPr id="156" name="Google Shape;156;p19"/>
-          <p:cNvSpPr txBox="1"/>
-          <p:nvPr/>
-        </p:nvSpPr>
-        <p:spPr>
-          <a:xfrm>
-            <a:off x="548640" y="2571750"/>
-            <a:ext cx="8046600" cy="617100"/>
-          </a:xfrm>
-          <a:prstGeom prst="rect">
-            <a:avLst/>
-          </a:prstGeom>
-          <a:noFill/>
-          <a:ln>
-            <a:noFill/>
-          </a:ln>
-        </p:spPr>
-        <p:txBody>
-          <a:bodyPr spcFirstLastPara="1" wrap="square" lIns="91425" tIns="91425" rIns="91425" bIns="91425" anchor="ctr" anchorCtr="0">
-            <a:noAutofit/>
-          </a:bodyPr>
-          <a:lstStyle/>
-          <a:p>
-            <a:pPr marL="0" lvl="0" indent="0" algn="l" rtl="0">
-              <a:spcBef>
-                <a:spcPts val="0"/>
-              </a:spcBef>
-              <a:spcAft>
-                <a:spcPts val="0"/>
-              </a:spcAft>
-              <a:buNone/>
-            </a:pPr>
-            <a:r>
-              <a:rPr lang="en" sz="1300">
-                <a:solidFill>
-                  <a:srgbClr val="444444"/>
-                </a:solidFill>
-              </a:rPr>
-              <a:t>•  MLO provides packet-level diversity — a dropped packet on one band is recovered on another without retransmission delay.</a:t>
-            </a:r>
-            <a:endParaRPr sz="1300">
-              <a:solidFill>
-                <a:srgbClr val="444444"/>
-              </a:solidFill>
-            </a:endParaRPr>
-          </a:p>
-        </p:txBody>
-      </p:sp>
-      <p:sp>
-        <p:nvSpPr>
-          <p:cNvPr id="157" name="Google Shape;157;p19"/>
-          <p:cNvSpPr txBox="1"/>
-          <p:nvPr/>
-        </p:nvSpPr>
-        <p:spPr>
-          <a:xfrm>
-            <a:off x="548640" y="3240405"/>
-            <a:ext cx="8046600" cy="617100"/>
-          </a:xfrm>
-          <a:prstGeom prst="rect">
-            <a:avLst/>
-          </a:prstGeom>
-          <a:noFill/>
-          <a:ln>
-            <a:noFill/>
-          </a:ln>
-        </p:spPr>
-        <p:txBody>
-          <a:bodyPr spcFirstLastPara="1" wrap="square" lIns="91425" tIns="91425" rIns="91425" bIns="91425" anchor="ctr" anchorCtr="0">
-            <a:noAutofit/>
-          </a:bodyPr>
-          <a:lstStyle/>
-          <a:p>
-            <a:pPr marL="0" lvl="0" indent="0" algn="l" rtl="0">
-              <a:spcBef>
-                <a:spcPts val="0"/>
-              </a:spcBef>
-              <a:spcAft>
-                <a:spcPts val="0"/>
-              </a:spcAft>
-              <a:buNone/>
-            </a:pPr>
-            <a:r>
-              <a:rPr lang="en" sz="1300">
-                <a:solidFill>
-                  <a:srgbClr val="444444"/>
-                </a:solidFill>
-              </a:rPr>
-              <a:t>•  IEEE 802.11be (Wi-Fi 7) is finalised. Draft 1.0 of Wi-Fi 8 (802.11bn) completed August 2025.</a:t>
-            </a:r>
-            <a:endParaRPr sz="1300">
-              <a:solidFill>
-                <a:srgbClr val="444444"/>
-              </a:solidFill>
-            </a:endParaRPr>
-          </a:p>
-        </p:txBody>
-      </p:sp>
-      <p:sp>
-        <p:nvSpPr>
-          <p:cNvPr id="158" name="Google Shape;158;p19"/>
-          <p:cNvSpPr txBox="1"/>
-          <p:nvPr/>
-        </p:nvSpPr>
-        <p:spPr>
-          <a:xfrm>
-            <a:off x="548640" y="3909060"/>
-            <a:ext cx="8046600" cy="617100"/>
-          </a:xfrm>
-          <a:prstGeom prst="rect">
-            <a:avLst/>
-          </a:prstGeom>
-          <a:noFill/>
-          <a:ln>
-            <a:noFill/>
-          </a:ln>
-        </p:spPr>
-        <p:txBody>
-          <a:bodyPr spcFirstLastPara="1" wrap="square" lIns="91425" tIns="91425" rIns="91425" bIns="91425" anchor="ctr" anchorCtr="0">
-            <a:noAutofit/>
-          </a:bodyPr>
-          <a:lstStyle/>
-          <a:p>
-            <a:pPr marL="0" lvl="0" indent="0" algn="l" rtl="0">
-              <a:spcBef>
-                <a:spcPts val="0"/>
-              </a:spcBef>
-              <a:spcAft>
-                <a:spcPts val="0"/>
-              </a:spcAft>
-              <a:buNone/>
-            </a:pPr>
-            <a:r>
-              <a:rPr lang="en" sz="1300">
-                <a:solidFill>
-                  <a:srgbClr val="444444"/>
-                </a:solidFill>
-              </a:rPr>
-              <a:t>•  Wi-Fi 8 targets deterministic performance and reliability rather than just higher throughput.</a:t>
-            </a:r>
-            <a:endParaRPr sz="1300">
-              <a:solidFill>
-                <a:srgbClr val="444444"/>
-              </a:solidFill>
-            </a:endParaRPr>
-          </a:p>
-        </p:txBody>
-      </p:sp>
-    </p:spTree>
-  </p:cSld>
-  <p:clrMapOvr>
-    <a:masterClrMapping/>
-  </p:clrMapOvr>
-</p:sld>
-</file>
-
-<file path=ppt/slides/slide13.xml><?xml version="1.0" encoding="utf-8"?>
-<p:sld xmlns:a="http://schemas.openxmlformats.org/drawingml/2006/main" xmlns:r="http://schemas.openxmlformats.org/officeDocument/2006/relationships" xmlns:p="http://schemas.openxmlformats.org/presentationml/2006/main">
-  <p:cSld>
-    <p:bg>
-      <p:bgPr>
-        <a:solidFill>
-          <a:srgbClr val="FFFFFF"/>
-        </a:solidFill>
-        <a:effectLst/>
-      </p:bgPr>
-    </p:bg>
-    <p:spTree>
-      <p:nvGrpSpPr>
-        <p:cNvPr id="1" name="Shape 162"/>
-        <p:cNvGrpSpPr/>
-        <p:nvPr/>
-      </p:nvGrpSpPr>
-      <p:grpSpPr>
-        <a:xfrm>
-          <a:off x="0" y="0"/>
-          <a:ext cx="0" cy="0"/>
-          <a:chOff x="0" y="0"/>
-          <a:chExt cx="0" cy="0"/>
-        </a:xfrm>
-      </p:grpSpPr>
-      <p:sp>
-        <p:nvSpPr>
-          <p:cNvPr id="163" name="Google Shape;163;p20"/>
-          <p:cNvSpPr txBox="1"/>
-          <p:nvPr/>
-        </p:nvSpPr>
-        <p:spPr>
-          <a:xfrm>
-            <a:off x="365760" y="205740"/>
-            <a:ext cx="8412600" cy="668700"/>
-          </a:xfrm>
-          <a:prstGeom prst="rect">
-            <a:avLst/>
-          </a:prstGeom>
-          <a:noFill/>
-          <a:ln>
-            <a:noFill/>
-          </a:ln>
-        </p:spPr>
-        <p:txBody>
-          <a:bodyPr spcFirstLastPara="1" wrap="square" lIns="91425" tIns="91425" rIns="91425" bIns="91425" anchor="ctr" anchorCtr="0">
-            <a:noAutofit/>
-          </a:bodyPr>
-          <a:lstStyle/>
-          <a:p>
-            <a:pPr marL="0" lvl="0" indent="0" algn="l" rtl="0">
-              <a:spcBef>
-                <a:spcPts val="0"/>
-              </a:spcBef>
-              <a:spcAft>
-                <a:spcPts val="0"/>
-              </a:spcAft>
-              <a:buNone/>
-            </a:pPr>
-            <a:r>
-              <a:rPr lang="en" sz="2200" b="1">
-                <a:solidFill>
-                  <a:srgbClr val="1A56A0"/>
-                </a:solidFill>
-              </a:rPr>
-              <a:t>5.2  Private 5G Campus Networks</a:t>
-            </a:r>
-            <a:endParaRPr sz="2200" b="1">
-              <a:solidFill>
-                <a:srgbClr val="1A56A0"/>
-              </a:solidFill>
-            </a:endParaRPr>
-          </a:p>
-        </p:txBody>
-      </p:sp>
-      <p:sp>
-        <p:nvSpPr>
-          <p:cNvPr id="164" name="Google Shape;164;p20"/>
-          <p:cNvSpPr/>
-          <p:nvPr/>
-        </p:nvSpPr>
-        <p:spPr>
-          <a:xfrm>
-            <a:off x="365760" y="900113"/>
-            <a:ext cx="8412600" cy="20700"/>
-          </a:xfrm>
-          <a:prstGeom prst="rect">
-            <a:avLst/>
-          </a:prstGeom>
-          <a:solidFill>
-            <a:srgbClr val="1A56A0"/>
-          </a:solidFill>
-          <a:ln>
-            <a:noFill/>
-          </a:ln>
-        </p:spPr>
-        <p:txBody>
-          <a:bodyPr spcFirstLastPara="1" wrap="square" lIns="91425" tIns="91425" rIns="91425" bIns="91425" anchor="ctr" anchorCtr="0">
-            <a:noAutofit/>
-          </a:bodyPr>
-          <a:lstStyle/>
-          <a:p>
-            <a:pPr marL="0" lvl="0" indent="0" algn="ctr" rtl="0">
-              <a:spcBef>
-                <a:spcPts val="0"/>
-              </a:spcBef>
-              <a:spcAft>
-                <a:spcPts val="0"/>
-              </a:spcAft>
-              <a:buNone/>
-            </a:pPr>
-            <a:endParaRPr/>
-          </a:p>
-        </p:txBody>
-      </p:sp>
-      <p:sp>
-        <p:nvSpPr>
-          <p:cNvPr id="165" name="Google Shape;165;p20"/>
-          <p:cNvSpPr txBox="1"/>
-          <p:nvPr/>
-        </p:nvSpPr>
-        <p:spPr>
-          <a:xfrm>
-            <a:off x="365760" y="1543050"/>
-            <a:ext cx="2377500" cy="565800"/>
-          </a:xfrm>
-          <a:prstGeom prst="rect">
-            <a:avLst/>
-          </a:prstGeom>
-          <a:noFill/>
-          <a:ln>
-            <a:noFill/>
-          </a:ln>
-        </p:spPr>
-        <p:txBody>
-          <a:bodyPr spcFirstLastPara="1" wrap="square" lIns="91425" tIns="91425" rIns="91425" bIns="91425" anchor="ctr" anchorCtr="0">
-            <a:noAutofit/>
-          </a:bodyPr>
-          <a:lstStyle/>
-          <a:p>
-            <a:pPr marL="0" lvl="0" indent="0" algn="ctr" rtl="0">
-              <a:spcBef>
-                <a:spcPts val="0"/>
-              </a:spcBef>
-              <a:spcAft>
-                <a:spcPts val="0"/>
-              </a:spcAft>
-              <a:buNone/>
-            </a:pPr>
-            <a:r>
-              <a:rPr lang="en" sz="1100">
-                <a:solidFill>
-                  <a:srgbClr val="FFFFFF"/>
-                </a:solidFill>
-              </a:rPr>
-              <a:t>of new private wireless</a:t>
-            </a:r>
-            <a:endParaRPr sz="1100">
-              <a:solidFill>
-                <a:srgbClr val="FFFFFF"/>
-              </a:solidFill>
-            </a:endParaRPr>
-          </a:p>
-          <a:p>
-            <a:pPr marL="0" lvl="0" indent="0" algn="ctr" rtl="0">
-              <a:spcBef>
-                <a:spcPts val="0"/>
-              </a:spcBef>
-              <a:spcAft>
-                <a:spcPts val="0"/>
-              </a:spcAft>
-              <a:buNone/>
-            </a:pPr>
-            <a:r>
-              <a:rPr lang="en" sz="1100">
-                <a:solidFill>
-                  <a:srgbClr val="FFFFFF"/>
-                </a:solidFill>
-              </a:rPr>
-              <a:t>spend in 2025</a:t>
-            </a:r>
-            <a:endParaRPr sz="1100">
-              <a:solidFill>
-                <a:srgbClr val="FFFFFF"/>
-              </a:solidFill>
-            </a:endParaRPr>
-          </a:p>
-        </p:txBody>
-      </p:sp>
-      <p:sp>
-        <p:nvSpPr>
-          <p:cNvPr id="166" name="Google Shape;166;p20"/>
-          <p:cNvSpPr txBox="1"/>
-          <p:nvPr/>
-        </p:nvSpPr>
-        <p:spPr>
-          <a:xfrm>
-            <a:off x="548640" y="1748790"/>
-            <a:ext cx="8046600" cy="617100"/>
-          </a:xfrm>
-          <a:prstGeom prst="rect">
-            <a:avLst/>
-          </a:prstGeom>
-          <a:noFill/>
-          <a:ln>
-            <a:noFill/>
-          </a:ln>
-        </p:spPr>
-        <p:txBody>
-          <a:bodyPr spcFirstLastPara="1" wrap="square" lIns="91425" tIns="91425" rIns="91425" bIns="91425" anchor="ctr" anchorCtr="0">
-            <a:noAutofit/>
-          </a:bodyPr>
-          <a:lstStyle/>
-          <a:p>
-            <a:pPr marL="0" lvl="0" indent="0" algn="l" rtl="0">
-              <a:spcBef>
-                <a:spcPts val="0"/>
-              </a:spcBef>
-              <a:spcAft>
-                <a:spcPts val="0"/>
-              </a:spcAft>
-              <a:buNone/>
-            </a:pPr>
-            <a:r>
-              <a:rPr lang="en" sz="1300">
-                <a:solidFill>
-                  <a:srgbClr val="444444"/>
-                </a:solidFill>
-              </a:rPr>
-              <a:t>•  Companies build and manage their own 5G network instead of using public infrastructure.</a:t>
-            </a:r>
-            <a:endParaRPr sz="1300">
-              <a:solidFill>
-                <a:srgbClr val="444444"/>
-              </a:solidFill>
-            </a:endParaRPr>
-          </a:p>
-        </p:txBody>
-      </p:sp>
-      <p:sp>
-        <p:nvSpPr>
-          <p:cNvPr id="167" name="Google Shape;167;p20"/>
-          <p:cNvSpPr txBox="1"/>
-          <p:nvPr/>
-        </p:nvSpPr>
-        <p:spPr>
-          <a:xfrm>
-            <a:off x="548640" y="2417445"/>
-            <a:ext cx="8046600" cy="617100"/>
-          </a:xfrm>
-          <a:prstGeom prst="rect">
-            <a:avLst/>
-          </a:prstGeom>
-          <a:noFill/>
-          <a:ln>
-            <a:noFill/>
-          </a:ln>
-        </p:spPr>
-        <p:txBody>
-          <a:bodyPr spcFirstLastPara="1" wrap="square" lIns="91425" tIns="91425" rIns="91425" bIns="91425" anchor="ctr" anchorCtr="0">
-            <a:noAutofit/>
-          </a:bodyPr>
-          <a:lstStyle/>
-          <a:p>
-            <a:pPr marL="0" lvl="0" indent="0" algn="l" rtl="0">
-              <a:spcBef>
-                <a:spcPts val="0"/>
-              </a:spcBef>
-              <a:spcAft>
-                <a:spcPts val="0"/>
-              </a:spcAft>
-              <a:buNone/>
-            </a:pPr>
-            <a:r>
-              <a:rPr lang="en" sz="1300">
-                <a:solidFill>
-                  <a:srgbClr val="444444"/>
-                </a:solidFill>
-              </a:rPr>
-              <a:t>•  Full control over security, service levels, and spectrum allocation.</a:t>
-            </a:r>
-            <a:endParaRPr sz="1300">
-              <a:solidFill>
-                <a:srgbClr val="444444"/>
-              </a:solidFill>
-            </a:endParaRPr>
-          </a:p>
-        </p:txBody>
-      </p:sp>
-      <p:sp>
-        <p:nvSpPr>
-          <p:cNvPr id="168" name="Google Shape;168;p20"/>
-          <p:cNvSpPr txBox="1"/>
-          <p:nvPr/>
-        </p:nvSpPr>
-        <p:spPr>
-          <a:xfrm>
-            <a:off x="548640" y="3086100"/>
-            <a:ext cx="8046600" cy="617100"/>
-          </a:xfrm>
-          <a:prstGeom prst="rect">
-            <a:avLst/>
-          </a:prstGeom>
-          <a:noFill/>
-          <a:ln>
-            <a:noFill/>
-          </a:ln>
-        </p:spPr>
-        <p:txBody>
-          <a:bodyPr spcFirstLastPara="1" wrap="square" lIns="91425" tIns="91425" rIns="91425" bIns="91425" anchor="ctr" anchorCtr="0">
-            <a:noAutofit/>
-          </a:bodyPr>
-          <a:lstStyle/>
-          <a:p>
-            <a:pPr marL="0" lvl="0" indent="0" algn="l" rtl="0">
-              <a:spcBef>
-                <a:spcPts val="0"/>
-              </a:spcBef>
-              <a:spcAft>
-                <a:spcPts val="0"/>
-              </a:spcAft>
-              <a:buNone/>
-            </a:pPr>
-            <a:r>
-              <a:rPr lang="en" sz="1300">
-                <a:solidFill>
-                  <a:srgbClr val="444444"/>
-                </a:solidFill>
-              </a:rPr>
-              <a:t>•  Optimised for deterministic, high-density industrial environments such as factories.</a:t>
-            </a:r>
-            <a:endParaRPr sz="1300">
-              <a:solidFill>
-                <a:srgbClr val="444444"/>
-              </a:solidFill>
-            </a:endParaRPr>
-          </a:p>
-        </p:txBody>
-      </p:sp>
-      <p:sp>
-        <p:nvSpPr>
-          <p:cNvPr id="169" name="Google Shape;169;p20"/>
-          <p:cNvSpPr txBox="1"/>
-          <p:nvPr/>
-        </p:nvSpPr>
-        <p:spPr>
-          <a:xfrm>
-            <a:off x="548640" y="3754755"/>
-            <a:ext cx="8046600" cy="617100"/>
-          </a:xfrm>
-          <a:prstGeom prst="rect">
-            <a:avLst/>
-          </a:prstGeom>
-          <a:noFill/>
-          <a:ln>
-            <a:noFill/>
-          </a:ln>
-        </p:spPr>
-        <p:txBody>
-          <a:bodyPr spcFirstLastPara="1" wrap="square" lIns="91425" tIns="91425" rIns="91425" bIns="91425" anchor="ctr" anchorCtr="0">
-            <a:noAutofit/>
-          </a:bodyPr>
-          <a:lstStyle/>
-          <a:p>
-            <a:pPr marL="0" lvl="0" indent="0" algn="l" rtl="0">
-              <a:spcBef>
-                <a:spcPts val="0"/>
-              </a:spcBef>
-              <a:spcAft>
-                <a:spcPts val="0"/>
-              </a:spcAft>
-              <a:buNone/>
-            </a:pPr>
-            <a:r>
-              <a:rPr lang="en" sz="1300">
-                <a:solidFill>
-                  <a:srgbClr val="444444"/>
-                </a:solidFill>
-              </a:rPr>
-              <a:t>•  Complements industrial Ethernet and Wi-Fi in new (greenfield) factory deployments.</a:t>
-            </a:r>
-            <a:endParaRPr sz="1300">
-              <a:solidFill>
-                <a:srgbClr val="444444"/>
-              </a:solidFill>
-            </a:endParaRPr>
-          </a:p>
-        </p:txBody>
-      </p:sp>
-    </p:spTree>
-  </p:cSld>
-  <p:clrMapOvr>
-    <a:masterClrMapping/>
-  </p:clrMapOvr>
-</p:sld>
-</file>
-
-<file path=ppt/slides/slide14.xml><?xml version="1.0" encoding="utf-8"?>
-<p:sld xmlns:a="http://schemas.openxmlformats.org/drawingml/2006/main" xmlns:r="http://schemas.openxmlformats.org/officeDocument/2006/relationships" xmlns:p="http://schemas.openxmlformats.org/presentationml/2006/main">
-  <p:cSld>
-    <p:bg>
-      <p:bgPr>
-        <a:solidFill>
-          <a:srgbClr val="FFFFFF"/>
-        </a:solidFill>
-        <a:effectLst/>
-      </p:bgPr>
-    </p:bg>
-    <p:spTree>
-      <p:nvGrpSpPr>
-        <p:cNvPr id="1" name="Shape 173"/>
-        <p:cNvGrpSpPr/>
-        <p:nvPr/>
-      </p:nvGrpSpPr>
-      <p:grpSpPr>
-        <a:xfrm>
-          <a:off x="0" y="0"/>
-          <a:ext cx="0" cy="0"/>
-          <a:chOff x="0" y="0"/>
-          <a:chExt cx="0" cy="0"/>
-        </a:xfrm>
-      </p:grpSpPr>
-      <p:sp>
-        <p:nvSpPr>
-          <p:cNvPr id="174" name="Google Shape;174;p21"/>
-          <p:cNvSpPr txBox="1"/>
-          <p:nvPr/>
-        </p:nvSpPr>
-        <p:spPr>
-          <a:xfrm>
-            <a:off x="365760" y="205740"/>
-            <a:ext cx="8412600" cy="668700"/>
-          </a:xfrm>
-          <a:prstGeom prst="rect">
-            <a:avLst/>
-          </a:prstGeom>
-          <a:noFill/>
-          <a:ln>
-            <a:noFill/>
-          </a:ln>
-        </p:spPr>
-        <p:txBody>
-          <a:bodyPr spcFirstLastPara="1" wrap="square" lIns="91425" tIns="91425" rIns="91425" bIns="91425" anchor="ctr" anchorCtr="0">
-            <a:noAutofit/>
-          </a:bodyPr>
-          <a:lstStyle/>
-          <a:p>
-            <a:pPr marL="0" lvl="0" indent="0" algn="l" rtl="0">
-              <a:spcBef>
-                <a:spcPts val="0"/>
-              </a:spcBef>
-              <a:spcAft>
-                <a:spcPts val="0"/>
-              </a:spcAft>
-              <a:buNone/>
-            </a:pPr>
-            <a:r>
-              <a:rPr lang="en" sz="2200" b="1">
-                <a:solidFill>
-                  <a:srgbClr val="1A56A0"/>
-                </a:solidFill>
-              </a:rPr>
-              <a:t>5.3  Wireless Time-Sensitive Networking</a:t>
-            </a:r>
-            <a:endParaRPr sz="2200" b="1">
-              <a:solidFill>
-                <a:srgbClr val="1A56A0"/>
-              </a:solidFill>
-            </a:endParaRPr>
-          </a:p>
-        </p:txBody>
-      </p:sp>
-      <p:sp>
-        <p:nvSpPr>
-          <p:cNvPr id="175" name="Google Shape;175;p21"/>
-          <p:cNvSpPr/>
-          <p:nvPr/>
-        </p:nvSpPr>
-        <p:spPr>
-          <a:xfrm>
-            <a:off x="365760" y="900113"/>
-            <a:ext cx="8412600" cy="20700"/>
-          </a:xfrm>
-          <a:prstGeom prst="rect">
-            <a:avLst/>
-          </a:prstGeom>
-          <a:solidFill>
-            <a:srgbClr val="1A56A0"/>
-          </a:solidFill>
-          <a:ln>
-            <a:noFill/>
-          </a:ln>
-        </p:spPr>
-        <p:txBody>
-          <a:bodyPr spcFirstLastPara="1" wrap="square" lIns="91425" tIns="91425" rIns="91425" bIns="91425" anchor="ctr" anchorCtr="0">
-            <a:noAutofit/>
-          </a:bodyPr>
-          <a:lstStyle/>
-          <a:p>
-            <a:pPr marL="0" lvl="0" indent="0" algn="ctr" rtl="0">
-              <a:spcBef>
-                <a:spcPts val="0"/>
-              </a:spcBef>
-              <a:spcAft>
-                <a:spcPts val="0"/>
-              </a:spcAft>
-              <a:buNone/>
-            </a:pPr>
-            <a:endParaRPr/>
-          </a:p>
-        </p:txBody>
-      </p:sp>
-      <p:sp>
-        <p:nvSpPr>
-          <p:cNvPr id="176" name="Google Shape;176;p21"/>
-          <p:cNvSpPr txBox="1"/>
-          <p:nvPr/>
-        </p:nvSpPr>
-        <p:spPr>
-          <a:xfrm>
-            <a:off x="429015" y="1419960"/>
-            <a:ext cx="8046600" cy="617100"/>
-          </a:xfrm>
-          <a:prstGeom prst="rect">
-            <a:avLst/>
-          </a:prstGeom>
-          <a:noFill/>
-          <a:ln>
-            <a:noFill/>
-          </a:ln>
-        </p:spPr>
-        <p:txBody>
-          <a:bodyPr spcFirstLastPara="1" wrap="square" lIns="91425" tIns="91425" rIns="91425" bIns="91425" anchor="ctr" anchorCtr="0">
-            <a:noAutofit/>
-          </a:bodyPr>
-          <a:lstStyle/>
-          <a:p>
-            <a:pPr marL="0" lvl="0" indent="0" algn="l" rtl="0">
-              <a:spcBef>
-                <a:spcPts val="0"/>
-              </a:spcBef>
-              <a:spcAft>
-                <a:spcPts val="0"/>
-              </a:spcAft>
-              <a:buNone/>
-            </a:pPr>
-            <a:r>
-              <a:rPr lang="en" sz="1300">
-                <a:solidFill>
-                  <a:srgbClr val="444444"/>
-                </a:solidFill>
-              </a:rPr>
-              <a:t>•  TSN ensures data arrives at the exact required time — critical for real-time control.</a:t>
-            </a:r>
-            <a:endParaRPr sz="1300">
-              <a:solidFill>
-                <a:srgbClr val="444444"/>
-              </a:solidFill>
-            </a:endParaRPr>
-          </a:p>
-        </p:txBody>
-      </p:sp>
-      <p:sp>
-        <p:nvSpPr>
-          <p:cNvPr id="177" name="Google Shape;177;p21"/>
-          <p:cNvSpPr txBox="1"/>
-          <p:nvPr/>
-        </p:nvSpPr>
-        <p:spPr>
-          <a:xfrm>
-            <a:off x="429015" y="2175590"/>
-            <a:ext cx="8046600" cy="617100"/>
-          </a:xfrm>
-          <a:prstGeom prst="rect">
-            <a:avLst/>
-          </a:prstGeom>
-          <a:noFill/>
-          <a:ln>
-            <a:noFill/>
-          </a:ln>
-        </p:spPr>
-        <p:txBody>
-          <a:bodyPr spcFirstLastPara="1" wrap="square" lIns="91425" tIns="91425" rIns="91425" bIns="91425" anchor="ctr" anchorCtr="0">
-            <a:noAutofit/>
-          </a:bodyPr>
-          <a:lstStyle/>
-          <a:p>
-            <a:pPr marL="0" lvl="0" indent="0" algn="l" rtl="0">
-              <a:spcBef>
-                <a:spcPts val="0"/>
-              </a:spcBef>
-              <a:spcAft>
-                <a:spcPts val="0"/>
-              </a:spcAft>
-              <a:buNone/>
-            </a:pPr>
-            <a:r>
-              <a:rPr lang="en" sz="1300">
-                <a:solidFill>
-                  <a:srgbClr val="444444"/>
-                </a:solidFill>
-              </a:rPr>
-              <a:t>•  Closes the "last mile" gap: wireless now matches wired PROFINET and EtherCAT guarantees.</a:t>
-            </a:r>
-            <a:endParaRPr sz="1300">
-              <a:solidFill>
-                <a:srgbClr val="444444"/>
-              </a:solidFill>
-            </a:endParaRPr>
-          </a:p>
-        </p:txBody>
-      </p:sp>
-      <p:sp>
-        <p:nvSpPr>
-          <p:cNvPr id="178" name="Google Shape;178;p21"/>
-          <p:cNvSpPr txBox="1"/>
-          <p:nvPr/>
-        </p:nvSpPr>
-        <p:spPr>
-          <a:xfrm>
-            <a:off x="472515" y="2895958"/>
-            <a:ext cx="8046600" cy="617100"/>
-          </a:xfrm>
-          <a:prstGeom prst="rect">
-            <a:avLst/>
-          </a:prstGeom>
-          <a:noFill/>
-          <a:ln>
-            <a:noFill/>
-          </a:ln>
-        </p:spPr>
-        <p:txBody>
-          <a:bodyPr spcFirstLastPara="1" wrap="square" lIns="91425" tIns="91425" rIns="91425" bIns="91425" anchor="ctr" anchorCtr="0">
-            <a:noAutofit/>
-          </a:bodyPr>
-          <a:lstStyle/>
-          <a:p>
-            <a:pPr marL="0" lvl="0" indent="0" algn="l" rtl="0">
-              <a:spcBef>
-                <a:spcPts val="0"/>
-              </a:spcBef>
-              <a:spcAft>
-                <a:spcPts val="0"/>
-              </a:spcAft>
-              <a:buNone/>
-            </a:pPr>
-            <a:r>
-              <a:rPr lang="en" sz="1300">
-                <a:solidFill>
-                  <a:srgbClr val="444444"/>
-                </a:solidFill>
-              </a:rPr>
-              <a:t>•  A single TSN scheduler can drive both wired and wireless robot axes at the same time.</a:t>
-            </a:r>
-            <a:endParaRPr sz="1300">
-              <a:solidFill>
-                <a:srgbClr val="444444"/>
-              </a:solidFill>
-            </a:endParaRPr>
-          </a:p>
-        </p:txBody>
-      </p:sp>
-    </p:spTree>
-  </p:cSld>
-  <p:clrMapOvr>
-    <a:masterClrMapping/>
-  </p:clrMapOvr>
-</p:sld>
-</file>
-
 <file path=ppt/slides/slide2.xml><?xml version="1.0" encoding="utf-8"?>
 <p:sld xmlns:a="http://schemas.openxmlformats.org/drawingml/2006/main" xmlns:r="http://schemas.openxmlformats.org/officeDocument/2006/relationships" xmlns:p="http://schemas.openxmlformats.org/presentationml/2006/main">
   <p:cSld>
@@ -12817,34 +13293,15 @@
   <p:cSld>
     <p:bg>
       <p:bgPr>
-        <a:gradFill>
-          <a:gsLst>
-            <a:gs pos="0">
-              <a:schemeClr val="accent5">
-                <a:lumMod val="75000"/>
-              </a:schemeClr>
-            </a:gs>
-            <a:gs pos="83000">
-              <a:schemeClr val="accent1">
-                <a:lumMod val="45000"/>
-                <a:lumOff val="55000"/>
-              </a:schemeClr>
-            </a:gs>
-            <a:gs pos="100000">
-              <a:schemeClr val="accent1">
-                <a:lumMod val="30000"/>
-                <a:lumOff val="70000"/>
-              </a:schemeClr>
-            </a:gs>
-          </a:gsLst>
-          <a:lin ang="5400000" scaled="1"/>
-        </a:gradFill>
+        <a:solidFill>
+          <a:srgbClr val="1A56A0"/>
+        </a:solidFill>
         <a:effectLst/>
       </p:bgPr>
     </p:bg>
     <p:spTree>
       <p:nvGrpSpPr>
-        <p:cNvPr id="1" name=""/>
+        <p:cNvPr id="1" name="Shape 139"/>
         <p:cNvGrpSpPr/>
         <p:nvPr/>
       </p:nvGrpSpPr>
@@ -12858,133 +13315,143 @@
       </p:grpSpPr>
       <p:sp>
         <p:nvSpPr>
-          <p:cNvPr id="2" name="Shape 0"/>
-          <p:cNvSpPr/>
+          <p:cNvPr id="140" name="Google Shape;140;p18"/>
+          <p:cNvSpPr txBox="1"/>
           <p:nvPr/>
         </p:nvSpPr>
         <p:spPr>
           <a:xfrm>
-            <a:off x="0" y="1805940"/>
-            <a:ext cx="9144000" cy="1783080"/>
-          </a:xfrm>
-          <a:prstGeom prst="rect">
-            <a:avLst/>
-          </a:prstGeom>
-          <a:solidFill>
-            <a:srgbClr val="0F6E78"/>
-          </a:solidFill>
-          <a:ln w="12700">
-            <a:solidFill>
-              <a:srgbClr val="0F6E78"/>
-            </a:solidFill>
-            <a:prstDash val="solid"/>
+            <a:off x="731520" y="1285875"/>
+            <a:ext cx="7680900" cy="514500"/>
+          </a:xfrm>
+          <a:prstGeom prst="rect">
+            <a:avLst/>
+          </a:prstGeom>
+          <a:noFill/>
+          <a:ln>
+            <a:noFill/>
           </a:ln>
         </p:spPr>
         <p:txBody>
-          <a:bodyPr/>
+          <a:bodyPr spcFirstLastPara="1" wrap="square" lIns="91425" tIns="91425" rIns="91425" bIns="91425" anchor="ctr" anchorCtr="0">
+            <a:noAutofit/>
+          </a:bodyPr>
           <a:lstStyle/>
           <a:p>
-            <a:endParaRPr lang="LID4096"/>
-          </a:p>
-        </p:txBody>
-      </p:sp>
-      <p:sp>
-        <p:nvSpPr>
-          <p:cNvPr id="3" name="Text 1"/>
-          <p:cNvSpPr/>
+            <a:pPr marL="0" lvl="0" indent="0" algn="l" rtl="0">
+              <a:spcBef>
+                <a:spcPts val="0"/>
+              </a:spcBef>
+              <a:spcAft>
+                <a:spcPts val="0"/>
+              </a:spcAft>
+              <a:buNone/>
+            </a:pPr>
+            <a:endParaRPr sz="1600">
+              <a:solidFill>
+                <a:srgbClr val="FFFFFF"/>
+              </a:solidFill>
+            </a:endParaRPr>
+          </a:p>
+        </p:txBody>
+      </p:sp>
+      <p:sp>
+        <p:nvSpPr>
+          <p:cNvPr id="141" name="Google Shape;141;p18"/>
+          <p:cNvSpPr txBox="1"/>
           <p:nvPr/>
         </p:nvSpPr>
         <p:spPr>
           <a:xfrm>
-            <a:off x="731520" y="1828800"/>
-            <a:ext cx="7680960" cy="411480"/>
+            <a:off x="731520" y="1800225"/>
+            <a:ext cx="7680900" cy="1028700"/>
           </a:xfrm>
           <a:prstGeom prst="rect">
             <a:avLst/>
           </a:prstGeom>
           <a:noFill/>
-          <a:ln/>
-        </p:spPr>
-        <p:txBody>
-          <a:bodyPr wrap="square" rtlCol="0" anchor="ctr"/>
+          <a:ln>
+            <a:noFill/>
+          </a:ln>
+        </p:spPr>
+        <p:txBody>
+          <a:bodyPr spcFirstLastPara="1" wrap="square" lIns="91425" tIns="91425" rIns="91425" bIns="91425" anchor="ctr" anchorCtr="0">
+            <a:noAutofit/>
+          </a:bodyPr>
           <a:lstStyle/>
           <a:p>
-            <a:pPr marL="0" indent="0" algn="ctr">
-              <a:buNone/>
-            </a:pPr>
-            <a:endParaRPr lang="en-US" sz="1600" dirty="0"/>
-          </a:p>
-        </p:txBody>
-      </p:sp>
-      <p:sp>
-        <p:nvSpPr>
-          <p:cNvPr id="4" name="Text 2"/>
-          <p:cNvSpPr/>
-          <p:nvPr/>
-        </p:nvSpPr>
-        <p:spPr>
-          <a:xfrm>
-            <a:off x="731520" y="2240280"/>
-            <a:ext cx="7680960" cy="914400"/>
-          </a:xfrm>
-          <a:prstGeom prst="rect">
-            <a:avLst/>
-          </a:prstGeom>
-          <a:noFill/>
-          <a:ln/>
-        </p:spPr>
-        <p:txBody>
-          <a:bodyPr wrap="square" rtlCol="0" anchor="ctr"/>
-          <a:lstStyle/>
-          <a:p>
-            <a:pPr marL="0" indent="0" algn="ctr">
+            <a:pPr marL="0" lvl="0" indent="0" algn="l" rtl="0">
+              <a:spcBef>
+                <a:spcPts val="0"/>
+              </a:spcBef>
+              <a:spcAft>
+                <a:spcPts val="0"/>
+              </a:spcAft>
               <a:buNone/>
             </a:pPr>
             <a:r>
-              <a:rPr lang="en-US" sz="3200" b="1" dirty="0">
+              <a:rPr lang="en" sz="3600" b="1">
                 <a:solidFill>
                   <a:srgbClr val="FFFFFF"/>
                 </a:solidFill>
               </a:rPr>
-              <a:t>Wireless Standards: Architecture and Protocol Stack</a:t>
+              <a:t>Emerging Trends</a:t>
             </a:r>
-            <a:endParaRPr lang="en-US" sz="3200" dirty="0"/>
-          </a:p>
-        </p:txBody>
-      </p:sp>
-      <p:sp>
-        <p:nvSpPr>
-          <p:cNvPr id="5" name="Text 3"/>
-          <p:cNvSpPr/>
+            <a:endParaRPr sz="3600" b="1">
+              <a:solidFill>
+                <a:srgbClr val="FFFFFF"/>
+              </a:solidFill>
+            </a:endParaRPr>
+          </a:p>
+        </p:txBody>
+      </p:sp>
+      <p:sp>
+        <p:nvSpPr>
+          <p:cNvPr id="142" name="Google Shape;142;p18"/>
+          <p:cNvSpPr txBox="1"/>
           <p:nvPr/>
         </p:nvSpPr>
         <p:spPr>
           <a:xfrm>
-            <a:off x="731520" y="3653307"/>
-            <a:ext cx="7680960" cy="457200"/>
+            <a:off x="731520" y="3086100"/>
+            <a:ext cx="7680900" cy="514500"/>
           </a:xfrm>
           <a:prstGeom prst="rect">
             <a:avLst/>
           </a:prstGeom>
           <a:noFill/>
-          <a:ln/>
-        </p:spPr>
-        <p:txBody>
-          <a:bodyPr wrap="square" rtlCol="0" anchor="ctr"/>
+          <a:ln>
+            <a:noFill/>
+          </a:ln>
+        </p:spPr>
+        <p:txBody>
+          <a:bodyPr spcFirstLastPara="1" wrap="square" lIns="91425" tIns="91425" rIns="91425" bIns="91425" anchor="ctr" anchorCtr="0">
+            <a:noAutofit/>
+          </a:bodyPr>
           <a:lstStyle/>
           <a:p>
-            <a:pPr marL="0" indent="0" algn="ctr">
+            <a:pPr marL="0" lvl="0" indent="0" algn="l" rtl="0">
+              <a:spcBef>
+                <a:spcPts val="0"/>
+              </a:spcBef>
+              <a:spcAft>
+                <a:spcPts val="0"/>
+              </a:spcAft>
               <a:buNone/>
             </a:pPr>
             <a:r>
-              <a:rPr lang="en-US" sz="1500" dirty="0">
+              <a:rPr lang="en">
                 <a:solidFill>
-                  <a:srgbClr val="0F6E78"/>
+                  <a:srgbClr val="BDD7EE"/>
                 </a:solidFill>
               </a:rPr>
-              <a:t>Wi-Fi (802.11)   ·   Zigbee (802.15.4)   ·   5G New Radio</a:t>
+              <a:t>Wi-Fi 7  ·  Private 5G  ·  Wireless TSN  ·  6G Outlook</a:t>
             </a:r>
-            <a:endParaRPr lang="en-US" sz="1500" dirty="0"/>
+            <a:endParaRPr>
+              <a:solidFill>
+                <a:srgbClr val="BDD7EE"/>
+              </a:solidFill>
+            </a:endParaRPr>
           </a:p>
         </p:txBody>
       </p:sp>
@@ -13009,7 +13476,7 @@
     </p:bg>
     <p:spTree>
       <p:nvGrpSpPr>
-        <p:cNvPr id="1" name=""/>
+        <p:cNvPr id="1" name="Shape 146"/>
         <p:cNvGrpSpPr/>
         <p:nvPr/>
       </p:nvGrpSpPr>
@@ -13023,527 +13490,564 @@
       </p:grpSpPr>
       <p:sp>
         <p:nvSpPr>
-          <p:cNvPr id="2" name="Text 0"/>
+          <p:cNvPr id="147" name="Google Shape;147;p19"/>
+          <p:cNvSpPr txBox="1"/>
+          <p:nvPr/>
+        </p:nvSpPr>
+        <p:spPr>
+          <a:xfrm>
+            <a:off x="365760" y="205740"/>
+            <a:ext cx="8412600" cy="668700"/>
+          </a:xfrm>
+          <a:prstGeom prst="rect">
+            <a:avLst/>
+          </a:prstGeom>
+          <a:noFill/>
+          <a:ln>
+            <a:noFill/>
+          </a:ln>
+        </p:spPr>
+        <p:txBody>
+          <a:bodyPr spcFirstLastPara="1" wrap="square" lIns="91425" tIns="91425" rIns="91425" bIns="91425" anchor="ctr" anchorCtr="0">
+            <a:noAutofit/>
+          </a:bodyPr>
+          <a:lstStyle/>
+          <a:p>
+            <a:pPr marL="0" lvl="0" indent="0" algn="l" rtl="0">
+              <a:spcBef>
+                <a:spcPts val="0"/>
+              </a:spcBef>
+              <a:spcAft>
+                <a:spcPts val="0"/>
+              </a:spcAft>
+              <a:buNone/>
+            </a:pPr>
+            <a:r>
+              <a:rPr lang="en" sz="2200" b="1">
+                <a:solidFill>
+                  <a:srgbClr val="1A56A0"/>
+                </a:solidFill>
+              </a:rPr>
+              <a:t>5.1  Wi-Fi 7 — Multi-Link Operation (MLO)</a:t>
+            </a:r>
+            <a:endParaRPr sz="2200" b="1">
+              <a:solidFill>
+                <a:srgbClr val="1A56A0"/>
+              </a:solidFill>
+            </a:endParaRPr>
+          </a:p>
+        </p:txBody>
+      </p:sp>
+      <p:sp>
+        <p:nvSpPr>
+          <p:cNvPr id="148" name="Google Shape;148;p19"/>
           <p:cNvSpPr/>
           <p:nvPr/>
         </p:nvSpPr>
         <p:spPr>
           <a:xfrm>
-            <a:off x="411480" y="256032"/>
-            <a:ext cx="8321040" cy="502920"/>
-          </a:xfrm>
-          <a:prstGeom prst="rect">
-            <a:avLst/>
-          </a:prstGeom>
-          <a:noFill/>
-          <a:ln/>
-        </p:spPr>
-        <p:txBody>
-          <a:bodyPr wrap="square" rtlCol="0" anchor="ctr"/>
+            <a:off x="365760" y="900113"/>
+            <a:ext cx="8412600" cy="20700"/>
+          </a:xfrm>
+          <a:prstGeom prst="rect">
+            <a:avLst/>
+          </a:prstGeom>
+          <a:solidFill>
+            <a:srgbClr val="1A56A0"/>
+          </a:solidFill>
+          <a:ln>
+            <a:noFill/>
+          </a:ln>
+        </p:spPr>
+        <p:txBody>
+          <a:bodyPr spcFirstLastPara="1" wrap="square" lIns="91425" tIns="91425" rIns="91425" bIns="91425" anchor="ctr" anchorCtr="0">
+            <a:noAutofit/>
+          </a:bodyPr>
           <a:lstStyle/>
           <a:p>
-            <a:pPr marL="0" indent="0">
-              <a:buNone/>
-            </a:pPr>
-            <a:r>
-              <a:rPr lang="en-US" sz="2300" b="1" dirty="0">
-                <a:solidFill>
-                  <a:srgbClr val="F2A900"/>
-                </a:solidFill>
-                <a:latin typeface="Calibri" pitchFamily="34" charset="0"/>
-                <a:ea typeface="Calibri" pitchFamily="34" charset="-122"/>
-                <a:cs typeface="Calibri" pitchFamily="34" charset="-120"/>
-              </a:rPr>
-              <a:t>3.1  </a:t>
-            </a:r>
-            <a:r>
-              <a:rPr lang="en-US" sz="2300" b="1" dirty="0">
-                <a:solidFill>
-                  <a:srgbClr val="0F6E78"/>
-                </a:solidFill>
-                <a:latin typeface="Calibri" pitchFamily="34" charset="0"/>
-                <a:ea typeface="Calibri" pitchFamily="34" charset="-122"/>
-                <a:cs typeface="Calibri" pitchFamily="34" charset="-120"/>
-              </a:rPr>
-              <a:t>IEEE 802.11 (Wi-Fi)</a:t>
-            </a:r>
-            <a:endParaRPr lang="en-US" sz="2300" dirty="0"/>
-          </a:p>
-        </p:txBody>
-      </p:sp>
-      <p:sp>
-        <p:nvSpPr>
-          <p:cNvPr id="3" name="Shape 1"/>
+            <a:pPr marL="0" lvl="0" indent="0" algn="ctr" rtl="0">
+              <a:spcBef>
+                <a:spcPts val="0"/>
+              </a:spcBef>
+              <a:spcAft>
+                <a:spcPts val="0"/>
+              </a:spcAft>
+              <a:buNone/>
+            </a:pPr>
+            <a:endParaRPr/>
+          </a:p>
+        </p:txBody>
+      </p:sp>
+      <p:sp>
+        <p:nvSpPr>
+          <p:cNvPr id="149" name="Google Shape;149;p19"/>
           <p:cNvSpPr/>
           <p:nvPr/>
         </p:nvSpPr>
         <p:spPr>
           <a:xfrm>
-            <a:off x="411480" y="749808"/>
-            <a:ext cx="8321040" cy="22860"/>
+            <a:off x="365760" y="1131570"/>
+            <a:ext cx="2469000" cy="822900"/>
           </a:xfrm>
           <a:prstGeom prst="rect">
             <a:avLst/>
           </a:prstGeom>
           <a:solidFill>
-            <a:srgbClr val="0F6E78"/>
+            <a:srgbClr val="1A56A0"/>
           </a:solidFill>
-          <a:ln w="12700">
-            <a:solidFill>
-              <a:srgbClr val="0F6E78"/>
-            </a:solidFill>
-            <a:prstDash val="solid"/>
+          <a:ln>
+            <a:noFill/>
           </a:ln>
         </p:spPr>
         <p:txBody>
-          <a:bodyPr/>
+          <a:bodyPr spcFirstLastPara="1" wrap="square" lIns="91425" tIns="91425" rIns="91425" bIns="91425" anchor="ctr" anchorCtr="0">
+            <a:noAutofit/>
+          </a:bodyPr>
           <a:lstStyle/>
           <a:p>
-            <a:endParaRPr lang="LID4096"/>
-          </a:p>
-        </p:txBody>
-      </p:sp>
-      <p:sp>
-        <p:nvSpPr>
-          <p:cNvPr id="4" name="Text 2"/>
-          <p:cNvSpPr/>
+            <a:pPr marL="0" lvl="0" indent="0" algn="ctr" rtl="0">
+              <a:spcBef>
+                <a:spcPts val="0"/>
+              </a:spcBef>
+              <a:spcAft>
+                <a:spcPts val="0"/>
+              </a:spcAft>
+              <a:buNone/>
+            </a:pPr>
+            <a:endParaRPr/>
+          </a:p>
+        </p:txBody>
+      </p:sp>
+      <p:sp>
+        <p:nvSpPr>
+          <p:cNvPr id="150" name="Google Shape;150;p19"/>
+          <p:cNvSpPr txBox="1"/>
           <p:nvPr/>
         </p:nvSpPr>
         <p:spPr>
           <a:xfrm>
-            <a:off x="457200" y="1051560"/>
-            <a:ext cx="3931920" cy="2377440"/>
+            <a:off x="365760" y="1131570"/>
+            <a:ext cx="2469000" cy="822900"/>
           </a:xfrm>
           <a:prstGeom prst="rect">
             <a:avLst/>
           </a:prstGeom>
           <a:noFill/>
-          <a:ln/>
-        </p:spPr>
-        <p:txBody>
-          <a:bodyPr wrap="square" rtlCol="0" anchor="ctr"/>
+          <a:ln>
+            <a:noFill/>
+          </a:ln>
+        </p:spPr>
+        <p:txBody>
+          <a:bodyPr spcFirstLastPara="1" wrap="square" lIns="91425" tIns="91425" rIns="91425" bIns="91425" anchor="ctr" anchorCtr="0">
+            <a:noAutofit/>
+          </a:bodyPr>
           <a:lstStyle/>
           <a:p>
-            <a:pPr marL="342900" indent="-342900">
-              <a:spcAft>
-                <a:spcPts val="1000"/>
-              </a:spcAft>
-              <a:buSzPct val="100000"/>
-              <a:buChar char="•"/>
+            <a:pPr marL="0" lvl="0" indent="0" algn="ctr" rtl="0">
+              <a:spcBef>
+                <a:spcPts val="0"/>
+              </a:spcBef>
+              <a:spcAft>
+                <a:spcPts val="0"/>
+              </a:spcAft>
+              <a:buNone/>
             </a:pPr>
             <a:r>
-              <a:rPr lang="en-US" sz="1500" dirty="0">
-                <a:solidFill>
-                  <a:srgbClr val="243B40"/>
-                </a:solidFill>
-                <a:latin typeface="Calibri" pitchFamily="34" charset="0"/>
-                <a:ea typeface="Calibri" pitchFamily="34" charset="-122"/>
-                <a:cs typeface="Calibri" pitchFamily="34" charset="-120"/>
-              </a:rPr>
-              <a:t>Operates on 2.4, 5 and 6 GHz bands</a:t>
-            </a:r>
-            <a:endParaRPr lang="en-US" sz="1500" dirty="0"/>
-          </a:p>
-          <a:p>
-            <a:pPr marL="342900" indent="-342900">
-              <a:spcAft>
-                <a:spcPts val="1000"/>
-              </a:spcAft>
-              <a:buSzPct val="100000"/>
-              <a:buChar char="•"/>
-            </a:pPr>
-            <a:r>
-              <a:rPr lang="en-US" sz="1500" dirty="0">
-                <a:solidFill>
-                  <a:srgbClr val="243B40"/>
-                </a:solidFill>
-                <a:latin typeface="Calibri" pitchFamily="34" charset="0"/>
-                <a:ea typeface="Calibri" pitchFamily="34" charset="-122"/>
-                <a:cs typeface="Calibri" pitchFamily="34" charset="-120"/>
-              </a:rPr>
-              <a:t>CSMA/CA for channel access</a:t>
-            </a:r>
-            <a:endParaRPr lang="en-US" sz="1500" dirty="0"/>
-          </a:p>
-          <a:p>
-            <a:pPr marL="342900" indent="-342900">
-              <a:spcAft>
-                <a:spcPts val="1000"/>
-              </a:spcAft>
-              <a:buSzPct val="100000"/>
-              <a:buChar char="•"/>
-            </a:pPr>
-            <a:r>
-              <a:rPr lang="en-US" sz="1500" dirty="0">
-                <a:solidFill>
-                  <a:srgbClr val="243B40"/>
-                </a:solidFill>
-                <a:latin typeface="Calibri" pitchFamily="34" charset="0"/>
-                <a:ea typeface="Calibri" pitchFamily="34" charset="-122"/>
-                <a:cs typeface="Calibri" pitchFamily="34" charset="-120"/>
-              </a:rPr>
-              <a:t>Wi-Fi 6 adds OFDMA and TWT</a:t>
-            </a:r>
-            <a:endParaRPr lang="en-US" sz="1500" dirty="0"/>
-          </a:p>
-          <a:p>
-            <a:pPr marL="342900" indent="-342900">
-              <a:spcAft>
-                <a:spcPts val="1000"/>
-              </a:spcAft>
-              <a:buSzPct val="100000"/>
-              <a:buChar char="•"/>
-            </a:pPr>
-            <a:r>
-              <a:rPr lang="en-US" sz="1500" dirty="0">
-                <a:solidFill>
-                  <a:srgbClr val="243B40"/>
-                </a:solidFill>
-                <a:latin typeface="Calibri" pitchFamily="34" charset="0"/>
-                <a:ea typeface="Calibri" pitchFamily="34" charset="-122"/>
-                <a:cs typeface="Calibri" pitchFamily="34" charset="-120"/>
-              </a:rPr>
-              <a:t>802.11r enables fast roaming for AGVs</a:t>
-            </a:r>
-            <a:endParaRPr lang="en-US" sz="1500" dirty="0"/>
-          </a:p>
-          <a:p>
-            <a:pPr marL="342900" indent="-342900">
-              <a:spcAft>
-                <a:spcPts val="1000"/>
-              </a:spcAft>
-              <a:buSzPct val="100000"/>
-              <a:buChar char="•"/>
-            </a:pPr>
-            <a:r>
-              <a:rPr lang="en-US" sz="1500" dirty="0">
-                <a:solidFill>
-                  <a:srgbClr val="243B40"/>
-                </a:solidFill>
-                <a:latin typeface="Calibri" pitchFamily="34" charset="0"/>
-                <a:ea typeface="Calibri" pitchFamily="34" charset="-122"/>
-                <a:cs typeface="Calibri" pitchFamily="34" charset="-120"/>
-              </a:rPr>
-              <a:t>Throughput up to 9.6 Gbps</a:t>
-            </a:r>
-            <a:endParaRPr lang="en-US" sz="1500" dirty="0"/>
-          </a:p>
-        </p:txBody>
-      </p:sp>
-      <p:sp>
-        <p:nvSpPr>
-          <p:cNvPr id="5" name="Shape 3"/>
-          <p:cNvSpPr/>
-          <p:nvPr/>
-        </p:nvSpPr>
-        <p:spPr>
-          <a:xfrm>
-            <a:off x="457200" y="3703320"/>
-            <a:ext cx="914400" cy="310896"/>
-          </a:xfrm>
-          <a:prstGeom prst="roundRect">
-            <a:avLst>
-              <a:gd name="adj" fmla="val 50000"/>
-            </a:avLst>
-          </a:prstGeom>
-          <a:solidFill>
-            <a:srgbClr val="1C8C99"/>
-          </a:solidFill>
-          <a:ln w="12700">
-            <a:solidFill>
-              <a:srgbClr val="1C8C99"/>
-            </a:solidFill>
-            <a:prstDash val="solid"/>
-          </a:ln>
-        </p:spPr>
-        <p:txBody>
-          <a:bodyPr/>
-          <a:lstStyle/>
-          <a:p>
-            <a:endParaRPr lang="LID4096"/>
-          </a:p>
-        </p:txBody>
-      </p:sp>
-      <p:sp>
-        <p:nvSpPr>
-          <p:cNvPr id="6" name="Text 4"/>
-          <p:cNvSpPr/>
-          <p:nvPr/>
-        </p:nvSpPr>
-        <p:spPr>
-          <a:xfrm>
-            <a:off x="457200" y="3703320"/>
-            <a:ext cx="914400" cy="310896"/>
-          </a:xfrm>
-          <a:prstGeom prst="rect">
-            <a:avLst/>
-          </a:prstGeom>
-          <a:noFill/>
-          <a:ln/>
-        </p:spPr>
-        <p:txBody>
-          <a:bodyPr wrap="square" rtlCol="0" anchor="ctr"/>
-          <a:lstStyle/>
-          <a:p>
-            <a:pPr marL="0" indent="0" algn="ctr">
-              <a:buNone/>
-            </a:pPr>
-            <a:r>
-              <a:rPr lang="en-US" sz="1100" b="1" dirty="0">
+              <a:rPr lang="en" sz="1600" b="1">
                 <a:solidFill>
                   <a:srgbClr val="FFFFFF"/>
                 </a:solidFill>
               </a:rPr>
-              <a:t>PROS</a:t>
+              <a:t>2.4 GHz</a:t>
             </a:r>
-            <a:endParaRPr lang="en-US" sz="1100" dirty="0"/>
-          </a:p>
-        </p:txBody>
-      </p:sp>
-      <p:sp>
-        <p:nvSpPr>
-          <p:cNvPr id="7" name="Text 5"/>
+            <a:endParaRPr sz="1600" b="1">
+              <a:solidFill>
+                <a:srgbClr val="FFFFFF"/>
+              </a:solidFill>
+            </a:endParaRPr>
+          </a:p>
+        </p:txBody>
+      </p:sp>
+      <p:sp>
+        <p:nvSpPr>
+          <p:cNvPr id="151" name="Google Shape;151;p19"/>
           <p:cNvSpPr/>
           <p:nvPr/>
         </p:nvSpPr>
         <p:spPr>
           <a:xfrm>
-            <a:off x="1463040" y="3703320"/>
-            <a:ext cx="3017520" cy="310896"/>
+            <a:off x="3291840" y="1131570"/>
+            <a:ext cx="2469000" cy="822900"/>
+          </a:xfrm>
+          <a:prstGeom prst="rect">
+            <a:avLst/>
+          </a:prstGeom>
+          <a:solidFill>
+            <a:srgbClr val="1A56A0"/>
+          </a:solidFill>
+          <a:ln>
+            <a:noFill/>
+          </a:ln>
+        </p:spPr>
+        <p:txBody>
+          <a:bodyPr spcFirstLastPara="1" wrap="square" lIns="91425" tIns="91425" rIns="91425" bIns="91425" anchor="ctr" anchorCtr="0">
+            <a:noAutofit/>
+          </a:bodyPr>
+          <a:lstStyle/>
+          <a:p>
+            <a:pPr marL="0" lvl="0" indent="0" algn="ctr" rtl="0">
+              <a:spcBef>
+                <a:spcPts val="0"/>
+              </a:spcBef>
+              <a:spcAft>
+                <a:spcPts val="0"/>
+              </a:spcAft>
+              <a:buNone/>
+            </a:pPr>
+            <a:endParaRPr/>
+          </a:p>
+        </p:txBody>
+      </p:sp>
+      <p:sp>
+        <p:nvSpPr>
+          <p:cNvPr id="152" name="Google Shape;152;p19"/>
+          <p:cNvSpPr txBox="1"/>
+          <p:nvPr/>
+        </p:nvSpPr>
+        <p:spPr>
+          <a:xfrm>
+            <a:off x="3291840" y="1131570"/>
+            <a:ext cx="2469000" cy="822900"/>
           </a:xfrm>
           <a:prstGeom prst="rect">
             <a:avLst/>
           </a:prstGeom>
           <a:noFill/>
-          <a:ln/>
-        </p:spPr>
-        <p:txBody>
-          <a:bodyPr wrap="square" rtlCol="0" anchor="ctr"/>
+          <a:ln>
+            <a:noFill/>
+          </a:ln>
+        </p:spPr>
+        <p:txBody>
+          <a:bodyPr spcFirstLastPara="1" wrap="square" lIns="91425" tIns="91425" rIns="91425" bIns="91425" anchor="ctr" anchorCtr="0">
+            <a:noAutofit/>
+          </a:bodyPr>
           <a:lstStyle/>
           <a:p>
-            <a:pPr marL="0" indent="0">
+            <a:pPr marL="0" lvl="0" indent="0" algn="ctr" rtl="0">
+              <a:spcBef>
+                <a:spcPts val="0"/>
+              </a:spcBef>
+              <a:spcAft>
+                <a:spcPts val="0"/>
+              </a:spcAft>
               <a:buNone/>
             </a:pPr>
             <a:r>
-              <a:rPr lang="en-US" sz="1100" dirty="0">
-                <a:solidFill>
-                  <a:srgbClr val="5A6B6E"/>
-                </a:solidFill>
-              </a:rPr>
-              <a:t>High speed, huge ecosystem, native TCP/IP</a:t>
-            </a:r>
-            <a:endParaRPr lang="en-US" sz="1100" dirty="0"/>
-          </a:p>
-        </p:txBody>
-      </p:sp>
-      <p:sp>
-        <p:nvSpPr>
-          <p:cNvPr id="8" name="Shape 6"/>
-          <p:cNvSpPr/>
-          <p:nvPr/>
-        </p:nvSpPr>
-        <p:spPr>
-          <a:xfrm>
-            <a:off x="457200" y="4114800"/>
-            <a:ext cx="914400" cy="310896"/>
-          </a:xfrm>
-          <a:prstGeom prst="roundRect">
-            <a:avLst>
-              <a:gd name="adj" fmla="val 50000"/>
-            </a:avLst>
-          </a:prstGeom>
-          <a:solidFill>
-            <a:srgbClr val="F2A900"/>
-          </a:solidFill>
-          <a:ln w="12700">
-            <a:solidFill>
-              <a:srgbClr val="F2A900"/>
-            </a:solidFill>
-            <a:prstDash val="solid"/>
-          </a:ln>
-        </p:spPr>
-        <p:txBody>
-          <a:bodyPr/>
-          <a:lstStyle/>
-          <a:p>
-            <a:endParaRPr lang="LID4096"/>
-          </a:p>
-        </p:txBody>
-      </p:sp>
-      <p:sp>
-        <p:nvSpPr>
-          <p:cNvPr id="9" name="Text 7"/>
-          <p:cNvSpPr/>
-          <p:nvPr/>
-        </p:nvSpPr>
-        <p:spPr>
-          <a:xfrm>
-            <a:off x="457200" y="4114800"/>
-            <a:ext cx="914400" cy="310896"/>
-          </a:xfrm>
-          <a:prstGeom prst="rect">
-            <a:avLst/>
-          </a:prstGeom>
-          <a:noFill/>
-          <a:ln/>
-        </p:spPr>
-        <p:txBody>
-          <a:bodyPr wrap="square" rtlCol="0" anchor="ctr"/>
-          <a:lstStyle/>
-          <a:p>
-            <a:pPr marL="0" indent="0" algn="ctr">
-              <a:buNone/>
-            </a:pPr>
-            <a:r>
-              <a:rPr lang="en-US" sz="1100" b="1" dirty="0">
+              <a:rPr lang="en" sz="1600" b="1">
                 <a:solidFill>
                   <a:srgbClr val="FFFFFF"/>
                 </a:solidFill>
               </a:rPr>
-              <a:t>CONS</a:t>
+              <a:t>5 GHz</a:t>
             </a:r>
-            <a:endParaRPr lang="en-US" sz="1100" dirty="0"/>
-          </a:p>
-        </p:txBody>
-      </p:sp>
-      <p:sp>
-        <p:nvSpPr>
-          <p:cNvPr id="10" name="Text 8"/>
+            <a:endParaRPr sz="1600" b="1">
+              <a:solidFill>
+                <a:srgbClr val="FFFFFF"/>
+              </a:solidFill>
+            </a:endParaRPr>
+          </a:p>
+        </p:txBody>
+      </p:sp>
+      <p:sp>
+        <p:nvSpPr>
+          <p:cNvPr id="153" name="Google Shape;153;p19"/>
           <p:cNvSpPr/>
           <p:nvPr/>
         </p:nvSpPr>
         <p:spPr>
           <a:xfrm>
-            <a:off x="1463040" y="4114800"/>
-            <a:ext cx="3017520" cy="310896"/>
+            <a:off x="6217920" y="1131570"/>
+            <a:ext cx="2469000" cy="822900"/>
+          </a:xfrm>
+          <a:prstGeom prst="rect">
+            <a:avLst/>
+          </a:prstGeom>
+          <a:solidFill>
+            <a:srgbClr val="1A56A0"/>
+          </a:solidFill>
+          <a:ln>
+            <a:noFill/>
+          </a:ln>
+        </p:spPr>
+        <p:txBody>
+          <a:bodyPr spcFirstLastPara="1" wrap="square" lIns="91425" tIns="91425" rIns="91425" bIns="91425" anchor="ctr" anchorCtr="0">
+            <a:noAutofit/>
+          </a:bodyPr>
+          <a:lstStyle/>
+          <a:p>
+            <a:pPr marL="0" lvl="0" indent="0" algn="ctr" rtl="0">
+              <a:spcBef>
+                <a:spcPts val="0"/>
+              </a:spcBef>
+              <a:spcAft>
+                <a:spcPts val="0"/>
+              </a:spcAft>
+              <a:buNone/>
+            </a:pPr>
+            <a:endParaRPr/>
+          </a:p>
+        </p:txBody>
+      </p:sp>
+      <p:sp>
+        <p:nvSpPr>
+          <p:cNvPr id="154" name="Google Shape;154;p19"/>
+          <p:cNvSpPr txBox="1"/>
+          <p:nvPr/>
+        </p:nvSpPr>
+        <p:spPr>
+          <a:xfrm>
+            <a:off x="6217920" y="1131570"/>
+            <a:ext cx="2469000" cy="822900"/>
           </a:xfrm>
           <a:prstGeom prst="rect">
             <a:avLst/>
           </a:prstGeom>
           <a:noFill/>
-          <a:ln/>
-        </p:spPr>
-        <p:txBody>
-          <a:bodyPr wrap="square" rtlCol="0" anchor="ctr"/>
+          <a:ln>
+            <a:noFill/>
+          </a:ln>
+        </p:spPr>
+        <p:txBody>
+          <a:bodyPr spcFirstLastPara="1" wrap="square" lIns="91425" tIns="91425" rIns="91425" bIns="91425" anchor="ctr" anchorCtr="0">
+            <a:noAutofit/>
+          </a:bodyPr>
           <a:lstStyle/>
           <a:p>
-            <a:pPr marL="0" indent="0">
+            <a:pPr marL="0" lvl="0" indent="0" algn="ctr" rtl="0">
+              <a:spcBef>
+                <a:spcPts val="0"/>
+              </a:spcBef>
+              <a:spcAft>
+                <a:spcPts val="0"/>
+              </a:spcAft>
               <a:buNone/>
             </a:pPr>
             <a:r>
-              <a:rPr lang="en-US" sz="1100" dirty="0">
+              <a:rPr lang="en" sz="1600" b="1">
                 <a:solidFill>
-                  <a:srgbClr val="5A6B6E"/>
+                  <a:srgbClr val="FFFFFF"/>
                 </a:solidFill>
               </a:rPr>
-              <a:t>Unreliable under load, shared spectrum</a:t>
+              <a:t>6 GHz</a:t>
             </a:r>
-            <a:endParaRPr lang="en-US" sz="1100" dirty="0"/>
-          </a:p>
-        </p:txBody>
-      </p:sp>
-      <p:sp>
-        <p:nvSpPr>
-          <p:cNvPr id="12" name="Text 10"/>
-          <p:cNvSpPr/>
+            <a:endParaRPr sz="1600" b="1">
+              <a:solidFill>
+                <a:srgbClr val="FFFFFF"/>
+              </a:solidFill>
+            </a:endParaRPr>
+          </a:p>
+        </p:txBody>
+      </p:sp>
+      <p:sp>
+        <p:nvSpPr>
+          <p:cNvPr id="155" name="Google Shape;155;p19"/>
+          <p:cNvSpPr txBox="1"/>
           <p:nvPr/>
         </p:nvSpPr>
         <p:spPr>
           <a:xfrm>
-            <a:off x="4754880" y="2377440"/>
-            <a:ext cx="3931920" cy="457200"/>
+            <a:off x="365760" y="2005965"/>
+            <a:ext cx="8412600" cy="411600"/>
           </a:xfrm>
           <a:prstGeom prst="rect">
             <a:avLst/>
           </a:prstGeom>
           <a:noFill/>
-          <a:ln/>
-        </p:spPr>
-        <p:txBody>
-          <a:bodyPr wrap="square" rtlCol="0" anchor="ctr"/>
+          <a:ln>
+            <a:noFill/>
+          </a:ln>
+        </p:spPr>
+        <p:txBody>
+          <a:bodyPr spcFirstLastPara="1" wrap="square" lIns="91425" tIns="91425" rIns="91425" bIns="91425" anchor="ctr" anchorCtr="0">
+            <a:noAutofit/>
+          </a:bodyPr>
           <a:lstStyle/>
           <a:p>
-            <a:pPr marL="0" indent="0" algn="ctr">
+            <a:pPr marL="0" lvl="0" indent="0" algn="ctr" rtl="0">
+              <a:spcBef>
+                <a:spcPts val="0"/>
+              </a:spcBef>
+              <a:spcAft>
+                <a:spcPts val="0"/>
+              </a:spcAft>
               <a:buNone/>
             </a:pPr>
             <a:r>
-              <a:rPr lang="en-US" sz="1600" b="1" dirty="0">
+              <a:rPr lang="en" sz="1200" i="1">
                 <a:solidFill>
-                  <a:srgbClr val="1C8C99"/>
+                  <a:srgbClr val="666666"/>
                 </a:solidFill>
               </a:rPr>
-              <a:t>[ IMAGE ]</a:t>
+              <a:t>All three frequency bands used simultaneously</a:t>
             </a:r>
-            <a:endParaRPr lang="en-US" sz="1600" dirty="0"/>
-          </a:p>
-        </p:txBody>
-      </p:sp>
-      <p:sp>
-        <p:nvSpPr>
-          <p:cNvPr id="13" name="Text 11"/>
-          <p:cNvSpPr/>
+            <a:endParaRPr sz="1200" i="1">
+              <a:solidFill>
+                <a:srgbClr val="666666"/>
+              </a:solidFill>
+            </a:endParaRPr>
+          </a:p>
+        </p:txBody>
+      </p:sp>
+      <p:sp>
+        <p:nvSpPr>
+          <p:cNvPr id="156" name="Google Shape;156;p19"/>
+          <p:cNvSpPr txBox="1"/>
           <p:nvPr/>
         </p:nvSpPr>
         <p:spPr>
           <a:xfrm>
-            <a:off x="4754880" y="2834640"/>
-            <a:ext cx="3931920" cy="365760"/>
+            <a:off x="548640" y="2571750"/>
+            <a:ext cx="8046600" cy="617100"/>
           </a:xfrm>
           <a:prstGeom prst="rect">
             <a:avLst/>
           </a:prstGeom>
           <a:noFill/>
-          <a:ln/>
-        </p:spPr>
-        <p:txBody>
-          <a:bodyPr wrap="square" rtlCol="0" anchor="ctr"/>
+          <a:ln>
+            <a:noFill/>
+          </a:ln>
+        </p:spPr>
+        <p:txBody>
+          <a:bodyPr spcFirstLastPara="1" wrap="square" lIns="91425" tIns="91425" rIns="91425" bIns="91425" anchor="ctr" anchorCtr="0">
+            <a:noAutofit/>
+          </a:bodyPr>
           <a:lstStyle/>
           <a:p>
-            <a:pPr marL="0" indent="0" algn="ctr">
+            <a:pPr marL="0" lvl="0" indent="0" algn="l" rtl="0">
+              <a:spcBef>
+                <a:spcPts val="0"/>
+              </a:spcBef>
+              <a:spcAft>
+                <a:spcPts val="0"/>
+              </a:spcAft>
               <a:buNone/>
             </a:pPr>
             <a:r>
-              <a:rPr lang="en-US" sz="1200" i="1" dirty="0">
+              <a:rPr lang="en" sz="1300">
                 <a:solidFill>
-                  <a:srgbClr val="5A6B6E"/>
+                  <a:srgbClr val="444444"/>
                 </a:solidFill>
               </a:rPr>
-              <a:t>Wi-Fi factory deployment</a:t>
+              <a:t>•  MLO provides packet-level diversity — a dropped packet on one band is recovered on another without retransmission delay.</a:t>
             </a:r>
-            <a:endParaRPr lang="en-US" sz="1200" dirty="0"/>
-          </a:p>
-        </p:txBody>
-      </p:sp>
-      <p:pic>
-        <p:nvPicPr>
-          <p:cNvPr id="15" name="Picture 14">
-            <a:extLst>
-              <a:ext uri="{FF2B5EF4-FFF2-40B4-BE49-F238E27FC236}">
-                <a16:creationId xmlns:a16="http://schemas.microsoft.com/office/drawing/2014/main" id="{B44A44A6-D7A0-E025-4000-E126C070A500}"/>
-              </a:ext>
-            </a:extLst>
-          </p:cNvPr>
-          <p:cNvPicPr>
-            <a:picLocks noChangeAspect="1"/>
-          </p:cNvPicPr>
+            <a:endParaRPr sz="1300">
+              <a:solidFill>
+                <a:srgbClr val="444444"/>
+              </a:solidFill>
+            </a:endParaRPr>
+          </a:p>
+        </p:txBody>
+      </p:sp>
+      <p:sp>
+        <p:nvSpPr>
+          <p:cNvPr id="157" name="Google Shape;157;p19"/>
+          <p:cNvSpPr txBox="1"/>
           <p:nvPr/>
-        </p:nvPicPr>
-        <p:blipFill>
-          <a:blip r:embed="rId2"/>
-          <a:stretch>
-            <a:fillRect/>
-          </a:stretch>
-        </p:blipFill>
-        <p:spPr>
-          <a:xfrm>
-            <a:off x="4341897" y="1142420"/>
-            <a:ext cx="4497303" cy="3251272"/>
-          </a:xfrm>
-          <a:prstGeom prst="rect">
-            <a:avLst/>
-          </a:prstGeom>
-        </p:spPr>
-      </p:pic>
+        </p:nvSpPr>
+        <p:spPr>
+          <a:xfrm>
+            <a:off x="548640" y="3240405"/>
+            <a:ext cx="8046600" cy="617100"/>
+          </a:xfrm>
+          <a:prstGeom prst="rect">
+            <a:avLst/>
+          </a:prstGeom>
+          <a:noFill/>
+          <a:ln>
+            <a:noFill/>
+          </a:ln>
+        </p:spPr>
+        <p:txBody>
+          <a:bodyPr spcFirstLastPara="1" wrap="square" lIns="91425" tIns="91425" rIns="91425" bIns="91425" anchor="ctr" anchorCtr="0">
+            <a:noAutofit/>
+          </a:bodyPr>
+          <a:lstStyle/>
+          <a:p>
+            <a:pPr marL="0" lvl="0" indent="0" algn="l" rtl="0">
+              <a:spcBef>
+                <a:spcPts val="0"/>
+              </a:spcBef>
+              <a:spcAft>
+                <a:spcPts val="0"/>
+              </a:spcAft>
+              <a:buNone/>
+            </a:pPr>
+            <a:r>
+              <a:rPr lang="en" sz="1300">
+                <a:solidFill>
+                  <a:srgbClr val="444444"/>
+                </a:solidFill>
+              </a:rPr>
+              <a:t>•  IEEE 802.11be (Wi-Fi 7) is finalised. Draft 1.0 of Wi-Fi 8 (802.11bn) completed August 2025.</a:t>
+            </a:r>
+            <a:endParaRPr sz="1300">
+              <a:solidFill>
+                <a:srgbClr val="444444"/>
+              </a:solidFill>
+            </a:endParaRPr>
+          </a:p>
+        </p:txBody>
+      </p:sp>
+      <p:sp>
+        <p:nvSpPr>
+          <p:cNvPr id="158" name="Google Shape;158;p19"/>
+          <p:cNvSpPr txBox="1"/>
+          <p:nvPr/>
+        </p:nvSpPr>
+        <p:spPr>
+          <a:xfrm>
+            <a:off x="548640" y="3909060"/>
+            <a:ext cx="8046600" cy="617100"/>
+          </a:xfrm>
+          <a:prstGeom prst="rect">
+            <a:avLst/>
+          </a:prstGeom>
+          <a:noFill/>
+          <a:ln>
+            <a:noFill/>
+          </a:ln>
+        </p:spPr>
+        <p:txBody>
+          <a:bodyPr spcFirstLastPara="1" wrap="square" lIns="91425" tIns="91425" rIns="91425" bIns="91425" anchor="ctr" anchorCtr="0">
+            <a:noAutofit/>
+          </a:bodyPr>
+          <a:lstStyle/>
+          <a:p>
+            <a:pPr marL="0" lvl="0" indent="0" algn="l" rtl="0">
+              <a:spcBef>
+                <a:spcPts val="0"/>
+              </a:spcBef>
+              <a:spcAft>
+                <a:spcPts val="0"/>
+              </a:spcAft>
+              <a:buNone/>
+            </a:pPr>
+            <a:r>
+              <a:rPr lang="en" sz="1300">
+                <a:solidFill>
+                  <a:srgbClr val="444444"/>
+                </a:solidFill>
+              </a:rPr>
+              <a:t>•  Wi-Fi 8 targets deterministic performance and reliability rather than just higher throughput.</a:t>
+            </a:r>
+            <a:endParaRPr sz="1300">
+              <a:solidFill>
+                <a:srgbClr val="444444"/>
+              </a:solidFill>
+            </a:endParaRPr>
+          </a:p>
+        </p:txBody>
+      </p:sp>
     </p:spTree>
   </p:cSld>
   <p:clrMapOvr>
@@ -13565,7 +14069,7 @@
     </p:bg>
     <p:spTree>
       <p:nvGrpSpPr>
-        <p:cNvPr id="1" name=""/>
+        <p:cNvPr id="1" name="Shape 162"/>
         <p:cNvGrpSpPr/>
         <p:nvPr/>
       </p:nvGrpSpPr>
@@ -13579,558 +14083,368 @@
       </p:grpSpPr>
       <p:sp>
         <p:nvSpPr>
-          <p:cNvPr id="2" name="Text 0"/>
+          <p:cNvPr id="163" name="Google Shape;163;p20"/>
+          <p:cNvSpPr txBox="1"/>
+          <p:nvPr/>
+        </p:nvSpPr>
+        <p:spPr>
+          <a:xfrm>
+            <a:off x="365760" y="205740"/>
+            <a:ext cx="8412600" cy="668700"/>
+          </a:xfrm>
+          <a:prstGeom prst="rect">
+            <a:avLst/>
+          </a:prstGeom>
+          <a:noFill/>
+          <a:ln>
+            <a:noFill/>
+          </a:ln>
+        </p:spPr>
+        <p:txBody>
+          <a:bodyPr spcFirstLastPara="1" wrap="square" lIns="91425" tIns="91425" rIns="91425" bIns="91425" anchor="ctr" anchorCtr="0">
+            <a:noAutofit/>
+          </a:bodyPr>
+          <a:lstStyle/>
+          <a:p>
+            <a:pPr marL="0" lvl="0" indent="0" algn="l" rtl="0">
+              <a:spcBef>
+                <a:spcPts val="0"/>
+              </a:spcBef>
+              <a:spcAft>
+                <a:spcPts val="0"/>
+              </a:spcAft>
+              <a:buNone/>
+            </a:pPr>
+            <a:r>
+              <a:rPr lang="en" sz="2200" b="1">
+                <a:solidFill>
+                  <a:srgbClr val="1A56A0"/>
+                </a:solidFill>
+              </a:rPr>
+              <a:t>5.2  Private 5G Campus Networks</a:t>
+            </a:r>
+            <a:endParaRPr sz="2200" b="1">
+              <a:solidFill>
+                <a:srgbClr val="1A56A0"/>
+              </a:solidFill>
+            </a:endParaRPr>
+          </a:p>
+        </p:txBody>
+      </p:sp>
+      <p:sp>
+        <p:nvSpPr>
+          <p:cNvPr id="164" name="Google Shape;164;p20"/>
           <p:cNvSpPr/>
           <p:nvPr/>
         </p:nvSpPr>
         <p:spPr>
           <a:xfrm>
-            <a:off x="411480" y="256032"/>
-            <a:ext cx="8321040" cy="502920"/>
+            <a:off x="365760" y="900113"/>
+            <a:ext cx="8412600" cy="20700"/>
+          </a:xfrm>
+          <a:prstGeom prst="rect">
+            <a:avLst/>
+          </a:prstGeom>
+          <a:solidFill>
+            <a:srgbClr val="1A56A0"/>
+          </a:solidFill>
+          <a:ln>
+            <a:noFill/>
+          </a:ln>
+        </p:spPr>
+        <p:txBody>
+          <a:bodyPr spcFirstLastPara="1" wrap="square" lIns="91425" tIns="91425" rIns="91425" bIns="91425" anchor="ctr" anchorCtr="0">
+            <a:noAutofit/>
+          </a:bodyPr>
+          <a:lstStyle/>
+          <a:p>
+            <a:pPr marL="0" lvl="0" indent="0" algn="ctr" rtl="0">
+              <a:spcBef>
+                <a:spcPts val="0"/>
+              </a:spcBef>
+              <a:spcAft>
+                <a:spcPts val="0"/>
+              </a:spcAft>
+              <a:buNone/>
+            </a:pPr>
+            <a:endParaRPr/>
+          </a:p>
+        </p:txBody>
+      </p:sp>
+      <p:sp>
+        <p:nvSpPr>
+          <p:cNvPr id="165" name="Google Shape;165;p20"/>
+          <p:cNvSpPr txBox="1"/>
+          <p:nvPr/>
+        </p:nvSpPr>
+        <p:spPr>
+          <a:xfrm>
+            <a:off x="365760" y="1543050"/>
+            <a:ext cx="2377500" cy="565800"/>
           </a:xfrm>
           <a:prstGeom prst="rect">
             <a:avLst/>
           </a:prstGeom>
           <a:noFill/>
-          <a:ln/>
-        </p:spPr>
-        <p:txBody>
-          <a:bodyPr wrap="square" rtlCol="0" anchor="ctr"/>
+          <a:ln>
+            <a:noFill/>
+          </a:ln>
+        </p:spPr>
+        <p:txBody>
+          <a:bodyPr spcFirstLastPara="1" wrap="square" lIns="91425" tIns="91425" rIns="91425" bIns="91425" anchor="ctr" anchorCtr="0">
+            <a:noAutofit/>
+          </a:bodyPr>
           <a:lstStyle/>
           <a:p>
-            <a:pPr marL="0" indent="0">
+            <a:pPr marL="0" lvl="0" indent="0" algn="ctr" rtl="0">
+              <a:spcBef>
+                <a:spcPts val="0"/>
+              </a:spcBef>
+              <a:spcAft>
+                <a:spcPts val="0"/>
+              </a:spcAft>
               <a:buNone/>
             </a:pPr>
             <a:r>
-              <a:rPr lang="en-US" sz="2300" b="1" dirty="0">
-                <a:solidFill>
-                  <a:srgbClr val="F2A900"/>
-                </a:solidFill>
-                <a:latin typeface="Calibri" pitchFamily="34" charset="0"/>
-                <a:ea typeface="Calibri" pitchFamily="34" charset="-122"/>
-                <a:cs typeface="Calibri" pitchFamily="34" charset="-120"/>
-              </a:rPr>
-              <a:t>3.2  </a:t>
-            </a:r>
-            <a:r>
-              <a:rPr lang="en-US" sz="2300" b="1" dirty="0">
-                <a:solidFill>
-                  <a:srgbClr val="0F6E78"/>
-                </a:solidFill>
-                <a:latin typeface="Calibri" pitchFamily="34" charset="0"/>
-                <a:ea typeface="Calibri" pitchFamily="34" charset="-122"/>
-                <a:cs typeface="Calibri" pitchFamily="34" charset="-120"/>
-              </a:rPr>
-              <a:t>IEEE 802.15.4 / Zigbee</a:t>
-            </a:r>
-            <a:endParaRPr lang="en-US" sz="2300" dirty="0"/>
-          </a:p>
-        </p:txBody>
-      </p:sp>
-      <p:sp>
-        <p:nvSpPr>
-          <p:cNvPr id="3" name="Shape 1"/>
-          <p:cNvSpPr/>
-          <p:nvPr/>
-        </p:nvSpPr>
-        <p:spPr>
-          <a:xfrm>
-            <a:off x="411480" y="749808"/>
-            <a:ext cx="8321040" cy="22860"/>
-          </a:xfrm>
-          <a:prstGeom prst="rect">
-            <a:avLst/>
-          </a:prstGeom>
-          <a:solidFill>
-            <a:srgbClr val="0F6E78"/>
-          </a:solidFill>
-          <a:ln w="12700">
-            <a:solidFill>
-              <a:srgbClr val="0F6E78"/>
-            </a:solidFill>
-            <a:prstDash val="solid"/>
-          </a:ln>
-        </p:spPr>
-        <p:txBody>
-          <a:bodyPr/>
-          <a:lstStyle/>
-          <a:p>
-            <a:endParaRPr lang="LID4096"/>
-          </a:p>
-        </p:txBody>
-      </p:sp>
-      <p:sp>
-        <p:nvSpPr>
-          <p:cNvPr id="4" name="Text 2"/>
-          <p:cNvSpPr/>
-          <p:nvPr/>
-        </p:nvSpPr>
-        <p:spPr>
-          <a:xfrm>
-            <a:off x="457200" y="1051560"/>
-            <a:ext cx="3931920" cy="2377440"/>
-          </a:xfrm>
-          <a:prstGeom prst="rect">
-            <a:avLst/>
-          </a:prstGeom>
-          <a:noFill/>
-          <a:ln/>
-        </p:spPr>
-        <p:txBody>
-          <a:bodyPr wrap="square" rtlCol="0" anchor="ctr"/>
-          <a:lstStyle/>
-          <a:p>
-            <a:pPr marL="342900" indent="-342900">
-              <a:spcAft>
-                <a:spcPts val="1000"/>
-              </a:spcAft>
-              <a:buSzPct val="100000"/>
-              <a:buChar char="•"/>
-            </a:pPr>
-            <a:r>
-              <a:rPr lang="en-US" sz="1500" dirty="0">
-                <a:solidFill>
-                  <a:srgbClr val="243B40"/>
-                </a:solidFill>
-                <a:latin typeface="Calibri" pitchFamily="34" charset="0"/>
-                <a:ea typeface="Calibri" pitchFamily="34" charset="-122"/>
-                <a:cs typeface="Calibri" pitchFamily="34" charset="-120"/>
-              </a:rPr>
-              <a:t>Low-power wireless WPAN standard</a:t>
-            </a:r>
-            <a:endParaRPr lang="en-US" sz="1500" dirty="0"/>
-          </a:p>
-          <a:p>
-            <a:pPr marL="342900" indent="-342900">
-              <a:spcAft>
-                <a:spcPts val="1000"/>
-              </a:spcAft>
-              <a:buSzPct val="100000"/>
-              <a:buChar char="•"/>
-            </a:pPr>
-            <a:r>
-              <a:rPr lang="en-US" sz="1500" dirty="0">
-                <a:solidFill>
-                  <a:srgbClr val="243B40"/>
-                </a:solidFill>
-                <a:latin typeface="Calibri" pitchFamily="34" charset="0"/>
-                <a:ea typeface="Calibri" pitchFamily="34" charset="-122"/>
-                <a:cs typeface="Calibri" pitchFamily="34" charset="-120"/>
-              </a:rPr>
-              <a:t>Runs at 2.4 GHz, up to 250 kbps</a:t>
-            </a:r>
-            <a:endParaRPr lang="en-US" sz="1500" dirty="0"/>
-          </a:p>
-          <a:p>
-            <a:pPr marL="342900" indent="-342900">
-              <a:spcAft>
-                <a:spcPts val="1000"/>
-              </a:spcAft>
-              <a:buSzPct val="100000"/>
-              <a:buChar char="•"/>
-            </a:pPr>
-            <a:r>
-              <a:rPr lang="en-US" sz="1500" dirty="0">
-                <a:solidFill>
-                  <a:srgbClr val="243B40"/>
-                </a:solidFill>
-                <a:latin typeface="Calibri" pitchFamily="34" charset="0"/>
-                <a:ea typeface="Calibri" pitchFamily="34" charset="-122"/>
-                <a:cs typeface="Calibri" pitchFamily="34" charset="-120"/>
-              </a:rPr>
-              <a:t>Three roles: Coordinator, Router, End Device</a:t>
-            </a:r>
-            <a:endParaRPr lang="en-US" sz="1500" dirty="0"/>
-          </a:p>
-          <a:p>
-            <a:pPr marL="342900" indent="-342900">
-              <a:spcAft>
-                <a:spcPts val="1000"/>
-              </a:spcAft>
-              <a:buSzPct val="100000"/>
-              <a:buChar char="•"/>
-            </a:pPr>
-            <a:r>
-              <a:rPr lang="en-US" sz="1500" dirty="0">
-                <a:solidFill>
-                  <a:srgbClr val="243B40"/>
-                </a:solidFill>
-                <a:latin typeface="Calibri" pitchFamily="34" charset="0"/>
-                <a:ea typeface="Calibri" pitchFamily="34" charset="-122"/>
-                <a:cs typeface="Calibri" pitchFamily="34" charset="-120"/>
-              </a:rPr>
-              <a:t>Supports star, tree and mesh topologies</a:t>
-            </a:r>
-            <a:endParaRPr lang="en-US" sz="1500" dirty="0"/>
-          </a:p>
-          <a:p>
-            <a:pPr marL="342900" indent="-342900">
-              <a:spcAft>
-                <a:spcPts val="1000"/>
-              </a:spcAft>
-              <a:buSzPct val="100000"/>
-              <a:buChar char="•"/>
-            </a:pPr>
-            <a:r>
-              <a:rPr lang="en-US" sz="1500" dirty="0">
-                <a:solidFill>
-                  <a:srgbClr val="243B40"/>
-                </a:solidFill>
-                <a:latin typeface="Calibri" pitchFamily="34" charset="0"/>
-                <a:ea typeface="Calibri" pitchFamily="34" charset="-122"/>
-                <a:cs typeface="Calibri" pitchFamily="34" charset="-120"/>
-              </a:rPr>
-              <a:t>Battery life of 2 to 5 years</a:t>
-            </a:r>
-            <a:endParaRPr lang="en-US" sz="1500" dirty="0"/>
-          </a:p>
-        </p:txBody>
-      </p:sp>
-      <p:sp>
-        <p:nvSpPr>
-          <p:cNvPr id="5" name="Shape 3"/>
-          <p:cNvSpPr/>
-          <p:nvPr/>
-        </p:nvSpPr>
-        <p:spPr>
-          <a:xfrm>
-            <a:off x="457200" y="3703320"/>
-            <a:ext cx="914400" cy="310896"/>
-          </a:xfrm>
-          <a:prstGeom prst="roundRect">
-            <a:avLst>
-              <a:gd name="adj" fmla="val 50000"/>
-            </a:avLst>
-          </a:prstGeom>
-          <a:solidFill>
-            <a:srgbClr val="1C8C99"/>
-          </a:solidFill>
-          <a:ln w="12700">
-            <a:solidFill>
-              <a:srgbClr val="1C8C99"/>
-            </a:solidFill>
-            <a:prstDash val="solid"/>
-          </a:ln>
-        </p:spPr>
-        <p:txBody>
-          <a:bodyPr/>
-          <a:lstStyle/>
-          <a:p>
-            <a:endParaRPr lang="LID4096"/>
-          </a:p>
-        </p:txBody>
-      </p:sp>
-      <p:sp>
-        <p:nvSpPr>
-          <p:cNvPr id="6" name="Text 4"/>
-          <p:cNvSpPr/>
-          <p:nvPr/>
-        </p:nvSpPr>
-        <p:spPr>
-          <a:xfrm>
-            <a:off x="457200" y="3703320"/>
-            <a:ext cx="914400" cy="310896"/>
-          </a:xfrm>
-          <a:prstGeom prst="rect">
-            <a:avLst/>
-          </a:prstGeom>
-          <a:noFill/>
-          <a:ln/>
-        </p:spPr>
-        <p:txBody>
-          <a:bodyPr wrap="square" rtlCol="0" anchor="ctr"/>
-          <a:lstStyle/>
-          <a:p>
-            <a:pPr marL="0" indent="0" algn="ctr">
-              <a:buNone/>
-            </a:pPr>
-            <a:r>
-              <a:rPr lang="en-US" sz="1100" b="1" dirty="0">
+              <a:rPr lang="en" sz="1100">
                 <a:solidFill>
                   <a:srgbClr val="FFFFFF"/>
                 </a:solidFill>
               </a:rPr>
-              <a:t>PROS</a:t>
+              <a:t>of new private wireless</a:t>
             </a:r>
-            <a:endParaRPr lang="en-US" sz="1100" dirty="0"/>
-          </a:p>
-        </p:txBody>
-      </p:sp>
-      <p:sp>
-        <p:nvSpPr>
-          <p:cNvPr id="7" name="Text 5"/>
-          <p:cNvSpPr/>
-          <p:nvPr/>
-        </p:nvSpPr>
-        <p:spPr>
-          <a:xfrm>
-            <a:off x="1463040" y="3703320"/>
-            <a:ext cx="3017520" cy="310896"/>
-          </a:xfrm>
-          <a:prstGeom prst="rect">
-            <a:avLst/>
-          </a:prstGeom>
-          <a:noFill/>
-          <a:ln/>
-        </p:spPr>
-        <p:txBody>
-          <a:bodyPr wrap="square" rtlCol="0" anchor="ctr"/>
-          <a:lstStyle/>
-          <a:p>
-            <a:pPr marL="0" indent="0">
+            <a:endParaRPr sz="1100">
+              <a:solidFill>
+                <a:srgbClr val="FFFFFF"/>
+              </a:solidFill>
+            </a:endParaRPr>
+          </a:p>
+          <a:p>
+            <a:pPr marL="0" lvl="0" indent="0" algn="ctr" rtl="0">
+              <a:spcBef>
+                <a:spcPts val="0"/>
+              </a:spcBef>
+              <a:spcAft>
+                <a:spcPts val="0"/>
+              </a:spcAft>
               <a:buNone/>
             </a:pPr>
             <a:r>
-              <a:rPr lang="en-US" sz="1100" dirty="0">
-                <a:solidFill>
-                  <a:srgbClr val="5A6B6E"/>
-                </a:solidFill>
-              </a:rPr>
-              <a:t>Long battery life, low cost, self-healing mesh</a:t>
-            </a:r>
-            <a:endParaRPr lang="en-US" sz="1100" dirty="0"/>
-          </a:p>
-        </p:txBody>
-      </p:sp>
-      <p:sp>
-        <p:nvSpPr>
-          <p:cNvPr id="8" name="Shape 6"/>
-          <p:cNvSpPr/>
-          <p:nvPr/>
-        </p:nvSpPr>
-        <p:spPr>
-          <a:xfrm>
-            <a:off x="457200" y="4114800"/>
-            <a:ext cx="914400" cy="310896"/>
-          </a:xfrm>
-          <a:prstGeom prst="roundRect">
-            <a:avLst>
-              <a:gd name="adj" fmla="val 50000"/>
-            </a:avLst>
-          </a:prstGeom>
-          <a:solidFill>
-            <a:srgbClr val="F2A900"/>
-          </a:solidFill>
-          <a:ln w="12700">
-            <a:solidFill>
-              <a:srgbClr val="F2A900"/>
-            </a:solidFill>
-            <a:prstDash val="solid"/>
-          </a:ln>
-        </p:spPr>
-        <p:txBody>
-          <a:bodyPr/>
-          <a:lstStyle/>
-          <a:p>
-            <a:endParaRPr lang="LID4096"/>
-          </a:p>
-        </p:txBody>
-      </p:sp>
-      <p:sp>
-        <p:nvSpPr>
-          <p:cNvPr id="9" name="Text 7"/>
-          <p:cNvSpPr/>
-          <p:nvPr/>
-        </p:nvSpPr>
-        <p:spPr>
-          <a:xfrm>
-            <a:off x="457200" y="4114800"/>
-            <a:ext cx="914400" cy="310896"/>
-          </a:xfrm>
-          <a:prstGeom prst="rect">
-            <a:avLst/>
-          </a:prstGeom>
-          <a:noFill/>
-          <a:ln/>
-        </p:spPr>
-        <p:txBody>
-          <a:bodyPr wrap="square" rtlCol="0" anchor="ctr"/>
-          <a:lstStyle/>
-          <a:p>
-            <a:pPr marL="0" indent="0" algn="ctr">
-              <a:buNone/>
-            </a:pPr>
-            <a:r>
-              <a:rPr lang="en-US" sz="1100" b="1" dirty="0">
+              <a:rPr lang="en" sz="1100">
                 <a:solidFill>
                   <a:srgbClr val="FFFFFF"/>
                 </a:solidFill>
               </a:rPr>
-              <a:t>CONS</a:t>
+              <a:t>spend in 2025</a:t>
             </a:r>
-            <a:endParaRPr lang="en-US" sz="1100" dirty="0"/>
-          </a:p>
-        </p:txBody>
-      </p:sp>
-      <p:sp>
-        <p:nvSpPr>
-          <p:cNvPr id="10" name="Text 8"/>
-          <p:cNvSpPr/>
+            <a:endParaRPr sz="1100">
+              <a:solidFill>
+                <a:srgbClr val="FFFFFF"/>
+              </a:solidFill>
+            </a:endParaRPr>
+          </a:p>
+        </p:txBody>
+      </p:sp>
+      <p:sp>
+        <p:nvSpPr>
+          <p:cNvPr id="166" name="Google Shape;166;p20"/>
+          <p:cNvSpPr txBox="1"/>
           <p:nvPr/>
         </p:nvSpPr>
         <p:spPr>
           <a:xfrm>
-            <a:off x="1463040" y="4114800"/>
-            <a:ext cx="3017520" cy="310896"/>
+            <a:off x="548640" y="1748790"/>
+            <a:ext cx="8046600" cy="617100"/>
           </a:xfrm>
           <a:prstGeom prst="rect">
             <a:avLst/>
           </a:prstGeom>
           <a:noFill/>
-          <a:ln/>
-        </p:spPr>
-        <p:txBody>
-          <a:bodyPr wrap="square" rtlCol="0" anchor="ctr"/>
+          <a:ln>
+            <a:noFill/>
+          </a:ln>
+        </p:spPr>
+        <p:txBody>
+          <a:bodyPr spcFirstLastPara="1" wrap="square" lIns="91425" tIns="91425" rIns="91425" bIns="91425" anchor="ctr" anchorCtr="0">
+            <a:noAutofit/>
+          </a:bodyPr>
           <a:lstStyle/>
           <a:p>
-            <a:pPr marL="0" indent="0">
+            <a:pPr marL="0" lvl="0" indent="0" algn="l" rtl="0">
+              <a:spcBef>
+                <a:spcPts val="0"/>
+              </a:spcBef>
+              <a:spcAft>
+                <a:spcPts val="0"/>
+              </a:spcAft>
               <a:buNone/>
             </a:pPr>
             <a:r>
-              <a:rPr lang="en-US" sz="1100" dirty="0">
+              <a:rPr lang="en" sz="1300">
                 <a:solidFill>
-                  <a:srgbClr val="5A6B6E"/>
+                  <a:srgbClr val="444444"/>
                 </a:solidFill>
               </a:rPr>
-              <a:t>Low data rate, short range of 10 to 100 m</a:t>
+              <a:t>•  Companies build and manage their own 5G network instead of using public infrastructure.</a:t>
             </a:r>
-            <a:endParaRPr lang="en-US" sz="1100" dirty="0"/>
-          </a:p>
-        </p:txBody>
-      </p:sp>
-      <p:sp>
-        <p:nvSpPr>
-          <p:cNvPr id="12" name="Text 10"/>
-          <p:cNvSpPr/>
+            <a:endParaRPr sz="1300">
+              <a:solidFill>
+                <a:srgbClr val="444444"/>
+              </a:solidFill>
+            </a:endParaRPr>
+          </a:p>
+        </p:txBody>
+      </p:sp>
+      <p:sp>
+        <p:nvSpPr>
+          <p:cNvPr id="167" name="Google Shape;167;p20"/>
+          <p:cNvSpPr txBox="1"/>
           <p:nvPr/>
         </p:nvSpPr>
         <p:spPr>
           <a:xfrm>
-            <a:off x="4754880" y="2377440"/>
-            <a:ext cx="3931920" cy="457200"/>
+            <a:off x="548640" y="2417445"/>
+            <a:ext cx="8046600" cy="617100"/>
           </a:xfrm>
           <a:prstGeom prst="rect">
             <a:avLst/>
           </a:prstGeom>
           <a:noFill/>
-          <a:ln/>
-        </p:spPr>
-        <p:txBody>
-          <a:bodyPr wrap="square" rtlCol="0" anchor="ctr"/>
+          <a:ln>
+            <a:noFill/>
+          </a:ln>
+        </p:spPr>
+        <p:txBody>
+          <a:bodyPr spcFirstLastPara="1" wrap="square" lIns="91425" tIns="91425" rIns="91425" bIns="91425" anchor="ctr" anchorCtr="0">
+            <a:noAutofit/>
+          </a:bodyPr>
           <a:lstStyle/>
           <a:p>
-            <a:pPr marL="0" indent="0" algn="ctr">
+            <a:pPr marL="0" lvl="0" indent="0" algn="l" rtl="0">
+              <a:spcBef>
+                <a:spcPts val="0"/>
+              </a:spcBef>
+              <a:spcAft>
+                <a:spcPts val="0"/>
+              </a:spcAft>
               <a:buNone/>
             </a:pPr>
             <a:r>
-              <a:rPr lang="en-US" sz="1600" b="1" dirty="0">
+              <a:rPr lang="en" sz="1300">
                 <a:solidFill>
-                  <a:srgbClr val="1C8C99"/>
+                  <a:srgbClr val="444444"/>
                 </a:solidFill>
               </a:rPr>
-              <a:t>[ IMAGE ]</a:t>
+              <a:t>•  Full control over security, service levels, and spectrum allocation.</a:t>
             </a:r>
-            <a:endParaRPr lang="en-US" sz="1600" dirty="0"/>
-          </a:p>
-        </p:txBody>
-      </p:sp>
-      <p:sp>
-        <p:nvSpPr>
-          <p:cNvPr id="13" name="Text 11"/>
-          <p:cNvSpPr/>
+            <a:endParaRPr sz="1300">
+              <a:solidFill>
+                <a:srgbClr val="444444"/>
+              </a:solidFill>
+            </a:endParaRPr>
+          </a:p>
+        </p:txBody>
+      </p:sp>
+      <p:sp>
+        <p:nvSpPr>
+          <p:cNvPr id="168" name="Google Shape;168;p20"/>
+          <p:cNvSpPr txBox="1"/>
           <p:nvPr/>
         </p:nvSpPr>
         <p:spPr>
           <a:xfrm>
-            <a:off x="4754880" y="2834640"/>
-            <a:ext cx="3931920" cy="365760"/>
+            <a:off x="548640" y="3086100"/>
+            <a:ext cx="8046600" cy="617100"/>
           </a:xfrm>
           <a:prstGeom prst="rect">
             <a:avLst/>
           </a:prstGeom>
           <a:noFill/>
-          <a:ln/>
-        </p:spPr>
-        <p:txBody>
-          <a:bodyPr wrap="square" rtlCol="0" anchor="ctr"/>
+          <a:ln>
+            <a:noFill/>
+          </a:ln>
+        </p:spPr>
+        <p:txBody>
+          <a:bodyPr spcFirstLastPara="1" wrap="square" lIns="91425" tIns="91425" rIns="91425" bIns="91425" anchor="ctr" anchorCtr="0">
+            <a:noAutofit/>
+          </a:bodyPr>
           <a:lstStyle/>
           <a:p>
-            <a:pPr marL="0" indent="0" algn="ctr">
+            <a:pPr marL="0" lvl="0" indent="0" algn="l" rtl="0">
+              <a:spcBef>
+                <a:spcPts val="0"/>
+              </a:spcBef>
+              <a:spcAft>
+                <a:spcPts val="0"/>
+              </a:spcAft>
               <a:buNone/>
             </a:pPr>
             <a:r>
-              <a:rPr lang="en-US" sz="1200" i="1" dirty="0">
+              <a:rPr lang="en" sz="1300">
                 <a:solidFill>
-                  <a:srgbClr val="5A6B6E"/>
+                  <a:srgbClr val="444444"/>
                 </a:solidFill>
               </a:rPr>
-              <a:t>Zigbee mesh topology</a:t>
+              <a:t>•  Optimised for deterministic, high-density industrial environments such as factories.</a:t>
             </a:r>
-            <a:endParaRPr lang="en-US" sz="1200" dirty="0"/>
-          </a:p>
-        </p:txBody>
-      </p:sp>
-      <p:pic>
-        <p:nvPicPr>
-          <p:cNvPr id="17" name="Picture 16">
-            <a:extLst>
-              <a:ext uri="{FF2B5EF4-FFF2-40B4-BE49-F238E27FC236}">
-                <a16:creationId xmlns:a16="http://schemas.microsoft.com/office/drawing/2014/main" id="{663CC9E1-DB5B-4B4A-1204-28AC4B24230F}"/>
-              </a:ext>
-            </a:extLst>
-          </p:cNvPr>
-          <p:cNvPicPr>
-            <a:picLocks noChangeAspect="1"/>
-          </p:cNvPicPr>
+            <a:endParaRPr sz="1300">
+              <a:solidFill>
+                <a:srgbClr val="444444"/>
+              </a:solidFill>
+            </a:endParaRPr>
+          </a:p>
+        </p:txBody>
+      </p:sp>
+      <p:sp>
+        <p:nvSpPr>
+          <p:cNvPr id="169" name="Google Shape;169;p20"/>
+          <p:cNvSpPr txBox="1"/>
           <p:nvPr/>
-        </p:nvPicPr>
-        <p:blipFill>
-          <a:blip r:embed="rId2"/>
-          <a:stretch>
-            <a:fillRect/>
-          </a:stretch>
-        </p:blipFill>
-        <p:spPr>
-          <a:xfrm>
-            <a:off x="4389120" y="809481"/>
-            <a:ext cx="4222892" cy="2686680"/>
-          </a:xfrm>
-          <a:prstGeom prst="rect">
-            <a:avLst/>
-          </a:prstGeom>
-        </p:spPr>
-      </p:pic>
-      <p:pic>
-        <p:nvPicPr>
-          <p:cNvPr id="21" name="Picture 20">
-            <a:extLst>
-              <a:ext uri="{FF2B5EF4-FFF2-40B4-BE49-F238E27FC236}">
-                <a16:creationId xmlns:a16="http://schemas.microsoft.com/office/drawing/2014/main" id="{9D2CB063-A753-5430-E1EC-B30CDA9656D2}"/>
-              </a:ext>
-            </a:extLst>
-          </p:cNvPr>
-          <p:cNvPicPr>
-            <a:picLocks noChangeAspect="1"/>
-          </p:cNvPicPr>
-          <p:nvPr/>
-        </p:nvPicPr>
-        <p:blipFill>
-          <a:blip r:embed="rId3"/>
-          <a:srcRect l="9315" r="6176" b="6204"/>
-          <a:stretch>
-            <a:fillRect/>
-          </a:stretch>
-        </p:blipFill>
-        <p:spPr>
-          <a:xfrm>
-            <a:off x="5014173" y="3496161"/>
-            <a:ext cx="2142187" cy="1599664"/>
-          </a:xfrm>
-          <a:prstGeom prst="rect">
-            <a:avLst/>
-          </a:prstGeom>
-        </p:spPr>
-      </p:pic>
+        </p:nvSpPr>
+        <p:spPr>
+          <a:xfrm>
+            <a:off x="548640" y="3754755"/>
+            <a:ext cx="8046600" cy="617100"/>
+          </a:xfrm>
+          <a:prstGeom prst="rect">
+            <a:avLst/>
+          </a:prstGeom>
+          <a:noFill/>
+          <a:ln>
+            <a:noFill/>
+          </a:ln>
+        </p:spPr>
+        <p:txBody>
+          <a:bodyPr spcFirstLastPara="1" wrap="square" lIns="91425" tIns="91425" rIns="91425" bIns="91425" anchor="ctr" anchorCtr="0">
+            <a:noAutofit/>
+          </a:bodyPr>
+          <a:lstStyle/>
+          <a:p>
+            <a:pPr marL="0" lvl="0" indent="0" algn="l" rtl="0">
+              <a:spcBef>
+                <a:spcPts val="0"/>
+              </a:spcBef>
+              <a:spcAft>
+                <a:spcPts val="0"/>
+              </a:spcAft>
+              <a:buNone/>
+            </a:pPr>
+            <a:r>
+              <a:rPr lang="en" sz="1300">
+                <a:solidFill>
+                  <a:srgbClr val="444444"/>
+                </a:solidFill>
+              </a:rPr>
+              <a:t>•  Complements industrial Ethernet and Wi-Fi in new (greenfield) factory deployments.</a:t>
+            </a:r>
+            <a:endParaRPr sz="1300">
+              <a:solidFill>
+                <a:srgbClr val="444444"/>
+              </a:solidFill>
+            </a:endParaRPr>
+          </a:p>
+        </p:txBody>
+      </p:sp>
     </p:spTree>
   </p:cSld>
   <p:clrMapOvr>
@@ -14152,7 +14466,7 @@
     </p:bg>
     <p:spTree>
       <p:nvGrpSpPr>
-        <p:cNvPr id="1" name=""/>
+        <p:cNvPr id="1" name="Shape 173"/>
         <p:cNvGrpSpPr/>
         <p:nvPr/>
       </p:nvGrpSpPr>
@@ -14166,558 +14480,244 @@
       </p:grpSpPr>
       <p:sp>
         <p:nvSpPr>
-          <p:cNvPr id="2" name="Text 0"/>
+          <p:cNvPr id="174" name="Google Shape;174;p21"/>
+          <p:cNvSpPr txBox="1"/>
+          <p:nvPr/>
+        </p:nvSpPr>
+        <p:spPr>
+          <a:xfrm>
+            <a:off x="365760" y="205740"/>
+            <a:ext cx="8412600" cy="668700"/>
+          </a:xfrm>
+          <a:prstGeom prst="rect">
+            <a:avLst/>
+          </a:prstGeom>
+          <a:noFill/>
+          <a:ln>
+            <a:noFill/>
+          </a:ln>
+        </p:spPr>
+        <p:txBody>
+          <a:bodyPr spcFirstLastPara="1" wrap="square" lIns="91425" tIns="91425" rIns="91425" bIns="91425" anchor="ctr" anchorCtr="0">
+            <a:noAutofit/>
+          </a:bodyPr>
+          <a:lstStyle/>
+          <a:p>
+            <a:pPr marL="0" lvl="0" indent="0" algn="l" rtl="0">
+              <a:spcBef>
+                <a:spcPts val="0"/>
+              </a:spcBef>
+              <a:spcAft>
+                <a:spcPts val="0"/>
+              </a:spcAft>
+              <a:buNone/>
+            </a:pPr>
+            <a:r>
+              <a:rPr lang="en" sz="2200" b="1">
+                <a:solidFill>
+                  <a:srgbClr val="1A56A0"/>
+                </a:solidFill>
+              </a:rPr>
+              <a:t>5.3  Wireless Time-Sensitive Networking</a:t>
+            </a:r>
+            <a:endParaRPr sz="2200" b="1">
+              <a:solidFill>
+                <a:srgbClr val="1A56A0"/>
+              </a:solidFill>
+            </a:endParaRPr>
+          </a:p>
+        </p:txBody>
+      </p:sp>
+      <p:sp>
+        <p:nvSpPr>
+          <p:cNvPr id="175" name="Google Shape;175;p21"/>
           <p:cNvSpPr/>
           <p:nvPr/>
         </p:nvSpPr>
         <p:spPr>
           <a:xfrm>
-            <a:off x="411480" y="256032"/>
-            <a:ext cx="8321040" cy="502920"/>
+            <a:off x="365760" y="900113"/>
+            <a:ext cx="8412600" cy="20700"/>
+          </a:xfrm>
+          <a:prstGeom prst="rect">
+            <a:avLst/>
+          </a:prstGeom>
+          <a:solidFill>
+            <a:srgbClr val="1A56A0"/>
+          </a:solidFill>
+          <a:ln>
+            <a:noFill/>
+          </a:ln>
+        </p:spPr>
+        <p:txBody>
+          <a:bodyPr spcFirstLastPara="1" wrap="square" lIns="91425" tIns="91425" rIns="91425" bIns="91425" anchor="ctr" anchorCtr="0">
+            <a:noAutofit/>
+          </a:bodyPr>
+          <a:lstStyle/>
+          <a:p>
+            <a:pPr marL="0" lvl="0" indent="0" algn="ctr" rtl="0">
+              <a:spcBef>
+                <a:spcPts val="0"/>
+              </a:spcBef>
+              <a:spcAft>
+                <a:spcPts val="0"/>
+              </a:spcAft>
+              <a:buNone/>
+            </a:pPr>
+            <a:endParaRPr/>
+          </a:p>
+        </p:txBody>
+      </p:sp>
+      <p:sp>
+        <p:nvSpPr>
+          <p:cNvPr id="176" name="Google Shape;176;p21"/>
+          <p:cNvSpPr txBox="1"/>
+          <p:nvPr/>
+        </p:nvSpPr>
+        <p:spPr>
+          <a:xfrm>
+            <a:off x="429015" y="1419960"/>
+            <a:ext cx="8046600" cy="617100"/>
           </a:xfrm>
           <a:prstGeom prst="rect">
             <a:avLst/>
           </a:prstGeom>
           <a:noFill/>
-          <a:ln/>
-        </p:spPr>
-        <p:txBody>
-          <a:bodyPr wrap="square" rtlCol="0" anchor="ctr"/>
+          <a:ln>
+            <a:noFill/>
+          </a:ln>
+        </p:spPr>
+        <p:txBody>
+          <a:bodyPr spcFirstLastPara="1" wrap="square" lIns="91425" tIns="91425" rIns="91425" bIns="91425" anchor="ctr" anchorCtr="0">
+            <a:noAutofit/>
+          </a:bodyPr>
           <a:lstStyle/>
           <a:p>
-            <a:pPr marL="0" indent="0">
+            <a:pPr marL="0" lvl="0" indent="0" algn="l" rtl="0">
+              <a:spcBef>
+                <a:spcPts val="0"/>
+              </a:spcBef>
+              <a:spcAft>
+                <a:spcPts val="0"/>
+              </a:spcAft>
               <a:buNone/>
             </a:pPr>
             <a:r>
-              <a:rPr lang="en-US" sz="2300" b="1" dirty="0">
+              <a:rPr lang="en" sz="1300">
                 <a:solidFill>
-                  <a:srgbClr val="F2A900"/>
-                </a:solidFill>
-                <a:latin typeface="Calibri" pitchFamily="34" charset="0"/>
-                <a:ea typeface="Calibri" pitchFamily="34" charset="-122"/>
-                <a:cs typeface="Calibri" pitchFamily="34" charset="-120"/>
-              </a:rPr>
-              <a:t>3.3  </a:t>
-            </a:r>
-            <a:r>
-              <a:rPr lang="en-US" sz="2300" b="1" dirty="0">
-                <a:solidFill>
-                  <a:srgbClr val="0F6E78"/>
-                </a:solidFill>
-                <a:latin typeface="Calibri" pitchFamily="34" charset="0"/>
-                <a:ea typeface="Calibri" pitchFamily="34" charset="-122"/>
-                <a:cs typeface="Calibri" pitchFamily="34" charset="-120"/>
-              </a:rPr>
-              <a:t>5G New Radio (NR)</a:t>
-            </a:r>
-            <a:endParaRPr lang="en-US" sz="2300" dirty="0"/>
-          </a:p>
-        </p:txBody>
-      </p:sp>
-      <p:sp>
-        <p:nvSpPr>
-          <p:cNvPr id="3" name="Shape 1"/>
-          <p:cNvSpPr/>
-          <p:nvPr/>
-        </p:nvSpPr>
-        <p:spPr>
-          <a:xfrm>
-            <a:off x="411480" y="749808"/>
-            <a:ext cx="8321040" cy="22860"/>
-          </a:xfrm>
-          <a:prstGeom prst="rect">
-            <a:avLst/>
-          </a:prstGeom>
-          <a:solidFill>
-            <a:srgbClr val="0F6E78"/>
-          </a:solidFill>
-          <a:ln w="12700">
-            <a:solidFill>
-              <a:srgbClr val="0F6E78"/>
-            </a:solidFill>
-            <a:prstDash val="solid"/>
-          </a:ln>
-        </p:spPr>
-        <p:txBody>
-          <a:bodyPr/>
-          <a:lstStyle/>
-          <a:p>
-            <a:endParaRPr lang="LID4096"/>
-          </a:p>
-        </p:txBody>
-      </p:sp>
-      <p:sp>
-        <p:nvSpPr>
-          <p:cNvPr id="4" name="Text 2"/>
-          <p:cNvSpPr/>
-          <p:nvPr/>
-        </p:nvSpPr>
-        <p:spPr>
-          <a:xfrm>
-            <a:off x="457200" y="1051560"/>
-            <a:ext cx="3931920" cy="2377440"/>
-          </a:xfrm>
-          <a:prstGeom prst="rect">
-            <a:avLst/>
-          </a:prstGeom>
-          <a:noFill/>
-          <a:ln/>
-        </p:spPr>
-        <p:txBody>
-          <a:bodyPr wrap="square" rtlCol="0" anchor="ctr"/>
-          <a:lstStyle/>
-          <a:p>
-            <a:pPr marL="342900" indent="-342900">
-              <a:spcAft>
-                <a:spcPts val="1000"/>
-              </a:spcAft>
-              <a:buSzPct val="100000"/>
-              <a:buChar char="•"/>
-            </a:pPr>
-            <a:r>
-              <a:rPr lang="en-US" sz="1500" dirty="0">
-                <a:solidFill>
-                  <a:srgbClr val="243B40"/>
-                </a:solidFill>
-                <a:latin typeface="Calibri" pitchFamily="34" charset="0"/>
-                <a:ea typeface="Calibri" pitchFamily="34" charset="-122"/>
-                <a:cs typeface="Calibri" pitchFamily="34" charset="-120"/>
-              </a:rPr>
-              <a:t>Standardised by 3GPP, uses licensed bands</a:t>
-            </a:r>
-            <a:endParaRPr lang="en-US" sz="1500" dirty="0"/>
-          </a:p>
-          <a:p>
-            <a:pPr marL="342900" indent="-342900">
-              <a:spcAft>
-                <a:spcPts val="1000"/>
-              </a:spcAft>
-              <a:buSzPct val="100000"/>
-              <a:buChar char="•"/>
-            </a:pPr>
-            <a:r>
-              <a:rPr lang="en-US" sz="1500" dirty="0">
-                <a:solidFill>
-                  <a:srgbClr val="243B40"/>
-                </a:solidFill>
-                <a:latin typeface="Calibri" pitchFamily="34" charset="0"/>
-                <a:ea typeface="Calibri" pitchFamily="34" charset="-122"/>
-                <a:cs typeface="Calibri" pitchFamily="34" charset="-120"/>
-              </a:rPr>
-              <a:t>Three classes: eMBB, mMTC, URLLC</a:t>
-            </a:r>
-            <a:endParaRPr lang="en-US" sz="1500" dirty="0"/>
-          </a:p>
-          <a:p>
-            <a:pPr marL="342900" indent="-342900">
-              <a:spcAft>
-                <a:spcPts val="1000"/>
-              </a:spcAft>
-              <a:buSzPct val="100000"/>
-              <a:buChar char="•"/>
-            </a:pPr>
-            <a:r>
-              <a:rPr lang="en-US" sz="1500" dirty="0">
-                <a:solidFill>
-                  <a:srgbClr val="243B40"/>
-                </a:solidFill>
-                <a:latin typeface="Calibri" pitchFamily="34" charset="0"/>
-                <a:ea typeface="Calibri" pitchFamily="34" charset="-122"/>
-                <a:cs typeface="Calibri" pitchFamily="34" charset="-120"/>
-              </a:rPr>
-              <a:t>URLLC reaches under 1 ms at 99.999%</a:t>
-            </a:r>
-            <a:endParaRPr lang="en-US" sz="1500" dirty="0"/>
-          </a:p>
-          <a:p>
-            <a:pPr marL="342900" indent="-342900">
-              <a:spcAft>
-                <a:spcPts val="1000"/>
-              </a:spcAft>
-              <a:buSzPct val="100000"/>
-              <a:buChar char="•"/>
-            </a:pPr>
-            <a:r>
-              <a:rPr lang="en-US" sz="1500" dirty="0">
-                <a:solidFill>
-                  <a:srgbClr val="243B40"/>
-                </a:solidFill>
-                <a:latin typeface="Calibri" pitchFamily="34" charset="0"/>
-                <a:ea typeface="Calibri" pitchFamily="34" charset="-122"/>
-                <a:cs typeface="Calibri" pitchFamily="34" charset="-120"/>
-              </a:rPr>
-              <a:t>Private campus networks kept on site</a:t>
-            </a:r>
-            <a:endParaRPr lang="en-US" sz="1500" dirty="0"/>
-          </a:p>
-          <a:p>
-            <a:pPr marL="342900" indent="-342900">
-              <a:spcAft>
-                <a:spcPts val="1000"/>
-              </a:spcAft>
-              <a:buSzPct val="100000"/>
-              <a:buChar char="•"/>
-            </a:pPr>
-            <a:r>
-              <a:rPr lang="en-US" sz="1500" dirty="0">
-                <a:solidFill>
-                  <a:srgbClr val="243B40"/>
-                </a:solidFill>
-                <a:latin typeface="Calibri" pitchFamily="34" charset="0"/>
-                <a:ea typeface="Calibri" pitchFamily="34" charset="-122"/>
-                <a:cs typeface="Calibri" pitchFamily="34" charset="-120"/>
-              </a:rPr>
-              <a:t>Acts as a TSN bridge from Release 16</a:t>
-            </a:r>
-            <a:endParaRPr lang="en-US" sz="1500" dirty="0"/>
-          </a:p>
-        </p:txBody>
-      </p:sp>
-      <p:sp>
-        <p:nvSpPr>
-          <p:cNvPr id="5" name="Shape 3"/>
-          <p:cNvSpPr/>
-          <p:nvPr/>
-        </p:nvSpPr>
-        <p:spPr>
-          <a:xfrm>
-            <a:off x="4102032" y="4177370"/>
-            <a:ext cx="914400" cy="310896"/>
-          </a:xfrm>
-          <a:prstGeom prst="roundRect">
-            <a:avLst>
-              <a:gd name="adj" fmla="val 50000"/>
-            </a:avLst>
-          </a:prstGeom>
-          <a:solidFill>
-            <a:srgbClr val="1C8C99"/>
-          </a:solidFill>
-          <a:ln w="12700">
-            <a:solidFill>
-              <a:srgbClr val="1C8C99"/>
-            </a:solidFill>
-            <a:prstDash val="solid"/>
-          </a:ln>
-        </p:spPr>
-        <p:txBody>
-          <a:bodyPr/>
-          <a:lstStyle/>
-          <a:p>
-            <a:endParaRPr lang="LID4096"/>
-          </a:p>
-        </p:txBody>
-      </p:sp>
-      <p:sp>
-        <p:nvSpPr>
-          <p:cNvPr id="6" name="Text 4"/>
-          <p:cNvSpPr/>
-          <p:nvPr/>
-        </p:nvSpPr>
-        <p:spPr>
-          <a:xfrm>
-            <a:off x="4102032" y="4177370"/>
-            <a:ext cx="914400" cy="310896"/>
-          </a:xfrm>
-          <a:prstGeom prst="rect">
-            <a:avLst/>
-          </a:prstGeom>
-          <a:noFill/>
-          <a:ln/>
-        </p:spPr>
-        <p:txBody>
-          <a:bodyPr wrap="square" rtlCol="0" anchor="ctr"/>
-          <a:lstStyle/>
-          <a:p>
-            <a:pPr marL="0" indent="0" algn="ctr">
-              <a:buNone/>
-            </a:pPr>
-            <a:r>
-              <a:rPr lang="en-US" sz="1100" b="1" dirty="0">
-                <a:solidFill>
-                  <a:srgbClr val="FFFFFF"/>
+                  <a:srgbClr val="444444"/>
                 </a:solidFill>
               </a:rPr>
-              <a:t>PROS</a:t>
+              <a:t>•  TSN ensures data arrives at the exact required time — critical for real-time control.</a:t>
             </a:r>
-            <a:endParaRPr lang="en-US" sz="1100" dirty="0"/>
-          </a:p>
-        </p:txBody>
-      </p:sp>
-      <p:sp>
-        <p:nvSpPr>
-          <p:cNvPr id="7" name="Text 5"/>
-          <p:cNvSpPr/>
+            <a:endParaRPr sz="1300">
+              <a:solidFill>
+                <a:srgbClr val="444444"/>
+              </a:solidFill>
+            </a:endParaRPr>
+          </a:p>
+        </p:txBody>
+      </p:sp>
+      <p:sp>
+        <p:nvSpPr>
+          <p:cNvPr id="177" name="Google Shape;177;p21"/>
+          <p:cNvSpPr txBox="1"/>
           <p:nvPr/>
         </p:nvSpPr>
         <p:spPr>
           <a:xfrm>
-            <a:off x="5035321" y="4232953"/>
-            <a:ext cx="3017520" cy="310896"/>
+            <a:off x="429015" y="2175590"/>
+            <a:ext cx="8046600" cy="617100"/>
           </a:xfrm>
           <a:prstGeom prst="rect">
             <a:avLst/>
           </a:prstGeom>
           <a:noFill/>
-          <a:ln/>
-        </p:spPr>
-        <p:txBody>
-          <a:bodyPr wrap="square" rtlCol="0" anchor="ctr"/>
+          <a:ln>
+            <a:noFill/>
+          </a:ln>
+        </p:spPr>
+        <p:txBody>
+          <a:bodyPr spcFirstLastPara="1" wrap="square" lIns="91425" tIns="91425" rIns="91425" bIns="91425" anchor="ctr" anchorCtr="0">
+            <a:noAutofit/>
+          </a:bodyPr>
           <a:lstStyle/>
           <a:p>
-            <a:pPr marL="0" indent="0">
+            <a:pPr marL="0" lvl="0" indent="0" algn="l" rtl="0">
+              <a:spcBef>
+                <a:spcPts val="0"/>
+              </a:spcBef>
+              <a:spcAft>
+                <a:spcPts val="0"/>
+              </a:spcAft>
               <a:buNone/>
             </a:pPr>
             <a:r>
-              <a:rPr lang="en-US" sz="1100" dirty="0">
+              <a:rPr lang="en" sz="1300">
                 <a:solidFill>
-                  <a:srgbClr val="5A6B6E"/>
+                  <a:srgbClr val="444444"/>
                 </a:solidFill>
               </a:rPr>
-              <a:t>Licensed spectrum, deterministic, private networks</a:t>
+              <a:t>•  Closes the "last mile" gap: wireless now matches wired PROFINET and EtherCAT guarantees.</a:t>
             </a:r>
-            <a:endParaRPr lang="en-US" sz="1100" dirty="0"/>
-          </a:p>
-        </p:txBody>
-      </p:sp>
-      <p:sp>
-        <p:nvSpPr>
-          <p:cNvPr id="8" name="Shape 6"/>
-          <p:cNvSpPr/>
+            <a:endParaRPr sz="1300">
+              <a:solidFill>
+                <a:srgbClr val="444444"/>
+              </a:solidFill>
+            </a:endParaRPr>
+          </a:p>
+        </p:txBody>
+      </p:sp>
+      <p:sp>
+        <p:nvSpPr>
+          <p:cNvPr id="178" name="Google Shape;178;p21"/>
+          <p:cNvSpPr txBox="1"/>
           <p:nvPr/>
         </p:nvSpPr>
         <p:spPr>
           <a:xfrm>
-            <a:off x="4102032" y="4588850"/>
-            <a:ext cx="914400" cy="310896"/>
-          </a:xfrm>
-          <a:prstGeom prst="roundRect">
-            <a:avLst>
-              <a:gd name="adj" fmla="val 50000"/>
-            </a:avLst>
-          </a:prstGeom>
-          <a:solidFill>
-            <a:srgbClr val="F2A900"/>
-          </a:solidFill>
-          <a:ln w="12700">
-            <a:solidFill>
-              <a:srgbClr val="F2A900"/>
-            </a:solidFill>
-            <a:prstDash val="solid"/>
+            <a:off x="472515" y="2895958"/>
+            <a:ext cx="8046600" cy="617100"/>
+          </a:xfrm>
+          <a:prstGeom prst="rect">
+            <a:avLst/>
+          </a:prstGeom>
+          <a:noFill/>
+          <a:ln>
+            <a:noFill/>
           </a:ln>
         </p:spPr>
         <p:txBody>
-          <a:bodyPr/>
+          <a:bodyPr spcFirstLastPara="1" wrap="square" lIns="91425" tIns="91425" rIns="91425" bIns="91425" anchor="ctr" anchorCtr="0">
+            <a:noAutofit/>
+          </a:bodyPr>
           <a:lstStyle/>
           <a:p>
-            <a:endParaRPr lang="LID4096"/>
-          </a:p>
-        </p:txBody>
-      </p:sp>
-      <p:sp>
-        <p:nvSpPr>
-          <p:cNvPr id="9" name="Text 7"/>
-          <p:cNvSpPr/>
-          <p:nvPr/>
-        </p:nvSpPr>
-        <p:spPr>
-          <a:xfrm>
-            <a:off x="4102032" y="4588850"/>
-            <a:ext cx="914400" cy="310896"/>
-          </a:xfrm>
-          <a:prstGeom prst="rect">
-            <a:avLst/>
-          </a:prstGeom>
-          <a:noFill/>
-          <a:ln/>
-        </p:spPr>
-        <p:txBody>
-          <a:bodyPr wrap="square" rtlCol="0" anchor="ctr"/>
-          <a:lstStyle/>
-          <a:p>
-            <a:pPr marL="0" indent="0" algn="ctr">
+            <a:pPr marL="0" lvl="0" indent="0" algn="l" rtl="0">
+              <a:spcBef>
+                <a:spcPts val="0"/>
+              </a:spcBef>
+              <a:spcAft>
+                <a:spcPts val="0"/>
+              </a:spcAft>
               <a:buNone/>
             </a:pPr>
             <a:r>
-              <a:rPr lang="en-US" sz="1100" b="1" dirty="0">
+              <a:rPr lang="en" sz="1300">
                 <a:solidFill>
-                  <a:srgbClr val="FFFFFF"/>
+                  <a:srgbClr val="444444"/>
                 </a:solidFill>
               </a:rPr>
-              <a:t>CONS</a:t>
+              <a:t>•  A single TSN scheduler can drive both wired and wireless robot axes at the same time.</a:t>
             </a:r>
-            <a:endParaRPr lang="en-US" sz="1100" dirty="0"/>
-          </a:p>
-        </p:txBody>
-      </p:sp>
-      <p:sp>
-        <p:nvSpPr>
-          <p:cNvPr id="10" name="Text 8"/>
-          <p:cNvSpPr/>
-          <p:nvPr/>
-        </p:nvSpPr>
-        <p:spPr>
-          <a:xfrm>
-            <a:off x="5016432" y="4599432"/>
-            <a:ext cx="3017520" cy="310896"/>
-          </a:xfrm>
-          <a:prstGeom prst="rect">
-            <a:avLst/>
-          </a:prstGeom>
-          <a:noFill/>
-          <a:ln/>
-        </p:spPr>
-        <p:txBody>
-          <a:bodyPr wrap="square" rtlCol="0" anchor="ctr"/>
-          <a:lstStyle/>
-          <a:p>
-            <a:pPr marL="0" indent="0">
-              <a:buNone/>
-            </a:pPr>
-            <a:r>
-              <a:rPr lang="en-US" sz="1100" dirty="0">
-                <a:solidFill>
-                  <a:srgbClr val="5A6B6E"/>
-                </a:solidFill>
-              </a:rPr>
-              <a:t>Costly, complex, power-hungry</a:t>
-            </a:r>
-            <a:endParaRPr lang="en-US" sz="1100" dirty="0"/>
-          </a:p>
-        </p:txBody>
-      </p:sp>
-      <p:sp>
-        <p:nvSpPr>
-          <p:cNvPr id="12" name="Text 10"/>
-          <p:cNvSpPr/>
-          <p:nvPr/>
-        </p:nvSpPr>
-        <p:spPr>
-          <a:xfrm>
-            <a:off x="4754880" y="2377440"/>
-            <a:ext cx="3931920" cy="457200"/>
-          </a:xfrm>
-          <a:prstGeom prst="rect">
-            <a:avLst/>
-          </a:prstGeom>
-          <a:noFill/>
-          <a:ln/>
-        </p:spPr>
-        <p:txBody>
-          <a:bodyPr wrap="square" rtlCol="0" anchor="ctr"/>
-          <a:lstStyle/>
-          <a:p>
-            <a:pPr marL="0" indent="0" algn="ctr">
-              <a:buNone/>
-            </a:pPr>
-            <a:r>
-              <a:rPr lang="en-US" sz="1600" b="1" dirty="0">
-                <a:solidFill>
-                  <a:srgbClr val="1C8C99"/>
-                </a:solidFill>
-              </a:rPr>
-              <a:t>[ IMAGE ]</a:t>
-            </a:r>
-            <a:endParaRPr lang="en-US" sz="1600" dirty="0"/>
-          </a:p>
-        </p:txBody>
-      </p:sp>
-      <p:sp>
-        <p:nvSpPr>
-          <p:cNvPr id="13" name="Text 11"/>
-          <p:cNvSpPr/>
-          <p:nvPr/>
-        </p:nvSpPr>
-        <p:spPr>
-          <a:xfrm>
-            <a:off x="4754880" y="2834640"/>
-            <a:ext cx="3931920" cy="365760"/>
-          </a:xfrm>
-          <a:prstGeom prst="rect">
-            <a:avLst/>
-          </a:prstGeom>
-          <a:noFill/>
-          <a:ln/>
-        </p:spPr>
-        <p:txBody>
-          <a:bodyPr wrap="square" rtlCol="0" anchor="ctr"/>
-          <a:lstStyle/>
-          <a:p>
-            <a:pPr marL="0" indent="0" algn="ctr">
-              <a:buNone/>
-            </a:pPr>
-            <a:r>
-              <a:rPr lang="en-US" sz="1200" i="1" dirty="0">
-                <a:solidFill>
-                  <a:srgbClr val="5A6B6E"/>
-                </a:solidFill>
-              </a:rPr>
-              <a:t>Private 5G campus network</a:t>
-            </a:r>
-            <a:endParaRPr lang="en-US" sz="1200" dirty="0"/>
-          </a:p>
-        </p:txBody>
-      </p:sp>
-      <p:pic>
-        <p:nvPicPr>
-          <p:cNvPr id="15" name="Picture 14">
-            <a:extLst>
-              <a:ext uri="{FF2B5EF4-FFF2-40B4-BE49-F238E27FC236}">
-                <a16:creationId xmlns:a16="http://schemas.microsoft.com/office/drawing/2014/main" id="{E92D6B4C-C39B-0CAB-876F-80841433349D}"/>
-              </a:ext>
-            </a:extLst>
-          </p:cNvPr>
-          <p:cNvPicPr>
-            <a:picLocks noChangeAspect="1"/>
-          </p:cNvPicPr>
-          <p:nvPr/>
-        </p:nvPicPr>
-        <p:blipFill>
-          <a:blip r:embed="rId2"/>
-          <a:stretch>
-            <a:fillRect/>
-          </a:stretch>
-        </p:blipFill>
-        <p:spPr>
-          <a:xfrm>
-            <a:off x="4348376" y="1382332"/>
-            <a:ext cx="4271344" cy="2553935"/>
-          </a:xfrm>
-          <a:prstGeom prst="rect">
-            <a:avLst/>
-          </a:prstGeom>
-        </p:spPr>
-      </p:pic>
-      <p:pic>
-        <p:nvPicPr>
-          <p:cNvPr id="16" name="Picture 15" descr="5G new radio fixed wireless access portfolio introduced | Electronics360">
-            <a:extLst>
-              <a:ext uri="{FF2B5EF4-FFF2-40B4-BE49-F238E27FC236}">
-                <a16:creationId xmlns:a16="http://schemas.microsoft.com/office/drawing/2014/main" id="{63608C8A-354F-ABB3-3CE2-F97A1CFD8CFC}"/>
-              </a:ext>
-            </a:extLst>
-          </p:cNvPr>
-          <p:cNvPicPr>
-            <a:picLocks noChangeAspect="1"/>
-          </p:cNvPicPr>
-          <p:nvPr/>
-        </p:nvPicPr>
-        <p:blipFill>
-          <a:blip r:embed="rId3"/>
-          <a:srcRect l="27411" t="7198" r="19975" b="4925"/>
-          <a:stretch>
-            <a:fillRect/>
-          </a:stretch>
-        </p:blipFill>
-        <p:spPr>
-          <a:xfrm rot="21441899">
-            <a:off x="976344" y="3087595"/>
-            <a:ext cx="2201523" cy="1890086"/>
-          </a:xfrm>
-          <a:prstGeom prst="rect">
-            <a:avLst/>
-          </a:prstGeom>
-        </p:spPr>
-      </p:pic>
+            <a:endParaRPr sz="1300">
+              <a:solidFill>
+                <a:srgbClr val="444444"/>
+              </a:solidFill>
+            </a:endParaRPr>
+          </a:p>
+        </p:txBody>
+      </p:sp>
     </p:spTree>
   </p:cSld>
   <p:clrMapOvr>
